--- a/Tanfolyamok_prezentacio.pptx
+++ b/Tanfolyamok_prezentacio.pptx
@@ -3185,7 +3185,7 @@
                 </a:solidFill>
                 <a:latin typeface="Segoe UI"/>
               </a:rPr>
-              <a:t>Tanfolyam-kezelo webalkalmazas</a:t>
+              <a:t>Tanfolyam-kezelő webalkalmazás</a:t>
             </a:r>
           </a:p>
         </p:txBody>
@@ -3220,7 +3220,7 @@
                 </a:solidFill>
                 <a:latin typeface="Segoe UI"/>
               </a:rPr>
-              <a:t>Pogany Frigyes Technikum  |  Budapest, 2026</a:t>
+              <a:t>Pogány Frigyes Technikum  |  Budapest, 2026</a:t>
             </a:r>
           </a:p>
         </p:txBody>
@@ -3255,7 +3255,7 @@
                 </a:solidFill>
                 <a:latin typeface="Segoe UI"/>
               </a:rPr>
-              <a:t>Andorfer Vendel  |  Babai Mate  |  Varga Matyas</a:t>
+              <a:t>Andorfer Vendel  |  Babai Máté  |  Varga Mátyás</a:t>
             </a:r>
           </a:p>
         </p:txBody>
@@ -3316,7 +3316,7 @@
                 </a:solidFill>
                 <a:latin typeface="Segoe UI"/>
               </a:rPr>
-              <a:t>Tanfolyamok - Pogany Frigyes Technikum</a:t>
+              <a:t>Tanfolyamok - Pogány Frigyes Technikum</a:t>
             </a:r>
           </a:p>
         </p:txBody>
@@ -3386,7 +3386,7 @@
                 </a:solidFill>
                 <a:latin typeface="Segoe UI"/>
               </a:rPr>
-              <a:t>4. Hogyan tarolja az adatokat?</a:t>
+              <a:t>4. Hogyan tárolja az adatokat?</a:t>
             </a:r>
           </a:p>
         </p:txBody>
@@ -3439,7 +3439,7 @@
                 </a:solidFill>
                 <a:latin typeface="Segoe UI"/>
               </a:rPr>
-              <a:t>Tanfolyamok - Pogany Frigyes Technikum</a:t>
+              <a:t>Tanfolyamok - Pogány Frigyes Technikum</a:t>
             </a:r>
           </a:p>
         </p:txBody>
@@ -3509,7 +3509,7 @@
                 </a:solidFill>
                 <a:latin typeface="Segoe UI"/>
               </a:rPr>
-              <a:t>Harom tablazat az adatbazisban</a:t>
+              <a:t>Három táblázat az adatbázisban</a:t>
             </a:r>
           </a:p>
         </p:txBody>
@@ -3545,7 +3545,7 @@
                 <a:latin typeface="Segoe UI"/>
               </a:rPr>
               <a:t>kepzesek
-(tanfolyam tipusok)</a:t>
+(tanfolyam típusok)</a:t>
             </a:r>
           </a:p>
           <a:p>
@@ -3569,7 +3569,7 @@
                 </a:solidFill>
                 <a:latin typeface="Segoe UI"/>
               </a:rPr>
-              <a:t>kid - sorszam</a:t>
+              <a:t>kid - sorszám</a:t>
             </a:r>
           </a:p>
           <a:p>
@@ -3581,7 +3581,7 @@
                 </a:solidFill>
                 <a:latin typeface="Segoe UI"/>
               </a:rPr>
-              <a:t>knev - nev</a:t>
+              <a:t>knév - név</a:t>
             </a:r>
           </a:p>
           <a:p>
@@ -3593,7 +3593,7 @@
                 </a:solidFill>
                 <a:latin typeface="Segoe UI"/>
               </a:rPr>
-              <a:t>oraszam - hany oras</a:t>
+              <a:t>óraszám - hány órás</a:t>
             </a:r>
           </a:p>
         </p:txBody>
@@ -3653,7 +3653,7 @@
                 </a:solidFill>
                 <a:latin typeface="Segoe UI"/>
               </a:rPr>
-              <a:t>csid - sorszam</a:t>
+              <a:t>csid - sorszám</a:t>
             </a:r>
           </a:p>
           <a:p>
@@ -3665,7 +3665,7 @@
                 </a:solidFill>
                 <a:latin typeface="Segoe UI"/>
               </a:rPr>
-              <a:t>kid - melyik kepzes</a:t>
+              <a:t>kid - melyik képzés</a:t>
             </a:r>
           </a:p>
           <a:p>
@@ -3677,7 +3677,7 @@
                 </a:solidFill>
                 <a:latin typeface="Segoe UI"/>
               </a:rPr>
-              <a:t>indulas - datum</a:t>
+              <a:t>indulás - dátum</a:t>
             </a:r>
           </a:p>
           <a:p>
@@ -3749,7 +3749,7 @@
                 </a:solidFill>
                 <a:latin typeface="Segoe UI"/>
               </a:rPr>
-              <a:t>jid - sorszam</a:t>
+              <a:t>jid - sorszám</a:t>
             </a:r>
           </a:p>
           <a:p>
@@ -3773,7 +3773,7 @@
                 </a:solidFill>
                 <a:latin typeface="Segoe UI"/>
               </a:rPr>
-              <a:t>nev, szul.nev, szul.ido</a:t>
+              <a:t>név, szül.név, szül.idő</a:t>
             </a:r>
           </a:p>
           <a:p>
@@ -3832,7 +3832,7 @@
                 </a:solidFill>
                 <a:latin typeface="Segoe UI"/>
               </a:rPr>
-              <a:t>Kapcsolatok: Egy kepzeshez tobb csoport tartozhat, egy csoporthoz tobb jelentkezo.</a:t>
+              <a:t>Kapcsolatok: Egy képzéshez több csoport tartozhat, egy csoporthoz több jelentkező.</a:t>
             </a:r>
           </a:p>
           <a:p>
@@ -3844,7 +3844,7 @@
                 </a:solidFill>
                 <a:latin typeface="Segoe UI"/>
               </a:rPr>
-              <a:t>Fontos: egy csoportba maximum 8 fo jelentkezhet.</a:t>
+              <a:t>Fontos: egy csoportba maximum 8 fő jelentkezhet.</a:t>
             </a:r>
           </a:p>
         </p:txBody>
@@ -3905,7 +3905,7 @@
                 </a:solidFill>
                 <a:latin typeface="Segoe UI"/>
               </a:rPr>
-              <a:t>Tanfolyamok - Pogany Frigyes Technikum</a:t>
+              <a:t>Tanfolyamok - Pogány Frigyes Technikum</a:t>
             </a:r>
           </a:p>
         </p:txBody>
@@ -3975,7 +3975,7 @@
                 </a:solidFill>
                 <a:latin typeface="Segoe UI"/>
               </a:rPr>
-              <a:t>5. Mit lat a latogato?</a:t>
+              <a:t>5. Mit lát a látogató?</a:t>
             </a:r>
           </a:p>
         </p:txBody>
@@ -4028,7 +4028,7 @@
                 </a:solidFill>
                 <a:latin typeface="Segoe UI"/>
               </a:rPr>
-              <a:t>Tanfolyamok - Pogany Frigyes Technikum</a:t>
+              <a:t>Tanfolyamok - Pogány Frigyes Technikum</a:t>
             </a:r>
           </a:p>
         </p:txBody>
@@ -4098,7 +4098,7 @@
                 </a:solidFill>
                 <a:latin typeface="Segoe UI"/>
               </a:rPr>
-              <a:t>A fooldal felulrol lefele</a:t>
+              <a:t>A főoldal felülről lefele</a:t>
             </a:r>
           </a:p>
         </p:txBody>
@@ -4133,7 +4133,7 @@
                 </a:solidFill>
                 <a:latin typeface="Segoe UI"/>
               </a:rPr>
-              <a:t>Fejlec + menu</a:t>
+              <a:t>Fejléc + menü</a:t>
             </a:r>
           </a:p>
           <a:p>
@@ -4145,7 +4145,7 @@
                 </a:solidFill>
                 <a:latin typeface="Segoe UI"/>
               </a:rPr>
-              <a:t>   Iskola neve, navigacios linkek</a:t>
+              <a:t>   Iskola neve, navigációs linkek</a:t>
             </a:r>
           </a:p>
           <a:p>
@@ -4169,7 +4169,7 @@
                 </a:solidFill>
                 <a:latin typeface="Segoe UI"/>
               </a:rPr>
-              <a:t>3 tanfolyam kartya</a:t>
+              <a:t>3 tanfolyam kártya</a:t>
             </a:r>
           </a:p>
           <a:p>
@@ -4181,7 +4181,7 @@
                 </a:solidFill>
                 <a:latin typeface="Segoe UI"/>
               </a:rPr>
-              <a:t>   Kep, leiras, "Reszletek" link</a:t>
+              <a:t>   Kép, leírás, "Részletek" link</a:t>
             </a:r>
           </a:p>
           <a:p>
@@ -4205,7 +4205,7 @@
                 </a:solidFill>
                 <a:latin typeface="Segoe UI"/>
               </a:rPr>
-              <a:t>Indulo csoportok tabla</a:t>
+              <a:t>Induló csoportok tábla</a:t>
             </a:r>
           </a:p>
           <a:p>
@@ -4217,7 +4217,7 @@
                 </a:solidFill>
                 <a:latin typeface="Segoe UI"/>
               </a:rPr>
-              <a:t>   Automatikusan frissul: melyik kepzes mikor, hol, mennyi a szabad hely</a:t>
+              <a:t>   Automatikusan frissül: melyik képzés mikor, hol, mennyi a szabad hely</a:t>
             </a:r>
           </a:p>
           <a:p>
@@ -4241,7 +4241,7 @@
                 </a:solidFill>
                 <a:latin typeface="Segoe UI"/>
               </a:rPr>
-              <a:t>Jelentkezesi urlap</a:t>
+              <a:t>Jelentkezési űrlap</a:t>
             </a:r>
           </a:p>
           <a:p>
@@ -4253,7 +4253,7 @@
                 </a:solidFill>
                 <a:latin typeface="Segoe UI"/>
               </a:rPr>
-              <a:t>   Adatok kitoltese + "Jelentkezem" gomb</a:t>
+              <a:t>   Adatok kitöltése + "Jelentkezem" gomb</a:t>
             </a:r>
           </a:p>
           <a:p>
@@ -4277,7 +4277,7 @@
                 </a:solidFill>
                 <a:latin typeface="Segoe UI"/>
               </a:rPr>
-              <a:t>Admin belepes</a:t>
+              <a:t>Admin belépés</a:t>
             </a:r>
           </a:p>
           <a:p>
@@ -4289,7 +4289,7 @@
                 </a:solidFill>
                 <a:latin typeface="Segoe UI"/>
               </a:rPr>
-              <a:t>   Jelszo mezo + gomb (az oldal aljan)</a:t>
+              <a:t>   Jelszó mező + gomb (az oldal alján)</a:t>
             </a:r>
           </a:p>
           <a:p>
@@ -4354,7 +4354,7 @@
                 </a:solidFill>
                 <a:latin typeface="Segoe UI"/>
               </a:rPr>
-              <a:t>Tanfolyamok - Pogany Frigyes Technikum</a:t>
+              <a:t>Tanfolyamok - Pogány Frigyes Technikum</a:t>
             </a:r>
           </a:p>
         </p:txBody>
@@ -4424,7 +4424,7 @@
                 </a:solidFill>
                 <a:latin typeface="Segoe UI"/>
               </a:rPr>
-              <a:t>Jelentkezesi folyamat</a:t>
+              <a:t>Jelentkezési folyamat</a:t>
             </a:r>
           </a:p>
         </p:txBody>
@@ -4459,7 +4459,7 @@
                 </a:solidFill>
                 <a:latin typeface="Segoe UI"/>
               </a:rPr>
-              <a:t>1. A latogato kitolti az urlapot</a:t>
+              <a:t>1. A látogató kitölti az űrlapot</a:t>
             </a:r>
           </a:p>
           <a:p>
@@ -4483,7 +4483,7 @@
                 </a:solidFill>
                 <a:latin typeface="Segoe UI"/>
               </a:rPr>
-              <a:t>3. A bongeszo ellenorzi az adatokat (kor, hosszak, pipa)</a:t>
+              <a:t>3. A böngésző ellenőrzi az adatokat (kor, hosszak, pipa)</a:t>
             </a:r>
           </a:p>
           <a:p>
@@ -4495,7 +4495,7 @@
                 </a:solidFill>
                 <a:latin typeface="Segoe UI"/>
               </a:rPr>
-              <a:t>4. Ha rendben van, elkuldi a szervernek</a:t>
+              <a:t>4. Ha rendben van, elküldi a szervernek</a:t>
             </a:r>
           </a:p>
           <a:p>
@@ -4507,7 +4507,7 @@
                 </a:solidFill>
                 <a:latin typeface="Segoe UI"/>
               </a:rPr>
-              <a:t>5. A szerver is ellenoriz: letezik a csoport? van hely? uj e-mail?</a:t>
+              <a:t>5. A szerver is ellenőriz: létezik a csoport? van hely? új e-mail?</a:t>
             </a:r>
           </a:p>
           <a:p>
@@ -4519,7 +4519,7 @@
                 </a:solidFill>
                 <a:latin typeface="Segoe UI"/>
               </a:rPr>
-              <a:t>6. Ha minden stimmel: a jelentkezest elmenti</a:t>
+              <a:t>6. Ha minden stimmel: a jelentkezést elmenti</a:t>
             </a:r>
           </a:p>
           <a:p>
@@ -4531,7 +4531,7 @@
                 </a:solidFill>
                 <a:latin typeface="Segoe UI"/>
               </a:rPr>
-              <a:t>7. A felhasznalo "Sikeres jelentkezes!" uzenetet kap</a:t>
+              <a:t>7. A felhasznalo "Sikeres jelentkezes!" üzenetet kap</a:t>
             </a:r>
           </a:p>
           <a:p>
@@ -4555,7 +4555,7 @@
                 </a:solidFill>
                 <a:latin typeface="Segoe UI"/>
               </a:rPr>
-              <a:t>Ha valami nem stimmel, a felhasznalo hibaUzenetet kap (pl. "A csoport megtelt").</a:t>
+              <a:t>Ha valami nem stimmel, a felhasználó hibaüzenetet kap (pl. "A csoport megtelt").</a:t>
             </a:r>
           </a:p>
         </p:txBody>
@@ -4616,7 +4616,7 @@
                 </a:solidFill>
                 <a:latin typeface="Segoe UI"/>
               </a:rPr>
-              <a:t>Tanfolyamok - Pogany Frigyes Technikum</a:t>
+              <a:t>Tanfolyamok - Pogány Frigyes Technikum</a:t>
             </a:r>
           </a:p>
         </p:txBody>
@@ -4686,7 +4686,7 @@
                 </a:solidFill>
                 <a:latin typeface="Segoe UI"/>
               </a:rPr>
-              <a:t>6. Mit lat az admin?</a:t>
+              <a:t>6. Mit lát az admin?</a:t>
             </a:r>
           </a:p>
         </p:txBody>
@@ -4739,7 +4739,7 @@
                 </a:solidFill>
                 <a:latin typeface="Segoe UI"/>
               </a:rPr>
-              <a:t>Tanfolyamok - Pogany Frigyes Technikum</a:t>
+              <a:t>Tanfolyamok - Pogány Frigyes Technikum</a:t>
             </a:r>
           </a:p>
         </p:txBody>
@@ -4809,7 +4809,7 @@
                 </a:solidFill>
                 <a:latin typeface="Segoe UI"/>
               </a:rPr>
-              <a:t>Az admin felulet oldalai</a:t>
+              <a:t>Az admin felület oldalai</a:t>
             </a:r>
           </a:p>
         </p:txBody>
@@ -4856,7 +4856,7 @@
                 </a:solidFill>
                 <a:latin typeface="Segoe UI"/>
               </a:rPr>
-              <a:t>A fooldal aljan megadja a jelszot</a:t>
+              <a:t>A főoldal alján megadja a jelszót</a:t>
             </a:r>
           </a:p>
           <a:p>
@@ -4868,7 +4868,7 @@
                 </a:solidFill>
                 <a:latin typeface="Segoe UI"/>
               </a:rPr>
-              <a:t>Ha helyes: 1 oras "igazolvanyt" kap</a:t>
+              <a:t>Ha helyes: 1 órás "igazolvanyt" kap</a:t>
             </a:r>
           </a:p>
           <a:p>
@@ -4880,7 +4880,7 @@
                 </a:solidFill>
                 <a:latin typeface="Segoe UI"/>
               </a:rPr>
-              <a:t>Atiranyitja a csoportok oldalra</a:t>
+              <a:t>Átirányítja a csoportok oldalra</a:t>
             </a:r>
           </a:p>
           <a:p>
@@ -4916,7 +4916,7 @@
                 </a:solidFill>
                 <a:latin typeface="Segoe UI"/>
               </a:rPr>
-              <a:t>Az igazolvany torlesre kerul</a:t>
+              <a:t>Az igazolvány törlésre kerül</a:t>
             </a:r>
           </a:p>
           <a:p>
@@ -4928,7 +4928,7 @@
                 </a:solidFill>
                 <a:latin typeface="Segoe UI"/>
               </a:rPr>
-              <a:t>Visszakerul a fooldra</a:t>
+              <a:t>Visszakerül a főoldalra</a:t>
             </a:r>
           </a:p>
         </p:txBody>
@@ -4963,7 +4963,7 @@
                 </a:solidFill>
                 <a:latin typeface="Segoe UI"/>
               </a:rPr>
-              <a:t>Elerheto oldalak:</a:t>
+              <a:t>Elérhető oldalak:</a:t>
             </a:r>
           </a:p>
           <a:p>
@@ -4999,7 +4999,7 @@
                 </a:solidFill>
                 <a:latin typeface="Segoe UI"/>
               </a:rPr>
-              <a:t>  Osszes csoport listaja + uj felvetele</a:t>
+              <a:t>  Összes csoport listája + új felvétele</a:t>
             </a:r>
           </a:p>
           <a:p>
@@ -5023,7 +5023,7 @@
                 </a:solidFill>
                 <a:latin typeface="Segoe UI"/>
               </a:rPr>
-              <a:t>  Egy csoport jelentkezoi + uj felvetele</a:t>
+              <a:t>  Egy csoport jelentkezői + új felvétele</a:t>
             </a:r>
           </a:p>
           <a:p>
@@ -5035,7 +5035,7 @@
                 </a:solidFill>
                 <a:latin typeface="Segoe UI"/>
               </a:rPr>
-              <a:t>Csoport modositas</a:t>
+              <a:t>Csoport módosítás</a:t>
             </a:r>
           </a:p>
           <a:p>
@@ -5047,7 +5047,7 @@
                 </a:solidFill>
                 <a:latin typeface="Segoe UI"/>
               </a:rPr>
-              <a:t>  Meglevo csoport adatainak szerkesztese</a:t>
+              <a:t>  Meglévő csoport adatainak szerkesztése</a:t>
             </a:r>
           </a:p>
           <a:p>
@@ -5059,7 +5059,7 @@
                 </a:solidFill>
                 <a:latin typeface="Segoe UI"/>
               </a:rPr>
-              <a:t>Jelentkezo modositas</a:t>
+              <a:t>Jelentkező módosítás</a:t>
             </a:r>
           </a:p>
           <a:p>
@@ -5071,7 +5071,7 @@
                 </a:solidFill>
                 <a:latin typeface="Segoe UI"/>
               </a:rPr>
-              <a:t>  Egy szemely adatainak szerkesztese</a:t>
+              <a:t>  Egy személy adatainak szerkesztése</a:t>
             </a:r>
           </a:p>
           <a:p>
@@ -5083,7 +5083,7 @@
                 </a:solidFill>
                 <a:latin typeface="Segoe UI"/>
               </a:rPr>
-              <a:t>Admin sugo</a:t>
+              <a:t>Admin súgó</a:t>
             </a:r>
           </a:p>
           <a:p>
@@ -5095,7 +5095,7 @@
                 </a:solidFill>
                 <a:latin typeface="Segoe UI"/>
               </a:rPr>
-              <a:t>  Hasznalati utmutato</a:t>
+              <a:t>  Használati útmutató</a:t>
             </a:r>
           </a:p>
         </p:txBody>
@@ -5156,7 +5156,7 @@
                 </a:solidFill>
                 <a:latin typeface="Segoe UI"/>
               </a:rPr>
-              <a:t>Tanfolyamok - Pogany Frigyes Technikum</a:t>
+              <a:t>Tanfolyamok - Pogány Frigyes Technikum</a:t>
             </a:r>
           </a:p>
         </p:txBody>
@@ -5226,7 +5226,7 @@
                 </a:solidFill>
                 <a:latin typeface="Segoe UI"/>
               </a:rPr>
-              <a:t>7. Hogyan kommunikal a felulet a szerverrel?</a:t>
+              <a:t>7. Hogyan kommunikál a felület a szerverrel?</a:t>
             </a:r>
           </a:p>
         </p:txBody>
@@ -5279,7 +5279,7 @@
                 </a:solidFill>
                 <a:latin typeface="Segoe UI"/>
               </a:rPr>
-              <a:t>Tanfolyamok - Pogany Frigyes Technikum</a:t>
+              <a:t>Tanfolyamok - Pogány Frigyes Technikum</a:t>
             </a:r>
           </a:p>
         </p:txBody>
@@ -5349,7 +5349,7 @@
                 </a:solidFill>
                 <a:latin typeface="Segoe UI"/>
               </a:rPr>
-              <a:t>Vegpontok: a szerver "ajtoi"</a:t>
+              <a:t>Végpontok: a szerver "ajtoi"</a:t>
             </a:r>
           </a:p>
         </p:txBody>
@@ -5384,7 +5384,7 @@
                 </a:solidFill>
                 <a:latin typeface="Segoe UI"/>
               </a:rPr>
-              <a:t>Nyilvanos (barki eleri):</a:t>
+              <a:t>Nyilvános (bárki eléri):</a:t>
             </a:r>
           </a:p>
           <a:p>
@@ -5408,7 +5408,7 @@
                 </a:solidFill>
                 <a:latin typeface="Segoe UI"/>
               </a:rPr>
-              <a:t>Csoportok listaja</a:t>
+              <a:t>Csoportok listája</a:t>
             </a:r>
           </a:p>
           <a:p>
@@ -5420,7 +5420,7 @@
                 </a:solidFill>
                 <a:latin typeface="Segoe UI"/>
               </a:rPr>
-              <a:t>  A meg el nem indult csoportokat adja vissza</a:t>
+              <a:t>  A még el nem indult csoportokat adja vissza</a:t>
             </a:r>
           </a:p>
           <a:p>
@@ -5456,7 +5456,7 @@
                 </a:solidFill>
                 <a:latin typeface="Segoe UI"/>
               </a:rPr>
-              <a:t>  A jelentkezo adatait rogziti</a:t>
+              <a:t>  A jelentkező adatait rögzíti</a:t>
             </a:r>
           </a:p>
           <a:p>
@@ -5468,7 +5468,7 @@
                 </a:solidFill>
                 <a:latin typeface="Segoe UI"/>
               </a:rPr>
-              <a:t>  Ellenorzi: van hely? uj e-mail? letezik a csoport?</a:t>
+              <a:t>  Ellenőrzi: van hely? új e-mail? létezik a csoport?</a:t>
             </a:r>
           </a:p>
         </p:txBody>
@@ -5503,7 +5503,7 @@
                 </a:solidFill>
                 <a:latin typeface="Segoe UI"/>
               </a:rPr>
-              <a:t>Admin (csak belepve):</a:t>
+              <a:t>Admin (csak belépve):</a:t>
             </a:r>
           </a:p>
           <a:p>
@@ -5527,7 +5527,7 @@
                 </a:solidFill>
                 <a:latin typeface="Segoe UI"/>
               </a:rPr>
-              <a:t>Bejelentkezes (jelszo ellen. + token)</a:t>
+              <a:t>Bejelentkezés (jelszó ellen. + token)</a:t>
             </a:r>
           </a:p>
           <a:p>
@@ -5539,7 +5539,7 @@
                 </a:solidFill>
                 <a:latin typeface="Segoe UI"/>
               </a:rPr>
-              <a:t>Osszes csoport listaja</a:t>
+              <a:t>Összes csoport listája</a:t>
             </a:r>
           </a:p>
           <a:p>
@@ -5551,7 +5551,7 @@
                 </a:solidFill>
                 <a:latin typeface="Segoe UI"/>
               </a:rPr>
-              <a:t>Uj csoport hozzaadasa</a:t>
+              <a:t>Új csoport hozzáadása</a:t>
             </a:r>
           </a:p>
           <a:p>
@@ -5563,7 +5563,7 @@
                 </a:solidFill>
                 <a:latin typeface="Segoe UI"/>
               </a:rPr>
-              <a:t>Csoport adatainak lekerese</a:t>
+              <a:t>Csoport adatainak lekérése</a:t>
             </a:r>
           </a:p>
           <a:p>
@@ -5575,7 +5575,7 @@
                 </a:solidFill>
                 <a:latin typeface="Segoe UI"/>
               </a:rPr>
-              <a:t>Csoport modositasa</a:t>
+              <a:t>Csoport módosítása</a:t>
             </a:r>
           </a:p>
           <a:p>
@@ -5587,7 +5587,7 @@
                 </a:solidFill>
                 <a:latin typeface="Segoe UI"/>
               </a:rPr>
-              <a:t>Csoport torlese (csak ha ures)</a:t>
+              <a:t>Csoport törlése (csak ha üres)</a:t>
             </a:r>
           </a:p>
           <a:p>
@@ -5599,7 +5599,7 @@
                 </a:solidFill>
                 <a:latin typeface="Segoe UI"/>
               </a:rPr>
-              <a:t>Egy csoport jelentkezoi</a:t>
+              <a:t>Egy csoport jelentkezői</a:t>
             </a:r>
           </a:p>
           <a:p>
@@ -5611,7 +5611,7 @@
                 </a:solidFill>
                 <a:latin typeface="Segoe UI"/>
               </a:rPr>
-              <a:t>Jelentkezo adatai</a:t>
+              <a:t>Jelentkező adatai</a:t>
             </a:r>
           </a:p>
           <a:p>
@@ -5623,7 +5623,7 @@
                 </a:solidFill>
                 <a:latin typeface="Segoe UI"/>
               </a:rPr>
-              <a:t>Jelentkezo modositasa</a:t>
+              <a:t>Jelentkező módosítása</a:t>
             </a:r>
           </a:p>
           <a:p>
@@ -5635,7 +5635,7 @@
                 </a:solidFill>
                 <a:latin typeface="Segoe UI"/>
               </a:rPr>
-              <a:t>Jelentkezo torlese</a:t>
+              <a:t>Jelentkező törlése</a:t>
             </a:r>
           </a:p>
         </p:txBody>
@@ -5696,7 +5696,7 @@
                 </a:solidFill>
                 <a:latin typeface="Segoe UI"/>
               </a:rPr>
-              <a:t>Tanfolyamok - Pogany Frigyes Technikum</a:t>
+              <a:t>Tanfolyamok - Pogány Frigyes Technikum</a:t>
             </a:r>
           </a:p>
         </p:txBody>
@@ -5766,7 +5766,7 @@
                 </a:solidFill>
                 <a:latin typeface="Segoe UI"/>
               </a:rPr>
-              <a:t>8. Hogyan vedett a rendszer?</a:t>
+              <a:t>8. Hogyan védett a rendszer?</a:t>
             </a:r>
           </a:p>
         </p:txBody>
@@ -5819,7 +5819,7 @@
                 </a:solidFill>
                 <a:latin typeface="Segoe UI"/>
               </a:rPr>
-              <a:t>Tanfolyamok - Pogany Frigyes Technikum</a:t>
+              <a:t>Tanfolyamok - Pogány Frigyes Technikum</a:t>
             </a:r>
           </a:p>
         </p:txBody>
@@ -5924,7 +5924,7 @@
                 </a:solidFill>
                 <a:latin typeface="Segoe UI"/>
               </a:rPr>
-              <a:t>1.  Mirol szol a projekt?</a:t>
+              <a:t>1.  Miről szól a projekt?</a:t>
             </a:r>
           </a:p>
           <a:p>
@@ -5936,7 +5936,7 @@
                 </a:solidFill>
                 <a:latin typeface="Segoe UI"/>
               </a:rPr>
-              <a:t>2.  Milyen eszkozokkel keszult?</a:t>
+              <a:t>2.  Milyen eszközökkel készült?</a:t>
             </a:r>
           </a:p>
           <a:p>
@@ -5948,7 +5948,7 @@
                 </a:solidFill>
                 <a:latin typeface="Segoe UI"/>
               </a:rPr>
-              <a:t>3.  Hogyan epul fel?</a:t>
+              <a:t>3.  Hogyan épül fel?</a:t>
             </a:r>
           </a:p>
           <a:p>
@@ -5960,7 +5960,7 @@
                 </a:solidFill>
                 <a:latin typeface="Segoe UI"/>
               </a:rPr>
-              <a:t>4.  Hogyan tarolja az adatokat?</a:t>
+              <a:t>4.  Hogyan tárolja az adatokat?</a:t>
             </a:r>
           </a:p>
           <a:p>
@@ -5972,7 +5972,7 @@
                 </a:solidFill>
                 <a:latin typeface="Segoe UI"/>
               </a:rPr>
-              <a:t>5.  Mit lat a latogato?</a:t>
+              <a:t>5.  Mit lát a látogató?</a:t>
             </a:r>
           </a:p>
           <a:p>
@@ -5984,7 +5984,7 @@
                 </a:solidFill>
                 <a:latin typeface="Segoe UI"/>
               </a:rPr>
-              <a:t>6.  Mit lat az admin?</a:t>
+              <a:t>6.  Mit lát az admin?</a:t>
             </a:r>
           </a:p>
         </p:txBody>
@@ -6019,7 +6019,7 @@
                 </a:solidFill>
                 <a:latin typeface="Segoe UI"/>
               </a:rPr>
-              <a:t>7.  Hogyan kommunikal a felulet a szerverrel?</a:t>
+              <a:t>7.  Hogyan kommunikál a felület a szerverrel?</a:t>
             </a:r>
           </a:p>
           <a:p>
@@ -6031,7 +6031,7 @@
                 </a:solidFill>
                 <a:latin typeface="Segoe UI"/>
               </a:rPr>
-              <a:t>8.  Hogyan vedett a rendszer?</a:t>
+              <a:t>8.  Hogyan védett a rendszer?</a:t>
             </a:r>
           </a:p>
           <a:p>
@@ -6043,7 +6043,7 @@
                 </a:solidFill>
                 <a:latin typeface="Segoe UI"/>
               </a:rPr>
-              <a:t>9.  Hogyan teszteltuk?</a:t>
+              <a:t>9.  Hogyan teszteltük?</a:t>
             </a:r>
           </a:p>
           <a:p>
@@ -6055,7 +6055,7 @@
                 </a:solidFill>
                 <a:latin typeface="Segoe UI"/>
               </a:rPr>
-              <a:t>10. Hogyan kell elinditani?</a:t>
+              <a:t>10. Hogyan kell elindítani?</a:t>
             </a:r>
           </a:p>
         </p:txBody>
@@ -6108,7 +6108,7 @@
                 </a:solidFill>
                 <a:latin typeface="Segoe UI"/>
               </a:rPr>
-              <a:t>Tanfolyamok - Pogany Frigyes Technikum</a:t>
+              <a:t>Tanfolyamok - Pogány Frigyes Technikum</a:t>
             </a:r>
           </a:p>
         </p:txBody>
@@ -6178,7 +6178,7 @@
                 </a:solidFill>
                 <a:latin typeface="Segoe UI"/>
               </a:rPr>
-              <a:t>Biztonsagi megoldasok</a:t>
+              <a:t>Biztonsági megoldások</a:t>
             </a:r>
           </a:p>
         </p:txBody>
@@ -6213,7 +6213,7 @@
                 </a:solidFill>
                 <a:latin typeface="Segoe UI"/>
               </a:rPr>
-              <a:t>Jelszo titkositas</a:t>
+              <a:t>Jelszó titkosítás</a:t>
             </a:r>
           </a:p>
           <a:p>
@@ -6225,7 +6225,7 @@
                 </a:solidFill>
                 <a:latin typeface="Segoe UI"/>
               </a:rPr>
-              <a:t>A jelszot nem sima szovegkent taroljuk, hanem titkositott formaban. Meg ha valaki lata a fajlt, nem tudja kiolvasni a jelszot belole.</a:t>
+              <a:t>A jelszót nem sima szövegként tároljuk, hanem titkosított formában. Még ha valaki látja a fájlt, nem tudja kiolvasni a jelszót belőle.</a:t>
             </a:r>
           </a:p>
           <a:p>
@@ -6249,7 +6249,7 @@
                 </a:solidFill>
                 <a:latin typeface="Segoe UI"/>
               </a:rPr>
-              <a:t>Belepesi igazolvany (token)</a:t>
+              <a:t>Belépési igazolvány (token)</a:t>
             </a:r>
           </a:p>
           <a:p>
@@ -6261,7 +6261,7 @@
                 </a:solidFill>
                 <a:latin typeface="Segoe UI"/>
               </a:rPr>
-              <a:t>Sikeres belepes utan a szerver kiad egy "igazolvanyt" ami 1 oraig ervenyes. Minden keresnel ezt mutatja be az admin. Ha lejar, ujra be kell lepni.</a:t>
+              <a:t>Sikeres belépés után a szerver kiad egy "igazolvanyt" ami 1 óráig érvényes. Minden kérésnél ezt mutatja be az admin. Ha lejár, újra be kell lépni.</a:t>
             </a:r>
           </a:p>
           <a:p>
@@ -6285,7 +6285,7 @@
                 </a:solidFill>
                 <a:latin typeface="Segoe UI"/>
               </a:rPr>
-              <a:t>Kulon titkos fajl (.env)</a:t>
+              <a:t>Külön titkos fájl (.env)</a:t>
             </a:r>
           </a:p>
           <a:p>
@@ -6297,7 +6297,7 @@
                 </a:solidFill>
                 <a:latin typeface="Segoe UI"/>
               </a:rPr>
-              <a:t>A jelszo es a titkos kulcs egy kulon fajlban vannak, nem a program kodjaban. Ez a fajl nem kerul fel az internetre.</a:t>
+              <a:t>A jelszó és a titkos kulcs egy külön fájlban vannak, nem a program kódjában. Ez a fájl nem kerül fel az internetre.</a:t>
             </a:r>
           </a:p>
           <a:p>
@@ -6333,7 +6333,7 @@
                 </a:solidFill>
                 <a:latin typeface="Segoe UI"/>
               </a:rPr>
-              <a:t>Egy e-maillel csak egyszer lehet jelentkezni egy csoportba. Egy csoportba max 8 fo fer. Csoportot csak uresen lehet torolni.</a:t>
+              <a:t>Egy e-maillel csak egyszer lehet jelentkezni egy csoportba. Egy csoportba max 8 fő fér. Csoportot csak üresen lehet törölni.</a:t>
             </a:r>
           </a:p>
           <a:p>
@@ -6406,7 +6406,7 @@
                 </a:solidFill>
                 <a:latin typeface="Segoe UI"/>
               </a:rPr>
-              <a:t>Tanfolyamok - Pogany Frigyes Technikum</a:t>
+              <a:t>Tanfolyamok - Pogány Frigyes Technikum</a:t>
             </a:r>
           </a:p>
         </p:txBody>
@@ -6476,7 +6476,7 @@
                 </a:solidFill>
                 <a:latin typeface="Segoe UI"/>
               </a:rPr>
-              <a:t>9. Hogyan teszteltuk?</a:t>
+              <a:t>9. Hogyan teszteltük?</a:t>
             </a:r>
           </a:p>
         </p:txBody>
@@ -6529,7 +6529,7 @@
                 </a:solidFill>
                 <a:latin typeface="Segoe UI"/>
               </a:rPr>
-              <a:t>Tanfolyamok - Pogany Frigyes Technikum</a:t>
+              <a:t>Tanfolyamok - Pogány Frigyes Technikum</a:t>
             </a:r>
           </a:p>
         </p:txBody>
@@ -6599,7 +6599,7 @@
                 </a:solidFill>
                 <a:latin typeface="Segoe UI"/>
               </a:rPr>
-              <a:t>Teszteles</a:t>
+              <a:t>Tesztelés</a:t>
             </a:r>
           </a:p>
         </p:txBody>
@@ -6634,7 +6634,7 @@
                 </a:solidFill>
                 <a:latin typeface="Segoe UI"/>
               </a:rPr>
-              <a:t>Szerver tesztek (.http fajlok)</a:t>
+              <a:t>Szerver tesztek (.http fájlok)</a:t>
             </a:r>
           </a:p>
           <a:p>
@@ -6658,7 +6658,7 @@
                 </a:solidFill>
                 <a:latin typeface="Segoe UI"/>
               </a:rPr>
-              <a:t>Kuldunk kerelmet a szervernek es</a:t>
+              <a:t>Küldünk kérelmet a szervernek és</a:t>
             </a:r>
           </a:p>
           <a:p>
@@ -6670,7 +6670,7 @@
                 </a:solidFill>
                 <a:latin typeface="Segoe UI"/>
               </a:rPr>
-              <a:t>megnezzuk, a vart valasz jon-e vissza.</a:t>
+              <a:t>megnézzük, a várt válasz jön-e vissza.</a:t>
             </a:r>
           </a:p>
           <a:p>
@@ -6694,7 +6694,7 @@
                 </a:solidFill>
                 <a:latin typeface="Segoe UI"/>
               </a:rPr>
-              <a:t>Peldaul:</a:t>
+              <a:t>Például:</a:t>
             </a:r>
           </a:p>
           <a:p>
@@ -6706,7 +6706,7 @@
                 </a:solidFill>
                 <a:latin typeface="Segoe UI"/>
               </a:rPr>
-              <a:t>- Sikeres es sikertelen jelentkezes</a:t>
+              <a:t>- Sikeres és sikertelen jelentkezés</a:t>
             </a:r>
           </a:p>
           <a:p>
@@ -6718,7 +6718,7 @@
                 </a:solidFill>
                 <a:latin typeface="Segoe UI"/>
               </a:rPr>
-              <a:t>- Csoport letrehozas, modositas, torles</a:t>
+              <a:t>- Csoport létrehozás, módosítás, törlés</a:t>
             </a:r>
           </a:p>
           <a:p>
@@ -6730,7 +6730,7 @@
                 </a:solidFill>
                 <a:latin typeface="Segoe UI"/>
               </a:rPr>
-              <a:t>- Hibas jelszo, lejart token</a:t>
+              <a:t>- Hibás jelszó, lejárt token</a:t>
             </a:r>
           </a:p>
           <a:p>
@@ -6742,7 +6742,7 @@
                 </a:solidFill>
                 <a:latin typeface="Segoe UI"/>
               </a:rPr>
-              <a:t>- Teli csoport, nem letezo csoport</a:t>
+              <a:t>- Teli csoport, nem létező csoport</a:t>
             </a:r>
           </a:p>
         </p:txBody>
@@ -6777,7 +6777,7 @@
                 </a:solidFill>
                 <a:latin typeface="Segoe UI"/>
               </a:rPr>
-              <a:t>Feluleti tesztek (kezzel)</a:t>
+              <a:t>Felületi tesztek (kézzel)</a:t>
             </a:r>
           </a:p>
           <a:p>
@@ -6801,7 +6801,7 @@
                 </a:solidFill>
                 <a:latin typeface="Segoe UI"/>
               </a:rPr>
-              <a:t>Bongeszobe betoltjuk az oldalt</a:t>
+              <a:t>Böngészőbe betöltjük az oldalt</a:t>
             </a:r>
           </a:p>
           <a:p>
@@ -6813,7 +6813,7 @@
                 </a:solidFill>
                 <a:latin typeface="Segoe UI"/>
               </a:rPr>
-              <a:t>es vegigcsinaljuk a muveleteket:</a:t>
+              <a:t>és végigcsináljuk a műveleteket:</a:t>
             </a:r>
           </a:p>
           <a:p>
@@ -6849,7 +6849,7 @@
                 </a:solidFill>
                 <a:latin typeface="Segoe UI"/>
               </a:rPr>
-              <a:t>24 nyilvanos teszteset</a:t>
+              <a:t>24 nyilvános teszteset</a:t>
             </a:r>
           </a:p>
           <a:p>
@@ -6873,7 +6873,7 @@
                 </a:solidFill>
                 <a:latin typeface="Segoe UI"/>
               </a:rPr>
-              <a:t>Eredmenyek: test_execution_log.xlsx</a:t>
+              <a:t>Eredmények: test_execution_log.xlsx</a:t>
             </a:r>
           </a:p>
           <a:p>
@@ -6885,7 +6885,7 @@
                 </a:solidFill>
                 <a:latin typeface="Segoe UI"/>
               </a:rPr>
-              <a:t>Tesztadatok: 3 kepzes, 5 csoport, 21 fo</a:t>
+              <a:t>Tesztadatok: 3 képzés, 5 csoport, 21 fő</a:t>
             </a:r>
           </a:p>
         </p:txBody>
@@ -6946,7 +6946,7 @@
                 </a:solidFill>
                 <a:latin typeface="Segoe UI"/>
               </a:rPr>
-              <a:t>Tanfolyamok - Pogany Frigyes Technikum</a:t>
+              <a:t>Tanfolyamok - Pogány Frigyes Technikum</a:t>
             </a:r>
           </a:p>
         </p:txBody>
@@ -7016,7 +7016,7 @@
                 </a:solidFill>
                 <a:latin typeface="Segoe UI"/>
               </a:rPr>
-              <a:t>10. Hogyan kell elinditani?</a:t>
+              <a:t>10. Hogyan kell elindítani?</a:t>
             </a:r>
           </a:p>
         </p:txBody>
@@ -7069,7 +7069,7 @@
                 </a:solidFill>
                 <a:latin typeface="Segoe UI"/>
               </a:rPr>
-              <a:t>Tanfolyamok - Pogany Frigyes Technikum</a:t>
+              <a:t>Tanfolyamok - Pogány Frigyes Technikum</a:t>
             </a:r>
           </a:p>
         </p:txBody>
@@ -7139,7 +7139,7 @@
                 </a:solidFill>
                 <a:latin typeface="Segoe UI"/>
               </a:rPr>
-              <a:t>Telepites es inditas</a:t>
+              <a:t>Telepítés és indítás</a:t>
             </a:r>
           </a:p>
         </p:txBody>
@@ -7174,7 +7174,7 @@
                 </a:solidFill>
                 <a:latin typeface="Segoe UI"/>
               </a:rPr>
-              <a:t>1. Csomagok telepitese</a:t>
+              <a:t>1. Csomagok telepítése</a:t>
             </a:r>
           </a:p>
           <a:p>
@@ -7198,7 +7198,7 @@
                 </a:solidFill>
                 <a:latin typeface="Segoe UI"/>
               </a:rPr>
-              <a:t>   Letolti az osszes szukseges kiegeszitot</a:t>
+              <a:t>   Letölti az összes szükséges kiegészítőt</a:t>
             </a:r>
           </a:p>
           <a:p>
@@ -7222,7 +7222,7 @@
                 </a:solidFill>
                 <a:latin typeface="Segoe UI"/>
               </a:rPr>
-              <a:t>2. Jelszo generalasa</a:t>
+              <a:t>2. Jelszó generálása</a:t>
             </a:r>
           </a:p>
           <a:p>
@@ -7246,7 +7246,7 @@
                 </a:solidFill>
                 <a:latin typeface="Segoe UI"/>
               </a:rPr>
-              <a:t>   Letrehozza a titkositott jelszot</a:t>
+              <a:t>   Létrehozza a titkosított jelszót</a:t>
             </a:r>
           </a:p>
           <a:p>
@@ -7270,7 +7270,7 @@
                 </a:solidFill>
                 <a:latin typeface="Segoe UI"/>
               </a:rPr>
-              <a:t>3. Titkos fajl letrehozasa</a:t>
+              <a:t>3. Titkos fájl létrehozása</a:t>
             </a:r>
           </a:p>
           <a:p>
@@ -7282,7 +7282,7 @@
                 </a:solidFill>
                 <a:latin typeface="Segoe UI"/>
               </a:rPr>
-              <a:t>   .env fajl a fo mappaban</a:t>
+              <a:t>   .env fájl a fő mappában</a:t>
             </a:r>
           </a:p>
           <a:p>
@@ -7294,7 +7294,7 @@
                 </a:solidFill>
                 <a:latin typeface="Segoe UI"/>
               </a:rPr>
-              <a:t>   Ide kerul a titkositott jelszo es a titkos kulcs</a:t>
+              <a:t>   Ide kerül a titkosított jelszó és a titkos kulcs</a:t>
             </a:r>
           </a:p>
           <a:p>
@@ -7318,7 +7318,7 @@
                 </a:solidFill>
                 <a:latin typeface="Segoe UI"/>
               </a:rPr>
-              <a:t>4. Inditas</a:t>
+              <a:t>4. Indítás</a:t>
             </a:r>
           </a:p>
           <a:p>
@@ -7366,7 +7366,7 @@
                 </a:solidFill>
                 <a:latin typeface="Segoe UI"/>
               </a:rPr>
-              <a:t>5. Megnyitas</a:t>
+              <a:t>5. Megnyitás</a:t>
             </a:r>
           </a:p>
           <a:p>
@@ -7390,7 +7390,7 @@
                 </a:solidFill>
                 <a:latin typeface="Segoe UI"/>
               </a:rPr>
-              <a:t>   A bongeszobe beirva megjelenik az oldal</a:t>
+              <a:t>   A böngészőbe beírva megjelenik az oldal</a:t>
             </a:r>
           </a:p>
           <a:p>
@@ -7463,7 +7463,7 @@
                 </a:solidFill>
                 <a:latin typeface="Segoe UI"/>
               </a:rPr>
-              <a:t>Osszefoglalas</a:t>
+              <a:t>Összefoglalás</a:t>
             </a:r>
           </a:p>
         </p:txBody>
@@ -7498,7 +7498,7 @@
                 </a:solidFill>
                 <a:latin typeface="Segoe UI"/>
               </a:rPr>
-              <a:t>  Teljes koru weboldal tanfolyamok kezelesere</a:t>
+              <a:t>  Teljes körű weboldal tanfolyamok kezelésére</a:t>
             </a:r>
           </a:p>
           <a:p>
@@ -7510,7 +7510,7 @@
                 </a:solidFill>
                 <a:latin typeface="Segoe UI"/>
               </a:rPr>
-              <a:t>  3 reszes felepites: weboldal + szerver + adatbazis</a:t>
+              <a:t>  3 részes felépítés: weboldal + szerver + adatbázis</a:t>
             </a:r>
           </a:p>
           <a:p>
@@ -7522,7 +7522,7 @@
                 </a:solidFill>
                 <a:latin typeface="Segoe UI"/>
               </a:rPr>
-              <a:t>  12 szerver vegpont (2 nyilvanos + 10 jelszovedett)</a:t>
+              <a:t>  12 szerver végpont (2 nyilvános + 10 jelszóvédett)</a:t>
             </a:r>
           </a:p>
           <a:p>
@@ -7534,7 +7534,7 @@
                 </a:solidFill>
                 <a:latin typeface="Segoe UI"/>
               </a:rPr>
-              <a:t>  Biztonsagos: titkositott jelszo + belepesi igazolvany</a:t>
+              <a:t>  Biztonságos: titkosított jelszó + belépési igazolvány</a:t>
             </a:r>
           </a:p>
           <a:p>
@@ -7546,7 +7546,7 @@
                 </a:solidFill>
                 <a:latin typeface="Segoe UI"/>
               </a:rPr>
-              <a:t>  Ellenorzesek mindket oldalon (bongeszoben es szerveren is)</a:t>
+              <a:t>  Ellenőrzések mindkét oldalon (böngészőben és szerveren is)</a:t>
             </a:r>
           </a:p>
           <a:p>
@@ -7558,7 +7558,7 @@
                 </a:solidFill>
                 <a:latin typeface="Segoe UI"/>
               </a:rPr>
-              <a:t>  51 teszteset: feluleti es szerver tesztek</a:t>
+              <a:t>  51 teszteset: felületi és szerver tesztek</a:t>
             </a:r>
           </a:p>
           <a:p>
@@ -7570,7 +7570,7 @@
                 </a:solidFill>
                 <a:latin typeface="Segoe UI"/>
               </a:rPr>
-              <a:t>  Telefonon is jol mukodo design</a:t>
+              <a:t>  Telefonon is jól működő design</a:t>
             </a:r>
           </a:p>
         </p:txBody>
@@ -7605,7 +7605,7 @@
                 </a:solidFill>
                 <a:latin typeface="Segoe UI"/>
               </a:rPr>
-              <a:t>Koszonjuk a figyelmet!</a:t>
+              <a:t>Köszönjük a figyelmet!</a:t>
             </a:r>
           </a:p>
         </p:txBody>
@@ -7640,7 +7640,7 @@
                 </a:solidFill>
                 <a:latin typeface="Segoe UI"/>
               </a:rPr>
-              <a:t>Andorfer Vendel  |  Babai Mate  |  Varga Matyas</a:t>
+              <a:t>Andorfer Vendel  |  Babai Máté  |  Varga Mátyás</a:t>
             </a:r>
           </a:p>
         </p:txBody>
@@ -7701,7 +7701,7 @@
                 </a:solidFill>
                 <a:latin typeface="Segoe UI"/>
               </a:rPr>
-              <a:t>Tanfolyamok - Pogany Frigyes Technikum</a:t>
+              <a:t>Tanfolyamok - Pogány Frigyes Technikum</a:t>
             </a:r>
           </a:p>
         </p:txBody>
@@ -7771,7 +7771,7 @@
                 </a:solidFill>
                 <a:latin typeface="Segoe UI"/>
               </a:rPr>
-              <a:t>1. Mirol szol a projekt?</a:t>
+              <a:t>1. Miről szól a projekt?</a:t>
             </a:r>
           </a:p>
         </p:txBody>
@@ -7806,7 +7806,7 @@
                 </a:solidFill>
                 <a:latin typeface="Segoe UI"/>
               </a:rPr>
-              <a:t>Miert es kinek keszult ez az alkalmazas?</a:t>
+              <a:t>Miért és kinek készült ez az alkalmazás?</a:t>
             </a:r>
           </a:p>
         </p:txBody>
@@ -7859,7 +7859,7 @@
                 </a:solidFill>
                 <a:latin typeface="Segoe UI"/>
               </a:rPr>
-              <a:t>Tanfolyamok - Pogany Frigyes Technikum</a:t>
+              <a:t>Tanfolyamok - Pogány Frigyes Technikum</a:t>
             </a:r>
           </a:p>
         </p:txBody>
@@ -7929,7 +7929,7 @@
                 </a:solidFill>
                 <a:latin typeface="Segoe UI"/>
               </a:rPr>
-              <a:t>A projekt hattere</a:t>
+              <a:t>A projekt háttere</a:t>
             </a:r>
           </a:p>
         </p:txBody>
@@ -7964,7 +7964,7 @@
                 </a:solidFill>
                 <a:latin typeface="Segoe UI"/>
               </a:rPr>
-              <a:t>Iskola: BKSZC Pogany Frigyes Technikum (Budapest)</a:t>
+              <a:t>Iskola: BKSZC Pogány Frigyes Technikum (Budapest)</a:t>
             </a:r>
           </a:p>
           <a:p>
@@ -7988,7 +7988,7 @@
                 </a:solidFill>
                 <a:latin typeface="Segoe UI"/>
               </a:rPr>
-              <a:t>Az iskola esti es hetvegi digitalis kepzeseket kinal felnotteknek.</a:t>
+              <a:t>Az iskola esti és hétvégi digitális képzéseket kínál felnőtteknek.</a:t>
             </a:r>
           </a:p>
           <a:p>
@@ -8000,7 +8000,7 @@
                 </a:solidFill>
                 <a:latin typeface="Segoe UI"/>
               </a:rPr>
-              <a:t>A jelentkezesek korabban papir alapon tortentek.</a:t>
+              <a:t>A jelentkezések korábban papír alapon történtek.</a:t>
             </a:r>
           </a:p>
           <a:p>
@@ -8024,7 +8024,7 @@
                 </a:solidFill>
                 <a:latin typeface="Segoe UI"/>
               </a:rPr>
-              <a:t>A cel: egy weboldal ahol az erdeklodok megtalaljak a tanfolyamokat</a:t>
+              <a:t>A cél: egy weboldal ahol az érdeklődők megtalálják a tanfolyamokat</a:t>
             </a:r>
           </a:p>
           <a:p>
@@ -8036,7 +8036,7 @@
                 </a:solidFill>
                 <a:latin typeface="Segoe UI"/>
               </a:rPr>
-              <a:t>es online tudnak jelentkezni - az adminisztrator pedig tudja kezelni</a:t>
+              <a:t>és online tudnak jelentkezni - az adminisztrátor pedig tudja kezelni</a:t>
             </a:r>
           </a:p>
           <a:p>
@@ -8048,7 +8048,7 @@
                 </a:solidFill>
                 <a:latin typeface="Segoe UI"/>
               </a:rPr>
-              <a:t>a csoportokat es a jelentkezok adatait.</a:t>
+              <a:t>a csoportokat és a jelentkezők adatait.</a:t>
             </a:r>
           </a:p>
           <a:p>
@@ -8072,7 +8072,7 @@
                 </a:solidFill>
                 <a:latin typeface="Segoe UI"/>
               </a:rPr>
-              <a:t>3 fos csapat, iskolai projektmunka, 2026-os tanev</a:t>
+              <a:t>3 fős csapat, iskolai projektmunka, 2026-os tanév</a:t>
             </a:r>
           </a:p>
         </p:txBody>
@@ -8125,7 +8125,7 @@
                 </a:solidFill>
                 <a:latin typeface="Segoe UI"/>
               </a:rPr>
-              <a:t>Tanfolyamok - Pogany Frigyes Technikum</a:t>
+              <a:t>Tanfolyamok - Pogány Frigyes Technikum</a:t>
             </a:r>
           </a:p>
         </p:txBody>
@@ -8195,7 +8195,7 @@
                 </a:solidFill>
                 <a:latin typeface="Segoe UI"/>
               </a:rPr>
-              <a:t>A harom elerheto kepzes</a:t>
+              <a:t>A három elérhető képzés</a:t>
             </a:r>
           </a:p>
         </p:txBody>
@@ -8230,7 +8230,7 @@
                 </a:solidFill>
                 <a:latin typeface="Segoe UI"/>
               </a:rPr>
-              <a:t>Teljesen nullarol</a:t>
+              <a:t>Teljesen nulláról</a:t>
             </a:r>
           </a:p>
           <a:p>
@@ -8242,7 +8242,7 @@
                 </a:solidFill>
                 <a:latin typeface="Segoe UI"/>
               </a:rPr>
-              <a:t>40 ora</a:t>
+              <a:t>40 óra</a:t>
             </a:r>
           </a:p>
           <a:p>
@@ -8266,7 +8266,7 @@
                 </a:solidFill>
                 <a:latin typeface="Segoe UI"/>
               </a:rPr>
-              <a:t>Alapok: szamitogep, internet, e-mail, jelszavak</a:t>
+              <a:t>Alapok: számítógép, internet, e-mail, jelszavak</a:t>
             </a:r>
           </a:p>
         </p:txBody>
@@ -8301,7 +8301,7 @@
                 </a:solidFill>
                 <a:latin typeface="Segoe UI"/>
               </a:rPr>
-              <a:t>Mindennapi internethasznalat</a:t>
+              <a:t>Mindennapi internethasználat</a:t>
             </a:r>
           </a:p>
           <a:p>
@@ -8313,7 +8313,7 @@
                 </a:solidFill>
                 <a:latin typeface="Segoe UI"/>
               </a:rPr>
-              <a:t>40 ora</a:t>
+              <a:t>40 óra</a:t>
             </a:r>
           </a:p>
           <a:p>
@@ -8337,7 +8337,7 @@
                 </a:solidFill>
                 <a:latin typeface="Segoe UI"/>
               </a:rPr>
-              <a:t>Telefon es laptop egyutt, fajlok, alkalmazasok</a:t>
+              <a:t>Telefon és laptop együtt, fájlok, alkalmazások</a:t>
             </a:r>
           </a:p>
         </p:txBody>
@@ -8372,7 +8372,7 @@
                 </a:solidFill>
                 <a:latin typeface="Segoe UI"/>
               </a:rPr>
-              <a:t>Tudatos es biztonsagos internet</a:t>
+              <a:t>Tudatos és biztonságos internet</a:t>
             </a:r>
           </a:p>
           <a:p>
@@ -8384,7 +8384,7 @@
                 </a:solidFill>
                 <a:latin typeface="Segoe UI"/>
               </a:rPr>
-              <a:t>80 ora</a:t>
+              <a:t>80 óra</a:t>
             </a:r>
           </a:p>
           <a:p>
@@ -8408,7 +8408,7 @@
                 </a:solidFill>
                 <a:latin typeface="Segoe UI"/>
               </a:rPr>
-              <a:t>Atveresek, adatvedelem, ketlepeses azonositas</a:t>
+              <a:t>Átverések, adatvédelem, kétlépéses azonosítás</a:t>
             </a:r>
           </a:p>
         </p:txBody>
@@ -8443,7 +8443,7 @@
                 </a:solidFill>
                 <a:latin typeface="Segoe UI"/>
               </a:rPr>
-              <a:t>Mindharom kepzesbol tobb csoport is indulhat, kulonbozo idopontokban es helyszineken.</a:t>
+              <a:t>Mindhárom képzésből több csoport is indulhat, különböző időpontokban és helyszíneken.</a:t>
             </a:r>
           </a:p>
         </p:txBody>
@@ -8504,7 +8504,7 @@
                 </a:solidFill>
                 <a:latin typeface="Segoe UI"/>
               </a:rPr>
-              <a:t>Tanfolyamok - Pogany Frigyes Technikum</a:t>
+              <a:t>Tanfolyamok - Pogány Frigyes Technikum</a:t>
             </a:r>
           </a:p>
         </p:txBody>
@@ -8574,7 +8574,7 @@
                 </a:solidFill>
                 <a:latin typeface="Segoe UI"/>
               </a:rPr>
-              <a:t>2. Milyen eszkozokkel keszult?</a:t>
+              <a:t>2. Milyen eszközökkel készült?</a:t>
             </a:r>
           </a:p>
         </p:txBody>
@@ -8627,7 +8627,7 @@
                 </a:solidFill>
                 <a:latin typeface="Segoe UI"/>
               </a:rPr>
-              <a:t>Tanfolyamok - Pogany Frigyes Technikum</a:t>
+              <a:t>Tanfolyamok - Pogány Frigyes Technikum</a:t>
             </a:r>
           </a:p>
         </p:txBody>
@@ -8697,7 +8697,7 @@
                 </a:solidFill>
                 <a:latin typeface="Segoe UI"/>
               </a:rPr>
-              <a:t>Hasznalt eszkozok</a:t>
+              <a:t>Használt eszközök</a:t>
             </a:r>
           </a:p>
         </p:txBody>
@@ -8732,7 +8732,7 @@
                 </a:solidFill>
                 <a:latin typeface="Segoe UI"/>
               </a:rPr>
-              <a:t>Szerver oldal (a hatterben dolgozik)</a:t>
+              <a:t>Szerver oldal (a háttérben dolgozik)</a:t>
             </a:r>
           </a:p>
           <a:p>
@@ -8756,7 +8756,7 @@
                 </a:solidFill>
                 <a:latin typeface="Segoe UI"/>
               </a:rPr>
-              <a:t>Node.js - Futtatja a szerver kodot</a:t>
+              <a:t>Node.js - Futtatja a szerver kódot</a:t>
             </a:r>
           </a:p>
           <a:p>
@@ -8768,7 +8768,7 @@
                 </a:solidFill>
                 <a:latin typeface="Segoe UI"/>
               </a:rPr>
-              <a:t>Express.js - Fogadja a kereseket, kuldi a valaszokat</a:t>
+              <a:t>Express.js - Fogadja a kéréseket, küldi a válaszokat</a:t>
             </a:r>
           </a:p>
           <a:p>
@@ -8780,7 +8780,7 @@
                 </a:solidFill>
                 <a:latin typeface="Segoe UI"/>
               </a:rPr>
-              <a:t>SQLite - Tarolja az adatokat (1 fajl)</a:t>
+              <a:t>SQLite - Tárolja az adatokat (1 fájl)</a:t>
             </a:r>
           </a:p>
           <a:p>
@@ -8792,7 +8792,7 @@
                 </a:solidFill>
                 <a:latin typeface="Segoe UI"/>
               </a:rPr>
-              <a:t>bcrypt - Jelszot titkosit</a:t>
+              <a:t>bcrypt - Jelszót titkosít</a:t>
             </a:r>
           </a:p>
           <a:p>
@@ -8804,7 +8804,7 @@
                 </a:solidFill>
                 <a:latin typeface="Segoe UI"/>
               </a:rPr>
-              <a:t>JWT - Belepes igazolvany (token)</a:t>
+              <a:t>JWT - Belépés igazolvány (token)</a:t>
             </a:r>
           </a:p>
           <a:p>
@@ -8816,7 +8816,7 @@
                 </a:solidFill>
                 <a:latin typeface="Segoe UI"/>
               </a:rPr>
-              <a:t>dotenv - Titkos adatok kulon fajlban</a:t>
+              <a:t>dotenv - Titkos adatok külön fájlban</a:t>
             </a:r>
           </a:p>
         </p:txBody>
@@ -8851,7 +8851,7 @@
                 </a:solidFill>
                 <a:latin typeface="Segoe UI"/>
               </a:rPr>
-              <a:t>Felulet (amit a felhasznalo lat)</a:t>
+              <a:t>Felület (amit a felhasználó lát)</a:t>
             </a:r>
           </a:p>
           <a:p>
@@ -8887,7 +8887,7 @@
                 </a:solidFill>
                 <a:latin typeface="Segoe UI"/>
               </a:rPr>
-              <a:t>CSS - Az oldal kinezete, szinek</a:t>
+              <a:t>CSS - Az oldal kinézete, színek</a:t>
             </a:r>
           </a:p>
           <a:p>
@@ -8899,7 +8899,7 @@
                 </a:solidFill>
                 <a:latin typeface="Segoe UI"/>
               </a:rPr>
-              <a:t>JavaScript - Az oldal mukodese, gombok</a:t>
+              <a:t>JavaScript - Az oldal működése, gombok</a:t>
             </a:r>
           </a:p>
           <a:p>
@@ -8911,7 +8911,7 @@
                 </a:solidFill>
                 <a:latin typeface="Segoe UI"/>
               </a:rPr>
-              <a:t>Bootstrap 5 - Reszponziv design (telefonon is jo)</a:t>
+              <a:t>Bootstrap 5 - Reszponzív design (telefonon is jó)</a:t>
             </a:r>
           </a:p>
           <a:p>
@@ -8923,7 +8923,7 @@
                 </a:solidFill>
                 <a:latin typeface="Segoe UI"/>
               </a:rPr>
-              <a:t>Fetch API - Adatok lekerese a szerverrol</a:t>
+              <a:t>Fetch API - Adatok lekérése a szerverről</a:t>
             </a:r>
           </a:p>
         </p:txBody>
@@ -8984,7 +8984,7 @@
                 </a:solidFill>
                 <a:latin typeface="Segoe UI"/>
               </a:rPr>
-              <a:t>Tanfolyamok - Pogany Frigyes Technikum</a:t>
+              <a:t>Tanfolyamok - Pogány Frigyes Technikum</a:t>
             </a:r>
           </a:p>
         </p:txBody>
@@ -9054,7 +9054,7 @@
                 </a:solidFill>
                 <a:latin typeface="Segoe UI"/>
               </a:rPr>
-              <a:t>3. Hogyan epul fel?</a:t>
+              <a:t>3. Hogyan épül fel?</a:t>
             </a:r>
           </a:p>
         </p:txBody>
@@ -9107,7 +9107,7 @@
                 </a:solidFill>
                 <a:latin typeface="Segoe UI"/>
               </a:rPr>
-              <a:t>Tanfolyamok - Pogany Frigyes Technikum</a:t>
+              <a:t>Tanfolyamok - Pogány Frigyes Technikum</a:t>
             </a:r>
           </a:p>
         </p:txBody>
@@ -9177,7 +9177,7 @@
                 </a:solidFill>
                 <a:latin typeface="Segoe UI"/>
               </a:rPr>
-              <a:t>Az alkalmazas 3 reszbol all</a:t>
+              <a:t>Az alkalmazás 3 részből áll</a:t>
             </a:r>
           </a:p>
         </p:txBody>
@@ -9212,7 +9212,7 @@
                 </a:solidFill>
                 <a:latin typeface="Segoe UI"/>
               </a:rPr>
-              <a:t>Weboldal (bongeszo)</a:t>
+              <a:t>Weboldal (böngésző)</a:t>
             </a:r>
           </a:p>
           <a:p>
@@ -9248,7 +9248,7 @@
                 </a:solidFill>
                 <a:latin typeface="Segoe UI"/>
               </a:rPr>
-              <a:t>Ezt latja a felhasznalo</a:t>
+              <a:t>Ezt látja a felhasználó</a:t>
             </a:r>
           </a:p>
           <a:p>
@@ -9260,7 +9260,7 @@
                 </a:solidFill>
                 <a:latin typeface="Segoe UI"/>
               </a:rPr>
-              <a:t>Bongeszobe toltodik</a:t>
+              <a:t>Böngészőbe töltődik</a:t>
             </a:r>
           </a:p>
         </p:txBody>
@@ -9331,7 +9331,7 @@
                 </a:solidFill>
                 <a:latin typeface="Segoe UI"/>
               </a:rPr>
-              <a:t>Kerelmeket fogad</a:t>
+              <a:t>Kérelmeket fogad</a:t>
             </a:r>
           </a:p>
           <a:p>
@@ -9343,7 +9343,7 @@
                 </a:solidFill>
                 <a:latin typeface="Segoe UI"/>
               </a:rPr>
-              <a:t>Valaszokat kuld</a:t>
+              <a:t>Válaszokat küld</a:t>
             </a:r>
           </a:p>
         </p:txBody>
@@ -9378,7 +9378,7 @@
                 </a:solidFill>
                 <a:latin typeface="Segoe UI"/>
               </a:rPr>
-              <a:t>Adatbazis (SQLite)</a:t>
+              <a:t>Adatbázis (SQLite)</a:t>
             </a:r>
           </a:p>
           <a:p>
@@ -9402,7 +9402,7 @@
                 </a:solidFill>
                 <a:latin typeface="Segoe UI"/>
               </a:rPr>
-              <a:t>tanfolyamok.db fajl</a:t>
+              <a:t>tanfolyamok.db fájl</a:t>
             </a:r>
           </a:p>
           <a:p>
@@ -9414,7 +9414,7 @@
                 </a:solidFill>
                 <a:latin typeface="Segoe UI"/>
               </a:rPr>
-              <a:t>3 tabla</a:t>
+              <a:t>3 tábla</a:t>
             </a:r>
           </a:p>
           <a:p>
@@ -9531,7 +9531,7 @@
                 </a:solidFill>
                 <a:latin typeface="Segoe UI"/>
               </a:rPr>
-              <a:t>A felhasznalo a bongeszojeben nyitja meg az oldalt. Amikor barmit csinal (jelentkezik, adatot ker), a bongeszo egy kerelmet kuld a szervernek. A szerver feldolgozza a kerelmet, szukseges eseten adatot olvas vagy ir az adatbazisba, es visszakuldi a valaszt a bongeszobe.</a:t>
+              <a:t>A felhasználó a böngészőjében nyitja meg az oldalt. Amikor bármit csinál (jelentkezik, adatot kér), a böngésző egy kérelmet küld a szervernek. A szerver feldolgozza a kérelmet, szükséges esetén adatot olvas vagy ír az adatbázisba, és visszaküldi a választ a böngészőbe.</a:t>
             </a:r>
           </a:p>
         </p:txBody>

--- a/Tanfolyamok_prezentacio.pptx
+++ b/Tanfolyamok_prezentacio.pptx
@@ -5,33 +5,33 @@
     <p:sldMasterId id="2147483648" r:id="rId1"/>
   </p:sldMasterIdLst>
   <p:sldIdLst>
-    <p:sldId id="256" r:id="rId7"/>
-    <p:sldId id="257" r:id="rId8"/>
-    <p:sldId id="258" r:id="rId9"/>
-    <p:sldId id="259" r:id="rId10"/>
-    <p:sldId id="260" r:id="rId11"/>
-    <p:sldId id="261" r:id="rId12"/>
-    <p:sldId id="262" r:id="rId13"/>
-    <p:sldId id="263" r:id="rId14"/>
-    <p:sldId id="264" r:id="rId15"/>
-    <p:sldId id="265" r:id="rId16"/>
-    <p:sldId id="266" r:id="rId17"/>
-    <p:sldId id="267" r:id="rId18"/>
-    <p:sldId id="268" r:id="rId19"/>
-    <p:sldId id="269" r:id="rId20"/>
-    <p:sldId id="270" r:id="rId21"/>
-    <p:sldId id="271" r:id="rId22"/>
-    <p:sldId id="272" r:id="rId23"/>
-    <p:sldId id="273" r:id="rId24"/>
-    <p:sldId id="274" r:id="rId25"/>
-    <p:sldId id="275" r:id="rId26"/>
-    <p:sldId id="276" r:id="rId27"/>
-    <p:sldId id="277" r:id="rId28"/>
-    <p:sldId id="278" r:id="rId29"/>
-    <p:sldId id="279" r:id="rId30"/>
-    <p:sldId id="280" r:id="rId31"/>
+    <p:sldId id="256" r:id="rId2"/>
+    <p:sldId id="257" r:id="rId3"/>
+    <p:sldId id="258" r:id="rId4"/>
+    <p:sldId id="259" r:id="rId5"/>
+    <p:sldId id="260" r:id="rId6"/>
+    <p:sldId id="261" r:id="rId7"/>
+    <p:sldId id="262" r:id="rId8"/>
+    <p:sldId id="263" r:id="rId9"/>
+    <p:sldId id="264" r:id="rId10"/>
+    <p:sldId id="265" r:id="rId11"/>
+    <p:sldId id="266" r:id="rId12"/>
+    <p:sldId id="267" r:id="rId13"/>
+    <p:sldId id="268" r:id="rId14"/>
+    <p:sldId id="269" r:id="rId15"/>
+    <p:sldId id="270" r:id="rId16"/>
+    <p:sldId id="271" r:id="rId17"/>
+    <p:sldId id="272" r:id="rId18"/>
+    <p:sldId id="273" r:id="rId19"/>
+    <p:sldId id="274" r:id="rId20"/>
+    <p:sldId id="275" r:id="rId21"/>
+    <p:sldId id="276" r:id="rId22"/>
+    <p:sldId id="277" r:id="rId23"/>
+    <p:sldId id="278" r:id="rId24"/>
+    <p:sldId id="279" r:id="rId25"/>
+    <p:sldId id="280" r:id="rId26"/>
   </p:sldIdLst>
-  <p:sldSz cx="12192000" cy="6858000" type="screen4x3"/>
+  <p:sldSz cx="12192000" cy="6858000"/>
   <p:notesSz cx="6858000" cy="9144000"/>
   <p:defaultTextStyle>
     <a:defPPr>
@@ -128,6 +128,22 @@
       </a:defRPr>
     </a:lvl9pPr>
   </p:defaultTextStyle>
+  <p:extLst>
+    <p:ext uri="{EFAFB233-063F-42B5-8137-9DF3F51BA10A}">
+      <p15:sldGuideLst xmlns:p15="http://schemas.microsoft.com/office/powerpoint/2012/main">
+        <p15:guide id="1" orient="horz" pos="2160">
+          <p15:clr>
+            <a:srgbClr val="A4A3A4"/>
+          </p15:clr>
+        </p15:guide>
+        <p15:guide id="2" pos="2880">
+          <p15:clr>
+            <a:srgbClr val="A4A3A4"/>
+          </p15:clr>
+        </p15:guide>
+      </p15:sldGuideLst>
+    </p:ext>
+  </p:extLst>
 </p:presentation>
 </file>
 
@@ -169,10 +185,9 @@
           <a:lstStyle/>
           <a:p>
             <a:r>
-              <a:rPr lang="en-US" smtClean="0"/>
+              <a:rPr lang="en-US"/>
               <a:t>Click to edit Master title style</a:t>
             </a:r>
-            <a:endParaRPr lang="en-US"/>
           </a:p>
         </p:txBody>
       </p:sp>
@@ -288,10 +303,9 @@
           </a:lstStyle>
           <a:p>
             <a:r>
-              <a:rPr lang="en-US" smtClean="0"/>
+              <a:rPr lang="en-US"/>
               <a:t>Click to edit Master subtitle style</a:t>
             </a:r>
-            <a:endParaRPr lang="en-US"/>
           </a:p>
         </p:txBody>
       </p:sp>
@@ -312,7 +326,7 @@
           <a:p>
             <a:fld id="{5BCAD085-E8A6-8845-BD4E-CB4CCA059FC4}" type="datetimeFigureOut">
               <a:rPr lang="en-US" smtClean="0"/>
-              <a:t>1/27/13</a:t>
+              <a:t>4/29/2026</a:t>
             </a:fld>
             <a:endParaRPr lang="en-US"/>
           </a:p>
@@ -406,10 +420,9 @@
           <a:lstStyle/>
           <a:p>
             <a:r>
-              <a:rPr lang="en-US" smtClean="0"/>
+              <a:rPr lang="en-US"/>
               <a:t>Click to edit Master title style</a:t>
             </a:r>
-            <a:endParaRPr lang="en-US"/>
           </a:p>
         </p:txBody>
       </p:sp>
@@ -430,38 +443,37 @@
           <a:p>
             <a:pPr lvl="0"/>
             <a:r>
-              <a:rPr lang="en-US" smtClean="0"/>
+              <a:rPr lang="en-US"/>
               <a:t>Click to edit Master text styles</a:t>
             </a:r>
           </a:p>
           <a:p>
             <a:pPr lvl="1"/>
             <a:r>
-              <a:rPr lang="en-US" smtClean="0"/>
+              <a:rPr lang="en-US"/>
               <a:t>Second level</a:t>
             </a:r>
           </a:p>
           <a:p>
             <a:pPr lvl="2"/>
             <a:r>
-              <a:rPr lang="en-US" smtClean="0"/>
+              <a:rPr lang="en-US"/>
               <a:t>Third level</a:t>
             </a:r>
           </a:p>
           <a:p>
             <a:pPr lvl="3"/>
             <a:r>
-              <a:rPr lang="en-US" smtClean="0"/>
+              <a:rPr lang="en-US"/>
               <a:t>Fourth level</a:t>
             </a:r>
           </a:p>
           <a:p>
             <a:pPr lvl="4"/>
             <a:r>
-              <a:rPr lang="en-US" smtClean="0"/>
+              <a:rPr lang="en-US"/>
               <a:t>Fifth level</a:t>
             </a:r>
-            <a:endParaRPr lang="en-US"/>
           </a:p>
         </p:txBody>
       </p:sp>
@@ -482,7 +494,7 @@
           <a:p>
             <a:fld id="{5BCAD085-E8A6-8845-BD4E-CB4CCA059FC4}" type="datetimeFigureOut">
               <a:rPr lang="en-US" smtClean="0"/>
-              <a:t>1/27/13</a:t>
+              <a:t>4/29/2026</a:t>
             </a:fld>
             <a:endParaRPr lang="en-US"/>
           </a:p>
@@ -581,10 +593,9 @@
           <a:lstStyle/>
           <a:p>
             <a:r>
-              <a:rPr lang="en-US" smtClean="0"/>
+              <a:rPr lang="en-US"/>
               <a:t>Click to edit Master title style</a:t>
             </a:r>
-            <a:endParaRPr lang="en-US"/>
           </a:p>
         </p:txBody>
       </p:sp>
@@ -610,38 +621,37 @@
           <a:p>
             <a:pPr lvl="0"/>
             <a:r>
-              <a:rPr lang="en-US" smtClean="0"/>
+              <a:rPr lang="en-US"/>
               <a:t>Click to edit Master text styles</a:t>
             </a:r>
           </a:p>
           <a:p>
             <a:pPr lvl="1"/>
             <a:r>
-              <a:rPr lang="en-US" smtClean="0"/>
+              <a:rPr lang="en-US"/>
               <a:t>Second level</a:t>
             </a:r>
           </a:p>
           <a:p>
             <a:pPr lvl="2"/>
             <a:r>
-              <a:rPr lang="en-US" smtClean="0"/>
+              <a:rPr lang="en-US"/>
               <a:t>Third level</a:t>
             </a:r>
           </a:p>
           <a:p>
             <a:pPr lvl="3"/>
             <a:r>
-              <a:rPr lang="en-US" smtClean="0"/>
+              <a:rPr lang="en-US"/>
               <a:t>Fourth level</a:t>
             </a:r>
           </a:p>
           <a:p>
             <a:pPr lvl="4"/>
             <a:r>
-              <a:rPr lang="en-US" smtClean="0"/>
+              <a:rPr lang="en-US"/>
               <a:t>Fifth level</a:t>
             </a:r>
-            <a:endParaRPr lang="en-US"/>
           </a:p>
         </p:txBody>
       </p:sp>
@@ -662,7 +672,7 @@
           <a:p>
             <a:fld id="{5BCAD085-E8A6-8845-BD4E-CB4CCA059FC4}" type="datetimeFigureOut">
               <a:rPr lang="en-US" smtClean="0"/>
-              <a:t>1/27/13</a:t>
+              <a:t>4/29/2026</a:t>
             </a:fld>
             <a:endParaRPr lang="en-US"/>
           </a:p>
@@ -756,10 +766,9 @@
           <a:lstStyle/>
           <a:p>
             <a:r>
-              <a:rPr lang="en-US" smtClean="0"/>
+              <a:rPr lang="en-US"/>
               <a:t>Click to edit Master title style</a:t>
             </a:r>
-            <a:endParaRPr lang="en-US"/>
           </a:p>
         </p:txBody>
       </p:sp>
@@ -780,38 +789,37 @@
           <a:p>
             <a:pPr lvl="0"/>
             <a:r>
-              <a:rPr lang="en-US" smtClean="0"/>
+              <a:rPr lang="en-US"/>
               <a:t>Click to edit Master text styles</a:t>
             </a:r>
           </a:p>
           <a:p>
             <a:pPr lvl="1"/>
             <a:r>
-              <a:rPr lang="en-US" smtClean="0"/>
+              <a:rPr lang="en-US"/>
               <a:t>Second level</a:t>
             </a:r>
           </a:p>
           <a:p>
             <a:pPr lvl="2"/>
             <a:r>
-              <a:rPr lang="en-US" smtClean="0"/>
+              <a:rPr lang="en-US"/>
               <a:t>Third level</a:t>
             </a:r>
           </a:p>
           <a:p>
             <a:pPr lvl="3"/>
             <a:r>
-              <a:rPr lang="en-US" smtClean="0"/>
+              <a:rPr lang="en-US"/>
               <a:t>Fourth level</a:t>
             </a:r>
           </a:p>
           <a:p>
             <a:pPr lvl="4"/>
             <a:r>
-              <a:rPr lang="en-US" smtClean="0"/>
+              <a:rPr lang="en-US"/>
               <a:t>Fifth level</a:t>
             </a:r>
-            <a:endParaRPr lang="en-US"/>
           </a:p>
         </p:txBody>
       </p:sp>
@@ -832,7 +840,7 @@
           <a:p>
             <a:fld id="{5BCAD085-E8A6-8845-BD4E-CB4CCA059FC4}" type="datetimeFigureOut">
               <a:rPr lang="en-US" smtClean="0"/>
-              <a:t>1/27/13</a:t>
+              <a:t>4/29/2026</a:t>
             </a:fld>
             <a:endParaRPr lang="en-US"/>
           </a:p>
@@ -935,10 +943,9 @@
           </a:lstStyle>
           <a:p>
             <a:r>
-              <a:rPr lang="en-US" smtClean="0"/>
+              <a:rPr lang="en-US"/>
               <a:t>Click to edit Master title style</a:t>
             </a:r>
-            <a:endParaRPr lang="en-US"/>
           </a:p>
         </p:txBody>
       </p:sp>
@@ -1055,7 +1062,7 @@
           <a:p>
             <a:pPr lvl="0"/>
             <a:r>
-              <a:rPr lang="en-US" smtClean="0"/>
+              <a:rPr lang="en-US"/>
               <a:t>Click to edit Master text styles</a:t>
             </a:r>
           </a:p>
@@ -1078,7 +1085,7 @@
           <a:p>
             <a:fld id="{5BCAD085-E8A6-8845-BD4E-CB4CCA059FC4}" type="datetimeFigureOut">
               <a:rPr lang="en-US" smtClean="0"/>
-              <a:t>1/27/13</a:t>
+              <a:t>4/29/2026</a:t>
             </a:fld>
             <a:endParaRPr lang="en-US"/>
           </a:p>
@@ -1172,10 +1179,9 @@
           <a:lstStyle/>
           <a:p>
             <a:r>
-              <a:rPr lang="en-US" smtClean="0"/>
+              <a:rPr lang="en-US"/>
               <a:t>Click to edit Master title style</a:t>
             </a:r>
-            <a:endParaRPr lang="en-US"/>
           </a:p>
         </p:txBody>
       </p:sp>
@@ -1229,38 +1235,37 @@
           <a:p>
             <a:pPr lvl="0"/>
             <a:r>
-              <a:rPr lang="en-US" smtClean="0"/>
+              <a:rPr lang="en-US"/>
               <a:t>Click to edit Master text styles</a:t>
             </a:r>
           </a:p>
           <a:p>
             <a:pPr lvl="1"/>
             <a:r>
-              <a:rPr lang="en-US" smtClean="0"/>
+              <a:rPr lang="en-US"/>
               <a:t>Second level</a:t>
             </a:r>
           </a:p>
           <a:p>
             <a:pPr lvl="2"/>
             <a:r>
-              <a:rPr lang="en-US" smtClean="0"/>
+              <a:rPr lang="en-US"/>
               <a:t>Third level</a:t>
             </a:r>
           </a:p>
           <a:p>
             <a:pPr lvl="3"/>
             <a:r>
-              <a:rPr lang="en-US" smtClean="0"/>
+              <a:rPr lang="en-US"/>
               <a:t>Fourth level</a:t>
             </a:r>
           </a:p>
           <a:p>
             <a:pPr lvl="4"/>
             <a:r>
-              <a:rPr lang="en-US" smtClean="0"/>
+              <a:rPr lang="en-US"/>
               <a:t>Fifth level</a:t>
             </a:r>
-            <a:endParaRPr lang="en-US"/>
           </a:p>
         </p:txBody>
       </p:sp>
@@ -1314,38 +1319,37 @@
           <a:p>
             <a:pPr lvl="0"/>
             <a:r>
-              <a:rPr lang="en-US" smtClean="0"/>
+              <a:rPr lang="en-US"/>
               <a:t>Click to edit Master text styles</a:t>
             </a:r>
           </a:p>
           <a:p>
             <a:pPr lvl="1"/>
             <a:r>
-              <a:rPr lang="en-US" smtClean="0"/>
+              <a:rPr lang="en-US"/>
               <a:t>Second level</a:t>
             </a:r>
           </a:p>
           <a:p>
             <a:pPr lvl="2"/>
             <a:r>
-              <a:rPr lang="en-US" smtClean="0"/>
+              <a:rPr lang="en-US"/>
               <a:t>Third level</a:t>
             </a:r>
           </a:p>
           <a:p>
             <a:pPr lvl="3"/>
             <a:r>
-              <a:rPr lang="en-US" smtClean="0"/>
+              <a:rPr lang="en-US"/>
               <a:t>Fourth level</a:t>
             </a:r>
           </a:p>
           <a:p>
             <a:pPr lvl="4"/>
             <a:r>
-              <a:rPr lang="en-US" smtClean="0"/>
+              <a:rPr lang="en-US"/>
               <a:t>Fifth level</a:t>
             </a:r>
-            <a:endParaRPr lang="en-US"/>
           </a:p>
         </p:txBody>
       </p:sp>
@@ -1366,7 +1370,7 @@
           <a:p>
             <a:fld id="{5BCAD085-E8A6-8845-BD4E-CB4CCA059FC4}" type="datetimeFigureOut">
               <a:rPr lang="en-US" smtClean="0"/>
-              <a:t>1/27/13</a:t>
+              <a:t>4/29/2026</a:t>
             </a:fld>
             <a:endParaRPr lang="en-US"/>
           </a:p>
@@ -1464,10 +1468,9 @@
           </a:lstStyle>
           <a:p>
             <a:r>
-              <a:rPr lang="en-US" smtClean="0"/>
+              <a:rPr lang="en-US"/>
               <a:t>Click to edit Master title style</a:t>
             </a:r>
-            <a:endParaRPr lang="en-US"/>
           </a:p>
         </p:txBody>
       </p:sp>
@@ -1530,7 +1533,7 @@
           <a:p>
             <a:pPr lvl="0"/>
             <a:r>
-              <a:rPr lang="en-US" smtClean="0"/>
+              <a:rPr lang="en-US"/>
               <a:t>Click to edit Master text styles</a:t>
             </a:r>
           </a:p>
@@ -1586,38 +1589,37 @@
           <a:p>
             <a:pPr lvl="0"/>
             <a:r>
-              <a:rPr lang="en-US" smtClean="0"/>
+              <a:rPr lang="en-US"/>
               <a:t>Click to edit Master text styles</a:t>
             </a:r>
           </a:p>
           <a:p>
             <a:pPr lvl="1"/>
             <a:r>
-              <a:rPr lang="en-US" smtClean="0"/>
+              <a:rPr lang="en-US"/>
               <a:t>Second level</a:t>
             </a:r>
           </a:p>
           <a:p>
             <a:pPr lvl="2"/>
             <a:r>
-              <a:rPr lang="en-US" smtClean="0"/>
+              <a:rPr lang="en-US"/>
               <a:t>Third level</a:t>
             </a:r>
           </a:p>
           <a:p>
             <a:pPr lvl="3"/>
             <a:r>
-              <a:rPr lang="en-US" smtClean="0"/>
+              <a:rPr lang="en-US"/>
               <a:t>Fourth level</a:t>
             </a:r>
           </a:p>
           <a:p>
             <a:pPr lvl="4"/>
             <a:r>
-              <a:rPr lang="en-US" smtClean="0"/>
+              <a:rPr lang="en-US"/>
               <a:t>Fifth level</a:t>
             </a:r>
-            <a:endParaRPr lang="en-US"/>
           </a:p>
         </p:txBody>
       </p:sp>
@@ -1680,7 +1682,7 @@
           <a:p>
             <a:pPr lvl="0"/>
             <a:r>
-              <a:rPr lang="en-US" smtClean="0"/>
+              <a:rPr lang="en-US"/>
               <a:t>Click to edit Master text styles</a:t>
             </a:r>
           </a:p>
@@ -1736,38 +1738,37 @@
           <a:p>
             <a:pPr lvl="0"/>
             <a:r>
-              <a:rPr lang="en-US" smtClean="0"/>
+              <a:rPr lang="en-US"/>
               <a:t>Click to edit Master text styles</a:t>
             </a:r>
           </a:p>
           <a:p>
             <a:pPr lvl="1"/>
             <a:r>
-              <a:rPr lang="en-US" smtClean="0"/>
+              <a:rPr lang="en-US"/>
               <a:t>Second level</a:t>
             </a:r>
           </a:p>
           <a:p>
             <a:pPr lvl="2"/>
             <a:r>
-              <a:rPr lang="en-US" smtClean="0"/>
+              <a:rPr lang="en-US"/>
               <a:t>Third level</a:t>
             </a:r>
           </a:p>
           <a:p>
             <a:pPr lvl="3"/>
             <a:r>
-              <a:rPr lang="en-US" smtClean="0"/>
+              <a:rPr lang="en-US"/>
               <a:t>Fourth level</a:t>
             </a:r>
           </a:p>
           <a:p>
             <a:pPr lvl="4"/>
             <a:r>
-              <a:rPr lang="en-US" smtClean="0"/>
+              <a:rPr lang="en-US"/>
               <a:t>Fifth level</a:t>
             </a:r>
-            <a:endParaRPr lang="en-US"/>
           </a:p>
         </p:txBody>
       </p:sp>
@@ -1788,7 +1789,7 @@
           <a:p>
             <a:fld id="{5BCAD085-E8A6-8845-BD4E-CB4CCA059FC4}" type="datetimeFigureOut">
               <a:rPr lang="en-US" smtClean="0"/>
-              <a:t>1/27/13</a:t>
+              <a:t>4/29/2026</a:t>
             </a:fld>
             <a:endParaRPr lang="en-US"/>
           </a:p>
@@ -1882,10 +1883,9 @@
           <a:lstStyle/>
           <a:p>
             <a:r>
-              <a:rPr lang="en-US" smtClean="0"/>
+              <a:rPr lang="en-US"/>
               <a:t>Click to edit Master title style</a:t>
             </a:r>
-            <a:endParaRPr lang="en-US"/>
           </a:p>
         </p:txBody>
       </p:sp>
@@ -1906,7 +1906,7 @@
           <a:p>
             <a:fld id="{5BCAD085-E8A6-8845-BD4E-CB4CCA059FC4}" type="datetimeFigureOut">
               <a:rPr lang="en-US" smtClean="0"/>
-              <a:t>1/27/13</a:t>
+              <a:t>4/29/2026</a:t>
             </a:fld>
             <a:endParaRPr lang="en-US"/>
           </a:p>
@@ -2001,7 +2001,7 @@
           <a:p>
             <a:fld id="{5BCAD085-E8A6-8845-BD4E-CB4CCA059FC4}" type="datetimeFigureOut">
               <a:rPr lang="en-US" smtClean="0"/>
-              <a:t>1/27/13</a:t>
+              <a:t>4/29/2026</a:t>
             </a:fld>
             <a:endParaRPr lang="en-US"/>
           </a:p>
@@ -2104,10 +2104,9 @@
           </a:lstStyle>
           <a:p>
             <a:r>
-              <a:rPr lang="en-US" smtClean="0"/>
+              <a:rPr lang="en-US"/>
               <a:t>Click to edit Master title style</a:t>
             </a:r>
-            <a:endParaRPr lang="en-US"/>
           </a:p>
         </p:txBody>
       </p:sp>
@@ -2161,38 +2160,37 @@
           <a:p>
             <a:pPr lvl="0"/>
             <a:r>
-              <a:rPr lang="en-US" smtClean="0"/>
+              <a:rPr lang="en-US"/>
               <a:t>Click to edit Master text styles</a:t>
             </a:r>
           </a:p>
           <a:p>
             <a:pPr lvl="1"/>
             <a:r>
-              <a:rPr lang="en-US" smtClean="0"/>
+              <a:rPr lang="en-US"/>
               <a:t>Second level</a:t>
             </a:r>
           </a:p>
           <a:p>
             <a:pPr lvl="2"/>
             <a:r>
-              <a:rPr lang="en-US" smtClean="0"/>
+              <a:rPr lang="en-US"/>
               <a:t>Third level</a:t>
             </a:r>
           </a:p>
           <a:p>
             <a:pPr lvl="3"/>
             <a:r>
-              <a:rPr lang="en-US" smtClean="0"/>
+              <a:rPr lang="en-US"/>
               <a:t>Fourth level</a:t>
             </a:r>
           </a:p>
           <a:p>
             <a:pPr lvl="4"/>
             <a:r>
-              <a:rPr lang="en-US" smtClean="0"/>
+              <a:rPr lang="en-US"/>
               <a:t>Fifth level</a:t>
             </a:r>
-            <a:endParaRPr lang="en-US"/>
           </a:p>
         </p:txBody>
       </p:sp>
@@ -2255,7 +2253,7 @@
           <a:p>
             <a:pPr lvl="0"/>
             <a:r>
-              <a:rPr lang="en-US" smtClean="0"/>
+              <a:rPr lang="en-US"/>
               <a:t>Click to edit Master text styles</a:t>
             </a:r>
           </a:p>
@@ -2278,7 +2276,7 @@
           <a:p>
             <a:fld id="{5BCAD085-E8A6-8845-BD4E-CB4CCA059FC4}" type="datetimeFigureOut">
               <a:rPr lang="en-US" smtClean="0"/>
-              <a:t>1/27/13</a:t>
+              <a:t>4/29/2026</a:t>
             </a:fld>
             <a:endParaRPr lang="en-US"/>
           </a:p>
@@ -2381,10 +2379,9 @@
           </a:lstStyle>
           <a:p>
             <a:r>
-              <a:rPr lang="en-US" smtClean="0"/>
+              <a:rPr lang="en-US"/>
               <a:t>Click to edit Master title style</a:t>
             </a:r>
-            <a:endParaRPr lang="en-US"/>
           </a:p>
         </p:txBody>
       </p:sp>
@@ -2508,7 +2505,7 @@
           <a:p>
             <a:pPr lvl="0"/>
             <a:r>
-              <a:rPr lang="en-US" smtClean="0"/>
+              <a:rPr lang="en-US"/>
               <a:t>Click to edit Master text styles</a:t>
             </a:r>
           </a:p>
@@ -2531,7 +2528,7 @@
           <a:p>
             <a:fld id="{5BCAD085-E8A6-8845-BD4E-CB4CCA059FC4}" type="datetimeFigureOut">
               <a:rPr lang="en-US" smtClean="0"/>
-              <a:t>1/27/13</a:t>
+              <a:t>4/29/2026</a:t>
             </a:fld>
             <a:endParaRPr lang="en-US"/>
           </a:p>
@@ -2640,10 +2637,9 @@
           <a:lstStyle/>
           <a:p>
             <a:r>
-              <a:rPr lang="en-US" smtClean="0"/>
+              <a:rPr lang="en-US"/>
               <a:t>Click to edit Master title style</a:t>
             </a:r>
-            <a:endParaRPr lang="en-US"/>
           </a:p>
         </p:txBody>
       </p:sp>
@@ -2674,38 +2670,37 @@
           <a:p>
             <a:pPr lvl="0"/>
             <a:r>
-              <a:rPr lang="en-US" smtClean="0"/>
+              <a:rPr lang="en-US"/>
               <a:t>Click to edit Master text styles</a:t>
             </a:r>
           </a:p>
           <a:p>
             <a:pPr lvl="1"/>
             <a:r>
-              <a:rPr lang="en-US" smtClean="0"/>
+              <a:rPr lang="en-US"/>
               <a:t>Second level</a:t>
             </a:r>
           </a:p>
           <a:p>
             <a:pPr lvl="2"/>
             <a:r>
-              <a:rPr lang="en-US" smtClean="0"/>
+              <a:rPr lang="en-US"/>
               <a:t>Third level</a:t>
             </a:r>
           </a:p>
           <a:p>
             <a:pPr lvl="3"/>
             <a:r>
-              <a:rPr lang="en-US" smtClean="0"/>
+              <a:rPr lang="en-US"/>
               <a:t>Fourth level</a:t>
             </a:r>
           </a:p>
           <a:p>
             <a:pPr lvl="4"/>
             <a:r>
-              <a:rPr lang="en-US" smtClean="0"/>
+              <a:rPr lang="en-US"/>
               <a:t>Fifth level</a:t>
             </a:r>
-            <a:endParaRPr lang="en-US"/>
           </a:p>
         </p:txBody>
       </p:sp>
@@ -2744,7 +2739,7 @@
           <a:p>
             <a:fld id="{5BCAD085-E8A6-8845-BD4E-CB4CCA059FC4}" type="datetimeFigureOut">
               <a:rPr lang="en-US" smtClean="0"/>
-              <a:t>1/27/13</a:t>
+              <a:t>4/29/2026</a:t>
             </a:fld>
             <a:endParaRPr lang="en-US"/>
           </a:p>
@@ -3103,7 +3098,7 @@
 </file>
 
 <file path=ppt/slides/slide1.xml><?xml version="1.0" encoding="utf-8"?>
-<p:sld xmlns:a="http://schemas.openxmlformats.org/drawingml/2006/main" xmlns:p="http://schemas.openxmlformats.org/presentationml/2006/main" xmlns:r="http://schemas.openxmlformats.org/officeDocument/2006/relationships">
+<p:sld xmlns:a="http://schemas.openxmlformats.org/drawingml/2006/main" xmlns:r="http://schemas.openxmlformats.org/officeDocument/2006/relationships" xmlns:p="http://schemas.openxmlformats.org/presentationml/2006/main">
   <p:cSld>
     <p:bg>
       <p:bgPr>
@@ -3119,7 +3114,14 @@
         <p:cNvGrpSpPr/>
         <p:nvPr/>
       </p:nvGrpSpPr>
-      <p:grpSpPr/>
+      <p:grpSpPr>
+        <a:xfrm>
+          <a:off x="0" y="0"/>
+          <a:ext cx="0" cy="0"/>
+          <a:chOff x="0" y="0"/>
+          <a:chExt cx="0" cy="0"/>
+        </a:xfrm>
+      </p:grpSpPr>
       <p:sp>
         <p:nvSpPr>
           <p:cNvPr id="2" name="TextBox 1"/>
@@ -3257,6 +3259,138 @@
               </a:rPr>
               <a:t>Andorfer Vendel  |  Babai Máté  |  Varga Mátyás</a:t>
             </a:r>
+          </a:p>
+        </p:txBody>
+      </p:sp>
+      <p:sp>
+        <p:nvSpPr>
+          <p:cNvPr id="6" name="Téglalap 5">
+            <a:extLst>
+              <a:ext uri="{FF2B5EF4-FFF2-40B4-BE49-F238E27FC236}">
+                <a16:creationId xmlns:a16="http://schemas.microsoft.com/office/drawing/2014/main" id="{28B012F2-F9FF-46A7-9712-5ED40C3D456A}"/>
+              </a:ext>
+            </a:extLst>
+          </p:cNvPr>
+          <p:cNvSpPr/>
+          <p:nvPr/>
+        </p:nvSpPr>
+        <p:spPr>
+          <a:xfrm>
+            <a:off x="3962399" y="4503600"/>
+            <a:ext cx="1488142" cy="70612"/>
+          </a:xfrm>
+          <a:prstGeom prst="rect">
+            <a:avLst/>
+          </a:prstGeom>
+        </p:spPr>
+        <p:style>
+          <a:lnRef idx="1">
+            <a:schemeClr val="accent2"/>
+          </a:lnRef>
+          <a:fillRef idx="3">
+            <a:schemeClr val="accent2"/>
+          </a:fillRef>
+          <a:effectRef idx="2">
+            <a:schemeClr val="accent2"/>
+          </a:effectRef>
+          <a:fontRef idx="minor">
+            <a:schemeClr val="lt1"/>
+          </a:fontRef>
+        </p:style>
+        <p:txBody>
+          <a:bodyPr rtlCol="0" anchor="ctr"/>
+          <a:lstStyle/>
+          <a:p>
+            <a:pPr algn="ctr"/>
+            <a:endParaRPr lang="hu-HU"/>
+          </a:p>
+        </p:txBody>
+      </p:sp>
+      <p:sp>
+        <p:nvSpPr>
+          <p:cNvPr id="7" name="Téglalap 6">
+            <a:extLst>
+              <a:ext uri="{FF2B5EF4-FFF2-40B4-BE49-F238E27FC236}">
+                <a16:creationId xmlns:a16="http://schemas.microsoft.com/office/drawing/2014/main" id="{57493A57-3403-462E-B233-141DDBC288FF}"/>
+              </a:ext>
+            </a:extLst>
+          </p:cNvPr>
+          <p:cNvSpPr/>
+          <p:nvPr/>
+        </p:nvSpPr>
+        <p:spPr>
+          <a:xfrm>
+            <a:off x="5713484" y="4503600"/>
+            <a:ext cx="1027977" cy="88541"/>
+          </a:xfrm>
+          <a:prstGeom prst="rect">
+            <a:avLst/>
+          </a:prstGeom>
+        </p:spPr>
+        <p:style>
+          <a:lnRef idx="1">
+            <a:schemeClr val="accent5"/>
+          </a:lnRef>
+          <a:fillRef idx="3">
+            <a:schemeClr val="accent5"/>
+          </a:fillRef>
+          <a:effectRef idx="2">
+            <a:schemeClr val="accent5"/>
+          </a:effectRef>
+          <a:fontRef idx="minor">
+            <a:schemeClr val="lt1"/>
+          </a:fontRef>
+        </p:style>
+        <p:txBody>
+          <a:bodyPr rtlCol="0" anchor="ctr"/>
+          <a:lstStyle/>
+          <a:p>
+            <a:pPr algn="ctr"/>
+            <a:endParaRPr lang="hu-HU"/>
+          </a:p>
+        </p:txBody>
+      </p:sp>
+      <p:sp>
+        <p:nvSpPr>
+          <p:cNvPr id="8" name="Téglalap 7">
+            <a:extLst>
+              <a:ext uri="{FF2B5EF4-FFF2-40B4-BE49-F238E27FC236}">
+                <a16:creationId xmlns:a16="http://schemas.microsoft.com/office/drawing/2014/main" id="{A79E2EBF-E774-4ED5-A535-4EB447017B4B}"/>
+              </a:ext>
+            </a:extLst>
+          </p:cNvPr>
+          <p:cNvSpPr/>
+          <p:nvPr/>
+        </p:nvSpPr>
+        <p:spPr>
+          <a:xfrm>
+            <a:off x="7004405" y="4494635"/>
+            <a:ext cx="1203996" cy="88541"/>
+          </a:xfrm>
+          <a:prstGeom prst="rect">
+            <a:avLst/>
+          </a:prstGeom>
+        </p:spPr>
+        <p:style>
+          <a:lnRef idx="1">
+            <a:schemeClr val="accent3"/>
+          </a:lnRef>
+          <a:fillRef idx="3">
+            <a:schemeClr val="accent3"/>
+          </a:fillRef>
+          <a:effectRef idx="2">
+            <a:schemeClr val="accent3"/>
+          </a:effectRef>
+          <a:fontRef idx="minor">
+            <a:schemeClr val="lt1"/>
+          </a:fontRef>
+        </p:style>
+        <p:txBody>
+          <a:bodyPr rtlCol="0" anchor="ctr"/>
+          <a:lstStyle/>
+          <a:p>
+            <a:pPr algn="ctr"/>
+            <a:endParaRPr lang="hu-HU"/>
           </a:p>
         </p:txBody>
       </p:sp>
@@ -3269,7 +3403,7 @@
 </file>
 
 <file path=ppt/slides/slide10.xml><?xml version="1.0" encoding="utf-8"?>
-<p:sld xmlns:a="http://schemas.openxmlformats.org/drawingml/2006/main" xmlns:p="http://schemas.openxmlformats.org/presentationml/2006/main" xmlns:r="http://schemas.openxmlformats.org/officeDocument/2006/relationships">
+<p:sld xmlns:a="http://schemas.openxmlformats.org/drawingml/2006/main" xmlns:r="http://schemas.openxmlformats.org/officeDocument/2006/relationships" xmlns:p="http://schemas.openxmlformats.org/presentationml/2006/main">
   <p:cSld>
     <p:bg>
       <p:bgPr>
@@ -3285,7 +3419,14 @@
         <p:cNvGrpSpPr/>
         <p:nvPr/>
       </p:nvGrpSpPr>
-      <p:grpSpPr/>
+      <p:grpSpPr>
+        <a:xfrm>
+          <a:off x="0" y="0"/>
+          <a:ext cx="0" cy="0"/>
+          <a:chOff x="0" y="0"/>
+          <a:chExt cx="0" cy="0"/>
+        </a:xfrm>
+      </p:grpSpPr>
       <p:sp>
         <p:nvSpPr>
           <p:cNvPr id="2" name="TextBox 1"/>
@@ -3400,7 +3541,7 @@
 </file>
 
 <file path=ppt/slides/slide11.xml><?xml version="1.0" encoding="utf-8"?>
-<p:sld xmlns:a="http://schemas.openxmlformats.org/drawingml/2006/main" xmlns:p="http://schemas.openxmlformats.org/presentationml/2006/main" xmlns:r="http://schemas.openxmlformats.org/officeDocument/2006/relationships">
+<p:sld xmlns:a="http://schemas.openxmlformats.org/drawingml/2006/main" xmlns:r="http://schemas.openxmlformats.org/officeDocument/2006/relationships" xmlns:p="http://schemas.openxmlformats.org/presentationml/2006/main">
   <p:cSld>
     <p:spTree>
       <p:nvGrpSpPr>
@@ -3408,7 +3549,14 @@
         <p:cNvGrpSpPr/>
         <p:nvPr/>
       </p:nvGrpSpPr>
-      <p:grpSpPr/>
+      <p:grpSpPr>
+        <a:xfrm>
+          <a:off x="0" y="0"/>
+          <a:ext cx="0" cy="0"/>
+          <a:chOff x="0" y="0"/>
+          <a:chExt cx="0" cy="0"/>
+        </a:xfrm>
+      </p:grpSpPr>
       <p:sp>
         <p:nvSpPr>
           <p:cNvPr id="2" name="TextBox 1"/>
@@ -3550,15 +3698,12 @@
           </a:p>
           <a:p>
             <a:pPr algn="l"/>
-            <a:r>
-              <a:rPr sz="800" b="0">
-                <a:solidFill>
-                  <a:srgbClr val="1F2937"/>
-                </a:solidFill>
-                <a:latin typeface="Segoe UI"/>
-              </a:rPr>
-              <a:t/>
-            </a:r>
+            <a:endParaRPr sz="1600" b="1">
+              <a:solidFill>
+                <a:srgbClr val="333399"/>
+              </a:solidFill>
+              <a:latin typeface="Segoe UI"/>
+            </a:endParaRPr>
           </a:p>
           <a:p>
             <a:pPr algn="l"/>
@@ -3634,15 +3779,12 @@
           </a:p>
           <a:p>
             <a:pPr algn="l"/>
-            <a:r>
-              <a:rPr sz="800" b="0">
-                <a:solidFill>
-                  <a:srgbClr val="1F2937"/>
-                </a:solidFill>
-                <a:latin typeface="Segoe UI"/>
-              </a:rPr>
-              <a:t/>
-            </a:r>
+            <a:endParaRPr sz="1600" b="1">
+              <a:solidFill>
+                <a:srgbClr val="333399"/>
+              </a:solidFill>
+              <a:latin typeface="Segoe UI"/>
+            </a:endParaRPr>
           </a:p>
           <a:p>
             <a:pPr algn="l"/>
@@ -3730,15 +3872,12 @@
           </a:p>
           <a:p>
             <a:pPr algn="l"/>
-            <a:r>
-              <a:rPr sz="800" b="0">
-                <a:solidFill>
-                  <a:srgbClr val="1F2937"/>
-                </a:solidFill>
-                <a:latin typeface="Segoe UI"/>
-              </a:rPr>
-              <a:t/>
-            </a:r>
+            <a:endParaRPr sz="1600" b="1">
+              <a:solidFill>
+                <a:srgbClr val="333399"/>
+              </a:solidFill>
+              <a:latin typeface="Segoe UI"/>
+            </a:endParaRPr>
           </a:p>
           <a:p>
             <a:pPr algn="l"/>
@@ -3846,6 +3985,50 @@
               </a:rPr>
               <a:t>Fontos: egy csoportba maximum 8 fő jelentkezhet.</a:t>
             </a:r>
+          </a:p>
+        </p:txBody>
+      </p:sp>
+      <p:sp>
+        <p:nvSpPr>
+          <p:cNvPr id="10" name="Téglalap 9">
+            <a:extLst>
+              <a:ext uri="{FF2B5EF4-FFF2-40B4-BE49-F238E27FC236}">
+                <a16:creationId xmlns:a16="http://schemas.microsoft.com/office/drawing/2014/main" id="{A8B1C2E8-574B-4E4C-88F8-735ABE305CD0}"/>
+              </a:ext>
+            </a:extLst>
+          </p:cNvPr>
+          <p:cNvSpPr/>
+          <p:nvPr/>
+        </p:nvSpPr>
+        <p:spPr>
+          <a:xfrm>
+            <a:off x="0" y="6687671"/>
+            <a:ext cx="12192000" cy="170329"/>
+          </a:xfrm>
+          <a:prstGeom prst="rect">
+            <a:avLst/>
+          </a:prstGeom>
+        </p:spPr>
+        <p:style>
+          <a:lnRef idx="1">
+            <a:schemeClr val="accent2"/>
+          </a:lnRef>
+          <a:fillRef idx="3">
+            <a:schemeClr val="accent2"/>
+          </a:fillRef>
+          <a:effectRef idx="2">
+            <a:schemeClr val="accent2"/>
+          </a:effectRef>
+          <a:fontRef idx="minor">
+            <a:schemeClr val="lt1"/>
+          </a:fontRef>
+        </p:style>
+        <p:txBody>
+          <a:bodyPr rtlCol="0" anchor="ctr"/>
+          <a:lstStyle/>
+          <a:p>
+            <a:pPr algn="ctr"/>
+            <a:endParaRPr lang="hu-HU"/>
           </a:p>
         </p:txBody>
       </p:sp>
@@ -3858,7 +4041,7 @@
 </file>
 
 <file path=ppt/slides/slide12.xml><?xml version="1.0" encoding="utf-8"?>
-<p:sld xmlns:a="http://schemas.openxmlformats.org/drawingml/2006/main" xmlns:p="http://schemas.openxmlformats.org/presentationml/2006/main" xmlns:r="http://schemas.openxmlformats.org/officeDocument/2006/relationships">
+<p:sld xmlns:a="http://schemas.openxmlformats.org/drawingml/2006/main" xmlns:r="http://schemas.openxmlformats.org/officeDocument/2006/relationships" xmlns:p="http://schemas.openxmlformats.org/presentationml/2006/main">
   <p:cSld>
     <p:bg>
       <p:bgPr>
@@ -3874,7 +4057,14 @@
         <p:cNvGrpSpPr/>
         <p:nvPr/>
       </p:nvGrpSpPr>
-      <p:grpSpPr/>
+      <p:grpSpPr>
+        <a:xfrm>
+          <a:off x="0" y="0"/>
+          <a:ext cx="0" cy="0"/>
+          <a:chOff x="0" y="0"/>
+          <a:chExt cx="0" cy="0"/>
+        </a:xfrm>
+      </p:grpSpPr>
       <p:sp>
         <p:nvSpPr>
           <p:cNvPr id="2" name="TextBox 1"/>
@@ -3989,7 +4179,7 @@
 </file>
 
 <file path=ppt/slides/slide13.xml><?xml version="1.0" encoding="utf-8"?>
-<p:sld xmlns:a="http://schemas.openxmlformats.org/drawingml/2006/main" xmlns:p="http://schemas.openxmlformats.org/presentationml/2006/main" xmlns:r="http://schemas.openxmlformats.org/officeDocument/2006/relationships">
+<p:sld xmlns:a="http://schemas.openxmlformats.org/drawingml/2006/main" xmlns:r="http://schemas.openxmlformats.org/officeDocument/2006/relationships" xmlns:p="http://schemas.openxmlformats.org/presentationml/2006/main">
   <p:cSld>
     <p:spTree>
       <p:nvGrpSpPr>
@@ -3997,7 +4187,14 @@
         <p:cNvGrpSpPr/>
         <p:nvPr/>
       </p:nvGrpSpPr>
-      <p:grpSpPr/>
+      <p:grpSpPr>
+        <a:xfrm>
+          <a:off x="0" y="0"/>
+          <a:ext cx="0" cy="0"/>
+          <a:chOff x="0" y="0"/>
+          <a:chExt cx="0" cy="0"/>
+        </a:xfrm>
+      </p:grpSpPr>
       <p:sp>
         <p:nvSpPr>
           <p:cNvPr id="2" name="TextBox 1"/>
@@ -4150,15 +4347,45 @@
           </a:p>
           <a:p>
             <a:pPr algn="l"/>
-            <a:r>
-              <a:rPr sz="600" b="0">
+            <a:endParaRPr sz="1400" b="0">
+              <a:solidFill>
+                <a:srgbClr val="1F2937"/>
+              </a:solidFill>
+              <a:latin typeface="Segoe UI"/>
+            </a:endParaRPr>
+          </a:p>
+          <a:p>
+            <a:pPr algn="l"/>
+            <a:r>
+              <a:rPr sz="1600" b="1">
+                <a:solidFill>
+                  <a:srgbClr val="333399"/>
+                </a:solidFill>
+                <a:latin typeface="Segoe UI"/>
+              </a:rPr>
+              <a:t>3 tanfolyam kártya</a:t>
+            </a:r>
+          </a:p>
+          <a:p>
+            <a:pPr algn="l"/>
+            <a:r>
+              <a:rPr sz="1400" b="0">
                 <a:solidFill>
                   <a:srgbClr val="1F2937"/>
                 </a:solidFill>
                 <a:latin typeface="Segoe UI"/>
               </a:rPr>
-              <a:t/>
-            </a:r>
+              <a:t>   Kép, leírás, "Részletek" link</a:t>
+            </a:r>
+          </a:p>
+          <a:p>
+            <a:pPr algn="l"/>
+            <a:endParaRPr sz="1400" b="0">
+              <a:solidFill>
+                <a:srgbClr val="1F2937"/>
+              </a:solidFill>
+              <a:latin typeface="Segoe UI"/>
+            </a:endParaRPr>
           </a:p>
           <a:p>
             <a:pPr algn="l"/>
@@ -4169,7 +4396,7 @@
                 </a:solidFill>
                 <a:latin typeface="Segoe UI"/>
               </a:rPr>
-              <a:t>3 tanfolyam kártya</a:t>
+              <a:t>Induló csoportok tábla</a:t>
             </a:r>
           </a:p>
           <a:p>
@@ -4181,20 +4408,50 @@
                 </a:solidFill>
                 <a:latin typeface="Segoe UI"/>
               </a:rPr>
-              <a:t>   Kép, leírás, "Részletek" link</a:t>
-            </a:r>
-          </a:p>
-          <a:p>
-            <a:pPr algn="l"/>
-            <a:r>
-              <a:rPr sz="600" b="0">
+              <a:t>   Automatikusan frissül: melyik képzés mikor, hol, mennyi a szabad hely</a:t>
+            </a:r>
+          </a:p>
+          <a:p>
+            <a:pPr algn="l"/>
+            <a:endParaRPr sz="1400" b="0">
+              <a:solidFill>
+                <a:srgbClr val="1F2937"/>
+              </a:solidFill>
+              <a:latin typeface="Segoe UI"/>
+            </a:endParaRPr>
+          </a:p>
+          <a:p>
+            <a:pPr algn="l"/>
+            <a:r>
+              <a:rPr sz="1600" b="1">
+                <a:solidFill>
+                  <a:srgbClr val="333399"/>
+                </a:solidFill>
+                <a:latin typeface="Segoe UI"/>
+              </a:rPr>
+              <a:t>Jelentkezési űrlap</a:t>
+            </a:r>
+          </a:p>
+          <a:p>
+            <a:pPr algn="l"/>
+            <a:r>
+              <a:rPr sz="1400" b="0">
                 <a:solidFill>
                   <a:srgbClr val="1F2937"/>
                 </a:solidFill>
                 <a:latin typeface="Segoe UI"/>
               </a:rPr>
-              <a:t/>
-            </a:r>
+              <a:t>   Adatok kitöltése + "Jelentkezem" gomb</a:t>
+            </a:r>
+          </a:p>
+          <a:p>
+            <a:pPr algn="l"/>
+            <a:endParaRPr sz="1400" b="0">
+              <a:solidFill>
+                <a:srgbClr val="1F2937"/>
+              </a:solidFill>
+              <a:latin typeface="Segoe UI"/>
+            </a:endParaRPr>
           </a:p>
           <a:p>
             <a:pPr algn="l"/>
@@ -4205,7 +4462,7 @@
                 </a:solidFill>
                 <a:latin typeface="Segoe UI"/>
               </a:rPr>
-              <a:t>Induló csoportok tábla</a:t>
+              <a:t>Admin belépés</a:t>
             </a:r>
           </a:p>
           <a:p>
@@ -4217,92 +4474,61 @@
                 </a:solidFill>
                 <a:latin typeface="Segoe UI"/>
               </a:rPr>
-              <a:t>   Automatikusan frissül: melyik képzés mikor, hol, mennyi a szabad hely</a:t>
-            </a:r>
-          </a:p>
-          <a:p>
-            <a:pPr algn="l"/>
-            <a:r>
-              <a:rPr sz="600" b="0">
-                <a:solidFill>
-                  <a:srgbClr val="1F2937"/>
-                </a:solidFill>
-                <a:latin typeface="Segoe UI"/>
-              </a:rPr>
-              <a:t/>
-            </a:r>
-          </a:p>
-          <a:p>
-            <a:pPr algn="l"/>
-            <a:r>
-              <a:rPr sz="1600" b="1">
-                <a:solidFill>
-                  <a:srgbClr val="333399"/>
-                </a:solidFill>
-                <a:latin typeface="Segoe UI"/>
-              </a:rPr>
-              <a:t>Jelentkezési űrlap</a:t>
-            </a:r>
-          </a:p>
-          <a:p>
-            <a:pPr algn="l"/>
-            <a:r>
-              <a:rPr sz="1400" b="0">
-                <a:solidFill>
-                  <a:srgbClr val="1F2937"/>
-                </a:solidFill>
-                <a:latin typeface="Segoe UI"/>
-              </a:rPr>
-              <a:t>   Adatok kitöltése + "Jelentkezem" gomb</a:t>
-            </a:r>
-          </a:p>
-          <a:p>
-            <a:pPr algn="l"/>
-            <a:r>
-              <a:rPr sz="600" b="0">
-                <a:solidFill>
-                  <a:srgbClr val="1F2937"/>
-                </a:solidFill>
-                <a:latin typeface="Segoe UI"/>
-              </a:rPr>
-              <a:t/>
-            </a:r>
-          </a:p>
-          <a:p>
-            <a:pPr algn="l"/>
-            <a:r>
-              <a:rPr sz="1600" b="1">
-                <a:solidFill>
-                  <a:srgbClr val="333399"/>
-                </a:solidFill>
-                <a:latin typeface="Segoe UI"/>
-              </a:rPr>
-              <a:t>Admin belépés</a:t>
-            </a:r>
-          </a:p>
-          <a:p>
-            <a:pPr algn="l"/>
-            <a:r>
-              <a:rPr sz="1400" b="0">
-                <a:solidFill>
-                  <a:srgbClr val="1F2937"/>
-                </a:solidFill>
-                <a:latin typeface="Segoe UI"/>
-              </a:rPr>
               <a:t>   Jelszó mező + gomb (az oldal alján)</a:t>
             </a:r>
           </a:p>
           <a:p>
             <a:pPr algn="l"/>
-            <a:r>
-              <a:rPr sz="600" b="0">
-                <a:solidFill>
-                  <a:srgbClr val="1F2937"/>
-                </a:solidFill>
-                <a:latin typeface="Segoe UI"/>
-              </a:rPr>
-              <a:t/>
-            </a:r>
+            <a:endParaRPr sz="1400" b="0">
+              <a:solidFill>
+                <a:srgbClr val="1F2937"/>
+              </a:solidFill>
+              <a:latin typeface="Segoe UI"/>
+            </a:endParaRPr>
+          </a:p>
+        </p:txBody>
+      </p:sp>
+      <p:sp>
+        <p:nvSpPr>
+          <p:cNvPr id="7" name="Téglalap 6">
+            <a:extLst>
+              <a:ext uri="{FF2B5EF4-FFF2-40B4-BE49-F238E27FC236}">
+                <a16:creationId xmlns:a16="http://schemas.microsoft.com/office/drawing/2014/main" id="{903DA9A9-B695-47D2-A21E-045DF460108B}"/>
+              </a:ext>
+            </a:extLst>
+          </p:cNvPr>
+          <p:cNvSpPr/>
+          <p:nvPr/>
+        </p:nvSpPr>
+        <p:spPr>
+          <a:xfrm>
+            <a:off x="0" y="6750800"/>
+            <a:ext cx="12192000" cy="107199"/>
+          </a:xfrm>
+          <a:prstGeom prst="rect">
+            <a:avLst/>
+          </a:prstGeom>
+        </p:spPr>
+        <p:style>
+          <a:lnRef idx="1">
+            <a:schemeClr val="accent5"/>
+          </a:lnRef>
+          <a:fillRef idx="3">
+            <a:schemeClr val="accent5"/>
+          </a:fillRef>
+          <a:effectRef idx="2">
+            <a:schemeClr val="accent5"/>
+          </a:effectRef>
+          <a:fontRef idx="minor">
+            <a:schemeClr val="lt1"/>
+          </a:fontRef>
+        </p:style>
+        <p:txBody>
+          <a:bodyPr rtlCol="0" anchor="ctr"/>
+          <a:lstStyle/>
+          <a:p>
+            <a:pPr algn="ctr"/>
+            <a:endParaRPr lang="hu-HU"/>
           </a:p>
         </p:txBody>
       </p:sp>
@@ -4315,7 +4541,7 @@
 </file>
 
 <file path=ppt/slides/slide14.xml><?xml version="1.0" encoding="utf-8"?>
-<p:sld xmlns:a="http://schemas.openxmlformats.org/drawingml/2006/main" xmlns:p="http://schemas.openxmlformats.org/presentationml/2006/main" xmlns:r="http://schemas.openxmlformats.org/officeDocument/2006/relationships">
+<p:sld xmlns:a="http://schemas.openxmlformats.org/drawingml/2006/main" xmlns:r="http://schemas.openxmlformats.org/officeDocument/2006/relationships" xmlns:p="http://schemas.openxmlformats.org/presentationml/2006/main">
   <p:cSld>
     <p:spTree>
       <p:nvGrpSpPr>
@@ -4323,7 +4549,14 @@
         <p:cNvGrpSpPr/>
         <p:nvPr/>
       </p:nvGrpSpPr>
-      <p:grpSpPr/>
+      <p:grpSpPr>
+        <a:xfrm>
+          <a:off x="0" y="0"/>
+          <a:ext cx="0" cy="0"/>
+          <a:chOff x="0" y="0"/>
+          <a:chExt cx="0" cy="0"/>
+        </a:xfrm>
+      </p:grpSpPr>
       <p:sp>
         <p:nvSpPr>
           <p:cNvPr id="2" name="TextBox 1"/>
@@ -4536,15 +4769,12 @@
           </a:p>
           <a:p>
             <a:pPr algn="l"/>
-            <a:r>
-              <a:rPr sz="1000" b="0">
-                <a:solidFill>
-                  <a:srgbClr val="1F2937"/>
-                </a:solidFill>
-                <a:latin typeface="Segoe UI"/>
-              </a:rPr>
-              <a:t/>
-            </a:r>
+            <a:endParaRPr sz="1600" b="0">
+              <a:solidFill>
+                <a:srgbClr val="1F2937"/>
+              </a:solidFill>
+              <a:latin typeface="Segoe UI"/>
+            </a:endParaRPr>
           </a:p>
           <a:p>
             <a:pPr algn="l"/>
@@ -4557,6 +4787,50 @@
               </a:rPr>
               <a:t>Ha valami nem stimmel, a felhasználó hibaüzenetet kap (pl. "A csoport megtelt").</a:t>
             </a:r>
+          </a:p>
+        </p:txBody>
+      </p:sp>
+      <p:sp>
+        <p:nvSpPr>
+          <p:cNvPr id="6" name="Téglalap 5">
+            <a:extLst>
+              <a:ext uri="{FF2B5EF4-FFF2-40B4-BE49-F238E27FC236}">
+                <a16:creationId xmlns:a16="http://schemas.microsoft.com/office/drawing/2014/main" id="{0631ED38-2C45-4D05-B7F4-786EB7C92365}"/>
+              </a:ext>
+            </a:extLst>
+          </p:cNvPr>
+          <p:cNvSpPr/>
+          <p:nvPr/>
+        </p:nvSpPr>
+        <p:spPr>
+          <a:xfrm>
+            <a:off x="0" y="6750800"/>
+            <a:ext cx="12192000" cy="107199"/>
+          </a:xfrm>
+          <a:prstGeom prst="rect">
+            <a:avLst/>
+          </a:prstGeom>
+        </p:spPr>
+        <p:style>
+          <a:lnRef idx="1">
+            <a:schemeClr val="accent5"/>
+          </a:lnRef>
+          <a:fillRef idx="3">
+            <a:schemeClr val="accent5"/>
+          </a:fillRef>
+          <a:effectRef idx="2">
+            <a:schemeClr val="accent5"/>
+          </a:effectRef>
+          <a:fontRef idx="minor">
+            <a:schemeClr val="lt1"/>
+          </a:fontRef>
+        </p:style>
+        <p:txBody>
+          <a:bodyPr rtlCol="0" anchor="ctr"/>
+          <a:lstStyle/>
+          <a:p>
+            <a:pPr algn="ctr"/>
+            <a:endParaRPr lang="hu-HU"/>
           </a:p>
         </p:txBody>
       </p:sp>
@@ -4569,7 +4843,7 @@
 </file>
 
 <file path=ppt/slides/slide15.xml><?xml version="1.0" encoding="utf-8"?>
-<p:sld xmlns:a="http://schemas.openxmlformats.org/drawingml/2006/main" xmlns:p="http://schemas.openxmlformats.org/presentationml/2006/main" xmlns:r="http://schemas.openxmlformats.org/officeDocument/2006/relationships">
+<p:sld xmlns:a="http://schemas.openxmlformats.org/drawingml/2006/main" xmlns:r="http://schemas.openxmlformats.org/officeDocument/2006/relationships" xmlns:p="http://schemas.openxmlformats.org/presentationml/2006/main">
   <p:cSld>
     <p:bg>
       <p:bgPr>
@@ -4585,7 +4859,14 @@
         <p:cNvGrpSpPr/>
         <p:nvPr/>
       </p:nvGrpSpPr>
-      <p:grpSpPr/>
+      <p:grpSpPr>
+        <a:xfrm>
+          <a:off x="0" y="0"/>
+          <a:ext cx="0" cy="0"/>
+          <a:chOff x="0" y="0"/>
+          <a:chExt cx="0" cy="0"/>
+        </a:xfrm>
+      </p:grpSpPr>
       <p:sp>
         <p:nvSpPr>
           <p:cNvPr id="2" name="TextBox 1"/>
@@ -4700,7 +4981,7 @@
 </file>
 
 <file path=ppt/slides/slide16.xml><?xml version="1.0" encoding="utf-8"?>
-<p:sld xmlns:a="http://schemas.openxmlformats.org/drawingml/2006/main" xmlns:p="http://schemas.openxmlformats.org/presentationml/2006/main" xmlns:r="http://schemas.openxmlformats.org/officeDocument/2006/relationships">
+<p:sld xmlns:a="http://schemas.openxmlformats.org/drawingml/2006/main" xmlns:r="http://schemas.openxmlformats.org/officeDocument/2006/relationships" xmlns:p="http://schemas.openxmlformats.org/presentationml/2006/main">
   <p:cSld>
     <p:spTree>
       <p:nvGrpSpPr>
@@ -4708,7 +4989,14 @@
         <p:cNvGrpSpPr/>
         <p:nvPr/>
       </p:nvGrpSpPr>
-      <p:grpSpPr/>
+      <p:grpSpPr>
+        <a:xfrm>
+          <a:off x="0" y="0"/>
+          <a:ext cx="0" cy="0"/>
+          <a:chOff x="0" y="0"/>
+          <a:chExt cx="0" cy="0"/>
+        </a:xfrm>
+      </p:grpSpPr>
       <p:sp>
         <p:nvSpPr>
           <p:cNvPr id="2" name="TextBox 1"/>
@@ -4885,15 +5173,12 @@
           </a:p>
           <a:p>
             <a:pPr algn="l"/>
-            <a:r>
-              <a:rPr sz="1000" b="0">
-                <a:solidFill>
-                  <a:srgbClr val="1F2937"/>
-                </a:solidFill>
-                <a:latin typeface="Segoe UI"/>
-              </a:rPr>
-              <a:t/>
-            </a:r>
+            <a:endParaRPr sz="1400" b="0">
+              <a:solidFill>
+                <a:srgbClr val="1F2937"/>
+              </a:solidFill>
+              <a:latin typeface="Segoe UI"/>
+            </a:endParaRPr>
           </a:p>
           <a:p>
             <a:pPr algn="l"/>
@@ -4968,14 +5253,35 @@
           </a:p>
           <a:p>
             <a:pPr algn="l"/>
-            <a:r>
-              <a:rPr sz="600" b="0">
+            <a:endParaRPr sz="1800" b="1">
+              <a:solidFill>
+                <a:srgbClr val="333399"/>
+              </a:solidFill>
+              <a:latin typeface="Segoe UI"/>
+            </a:endParaRPr>
+          </a:p>
+          <a:p>
+            <a:pPr algn="l"/>
+            <a:r>
+              <a:rPr sz="1500" b="1">
                 <a:solidFill>
                   <a:srgbClr val="1F2937"/>
                 </a:solidFill>
                 <a:latin typeface="Segoe UI"/>
               </a:rPr>
-              <a:t/>
+              <a:t>Csoportok</a:t>
+            </a:r>
+          </a:p>
+          <a:p>
+            <a:pPr algn="l"/>
+            <a:r>
+              <a:rPr sz="1300" b="0">
+                <a:solidFill>
+                  <a:srgbClr val="6B7280"/>
+                </a:solidFill>
+                <a:latin typeface="Segoe UI"/>
+              </a:rPr>
+              <a:t>  Összes csoport listája + új felvétele</a:t>
             </a:r>
           </a:p>
           <a:p>
@@ -4987,7 +5293,7 @@
                 </a:solidFill>
                 <a:latin typeface="Segoe UI"/>
               </a:rPr>
-              <a:t>Csoportok</a:t>
+              <a:t>Jelentkezok</a:t>
             </a:r>
           </a:p>
           <a:p>
@@ -4999,7 +5305,7 @@
                 </a:solidFill>
                 <a:latin typeface="Segoe UI"/>
               </a:rPr>
-              <a:t>  Összes csoport listája + új felvétele</a:t>
+              <a:t>  Egy csoport jelentkezői + új felvétele</a:t>
             </a:r>
           </a:p>
           <a:p>
@@ -5011,7 +5317,7 @@
                 </a:solidFill>
                 <a:latin typeface="Segoe UI"/>
               </a:rPr>
-              <a:t>Jelentkezok</a:t>
+              <a:t>Csoport módosítás</a:t>
             </a:r>
           </a:p>
           <a:p>
@@ -5023,7 +5329,7 @@
                 </a:solidFill>
                 <a:latin typeface="Segoe UI"/>
               </a:rPr>
-              <a:t>  Egy csoport jelentkezői + új felvétele</a:t>
+              <a:t>  Meglévő csoport adatainak szerkesztése</a:t>
             </a:r>
           </a:p>
           <a:p>
@@ -5035,7 +5341,7 @@
                 </a:solidFill>
                 <a:latin typeface="Segoe UI"/>
               </a:rPr>
-              <a:t>Csoport módosítás</a:t>
+              <a:t>Jelentkező módosítás</a:t>
             </a:r>
           </a:p>
           <a:p>
@@ -5047,7 +5353,7 @@
                 </a:solidFill>
                 <a:latin typeface="Segoe UI"/>
               </a:rPr>
-              <a:t>  Meglévő csoport adatainak szerkesztése</a:t>
+              <a:t>  Egy személy adatainak szerkesztése</a:t>
             </a:r>
           </a:p>
           <a:p>
@@ -5059,7 +5365,7 @@
                 </a:solidFill>
                 <a:latin typeface="Segoe UI"/>
               </a:rPr>
-              <a:t>Jelentkező módosítás</a:t>
+              <a:t>Admin súgó</a:t>
             </a:r>
           </a:p>
           <a:p>
@@ -5071,32 +5377,52 @@
                 </a:solidFill>
                 <a:latin typeface="Segoe UI"/>
               </a:rPr>
-              <a:t>  Egy személy adatainak szerkesztése</a:t>
-            </a:r>
-          </a:p>
-          <a:p>
-            <a:pPr algn="l"/>
-            <a:r>
-              <a:rPr sz="1500" b="1">
-                <a:solidFill>
-                  <a:srgbClr val="1F2937"/>
-                </a:solidFill>
-                <a:latin typeface="Segoe UI"/>
-              </a:rPr>
-              <a:t>Admin súgó</a:t>
-            </a:r>
-          </a:p>
-          <a:p>
-            <a:pPr algn="l"/>
-            <a:r>
-              <a:rPr sz="1300" b="0">
-                <a:solidFill>
-                  <a:srgbClr val="6B7280"/>
-                </a:solidFill>
-                <a:latin typeface="Segoe UI"/>
-              </a:rPr>
               <a:t>  Használati útmutató</a:t>
             </a:r>
+          </a:p>
+        </p:txBody>
+      </p:sp>
+      <p:sp>
+        <p:nvSpPr>
+          <p:cNvPr id="7" name="Téglalap 6">
+            <a:extLst>
+              <a:ext uri="{FF2B5EF4-FFF2-40B4-BE49-F238E27FC236}">
+                <a16:creationId xmlns:a16="http://schemas.microsoft.com/office/drawing/2014/main" id="{6CD62B89-C340-4734-9A19-0F8DC054E7E0}"/>
+              </a:ext>
+            </a:extLst>
+          </p:cNvPr>
+          <p:cNvSpPr/>
+          <p:nvPr/>
+        </p:nvSpPr>
+        <p:spPr>
+          <a:xfrm>
+            <a:off x="1" y="6750800"/>
+            <a:ext cx="12192000" cy="88764"/>
+          </a:xfrm>
+          <a:prstGeom prst="rect">
+            <a:avLst/>
+          </a:prstGeom>
+        </p:spPr>
+        <p:style>
+          <a:lnRef idx="1">
+            <a:schemeClr val="accent3"/>
+          </a:lnRef>
+          <a:fillRef idx="3">
+            <a:schemeClr val="accent3"/>
+          </a:fillRef>
+          <a:effectRef idx="2">
+            <a:schemeClr val="accent3"/>
+          </a:effectRef>
+          <a:fontRef idx="minor">
+            <a:schemeClr val="lt1"/>
+          </a:fontRef>
+        </p:style>
+        <p:txBody>
+          <a:bodyPr rtlCol="0" anchor="ctr"/>
+          <a:lstStyle/>
+          <a:p>
+            <a:pPr algn="ctr"/>
+            <a:endParaRPr lang="hu-HU"/>
           </a:p>
         </p:txBody>
       </p:sp>
@@ -5109,7 +5435,7 @@
 </file>
 
 <file path=ppt/slides/slide17.xml><?xml version="1.0" encoding="utf-8"?>
-<p:sld xmlns:a="http://schemas.openxmlformats.org/drawingml/2006/main" xmlns:p="http://schemas.openxmlformats.org/presentationml/2006/main" xmlns:r="http://schemas.openxmlformats.org/officeDocument/2006/relationships">
+<p:sld xmlns:a="http://schemas.openxmlformats.org/drawingml/2006/main" xmlns:r="http://schemas.openxmlformats.org/officeDocument/2006/relationships" xmlns:p="http://schemas.openxmlformats.org/presentationml/2006/main">
   <p:cSld>
     <p:bg>
       <p:bgPr>
@@ -5125,7 +5451,14 @@
         <p:cNvGrpSpPr/>
         <p:nvPr/>
       </p:nvGrpSpPr>
-      <p:grpSpPr/>
+      <p:grpSpPr>
+        <a:xfrm>
+          <a:off x="0" y="0"/>
+          <a:ext cx="0" cy="0"/>
+          <a:chOff x="0" y="0"/>
+          <a:chExt cx="0" cy="0"/>
+        </a:xfrm>
+      </p:grpSpPr>
       <p:sp>
         <p:nvSpPr>
           <p:cNvPr id="2" name="TextBox 1"/>
@@ -5240,7 +5573,7 @@
 </file>
 
 <file path=ppt/slides/slide18.xml><?xml version="1.0" encoding="utf-8"?>
-<p:sld xmlns:a="http://schemas.openxmlformats.org/drawingml/2006/main" xmlns:p="http://schemas.openxmlformats.org/presentationml/2006/main" xmlns:r="http://schemas.openxmlformats.org/officeDocument/2006/relationships">
+<p:sld xmlns:a="http://schemas.openxmlformats.org/drawingml/2006/main" xmlns:r="http://schemas.openxmlformats.org/officeDocument/2006/relationships" xmlns:p="http://schemas.openxmlformats.org/presentationml/2006/main">
   <p:cSld>
     <p:spTree>
       <p:nvGrpSpPr>
@@ -5248,7 +5581,14 @@
         <p:cNvGrpSpPr/>
         <p:nvPr/>
       </p:nvGrpSpPr>
-      <p:grpSpPr/>
+      <p:grpSpPr>
+        <a:xfrm>
+          <a:off x="0" y="0"/>
+          <a:ext cx="0" cy="0"/>
+          <a:chOff x="0" y="0"/>
+          <a:chExt cx="0" cy="0"/>
+        </a:xfrm>
+      </p:grpSpPr>
       <p:sp>
         <p:nvSpPr>
           <p:cNvPr id="2" name="TextBox 1"/>
@@ -5389,25 +5729,22 @@
           </a:p>
           <a:p>
             <a:pPr algn="l"/>
-            <a:r>
-              <a:rPr sz="600" b="0">
+            <a:endParaRPr sz="1800" b="1">
+              <a:solidFill>
+                <a:srgbClr val="333399"/>
+              </a:solidFill>
+              <a:latin typeface="Segoe UI"/>
+            </a:endParaRPr>
+          </a:p>
+          <a:p>
+            <a:pPr algn="l"/>
+            <a:r>
+              <a:rPr sz="1400" b="1">
                 <a:solidFill>
                   <a:srgbClr val="1F2937"/>
                 </a:solidFill>
                 <a:latin typeface="Segoe UI"/>
               </a:rPr>
-              <a:t/>
-            </a:r>
-          </a:p>
-          <a:p>
-            <a:pPr algn="l"/>
-            <a:r>
-              <a:rPr sz="1400" b="1">
-                <a:solidFill>
-                  <a:srgbClr val="1F2937"/>
-                </a:solidFill>
-                <a:latin typeface="Segoe UI"/>
-              </a:rPr>
               <a:t>Csoportok listája</a:t>
             </a:r>
           </a:p>
@@ -5425,15 +5762,12 @@
           </a:p>
           <a:p>
             <a:pPr algn="l"/>
-            <a:r>
-              <a:rPr sz="400" b="0">
-                <a:solidFill>
-                  <a:srgbClr val="1F2937"/>
-                </a:solidFill>
-                <a:latin typeface="Segoe UI"/>
-              </a:rPr>
-              <a:t/>
-            </a:r>
+            <a:endParaRPr sz="1300" b="0">
+              <a:solidFill>
+                <a:srgbClr val="6B7280"/>
+              </a:solidFill>
+              <a:latin typeface="Segoe UI"/>
+            </a:endParaRPr>
           </a:p>
           <a:p>
             <a:pPr algn="l"/>
@@ -5508,14 +5842,23 @@
           </a:p>
           <a:p>
             <a:pPr algn="l"/>
-            <a:r>
-              <a:rPr sz="600" b="0">
+            <a:endParaRPr sz="1800" b="1">
+              <a:solidFill>
+                <a:srgbClr val="333399"/>
+              </a:solidFill>
+              <a:latin typeface="Segoe UI"/>
+            </a:endParaRPr>
+          </a:p>
+          <a:p>
+            <a:pPr algn="l"/>
+            <a:r>
+              <a:rPr sz="1300" b="0">
                 <a:solidFill>
                   <a:srgbClr val="1F2937"/>
                 </a:solidFill>
                 <a:latin typeface="Segoe UI"/>
               </a:rPr>
-              <a:t/>
+              <a:t>Bejelentkezés (jelszó ellen. + token)</a:t>
             </a:r>
           </a:p>
           <a:p>
@@ -5527,7 +5870,7 @@
                 </a:solidFill>
                 <a:latin typeface="Segoe UI"/>
               </a:rPr>
-              <a:t>Bejelentkezés (jelszó ellen. + token)</a:t>
+              <a:t>Összes csoport listája</a:t>
             </a:r>
           </a:p>
           <a:p>
@@ -5539,7 +5882,7 @@
                 </a:solidFill>
                 <a:latin typeface="Segoe UI"/>
               </a:rPr>
-              <a:t>Összes csoport listája</a:t>
+              <a:t>Új csoport hozzáadása</a:t>
             </a:r>
           </a:p>
           <a:p>
@@ -5551,7 +5894,7 @@
                 </a:solidFill>
                 <a:latin typeface="Segoe UI"/>
               </a:rPr>
-              <a:t>Új csoport hozzáadása</a:t>
+              <a:t>Csoport adatainak lekérése</a:t>
             </a:r>
           </a:p>
           <a:p>
@@ -5563,7 +5906,7 @@
                 </a:solidFill>
                 <a:latin typeface="Segoe UI"/>
               </a:rPr>
-              <a:t>Csoport adatainak lekérése</a:t>
+              <a:t>Csoport módosítása</a:t>
             </a:r>
           </a:p>
           <a:p>
@@ -5575,7 +5918,7 @@
                 </a:solidFill>
                 <a:latin typeface="Segoe UI"/>
               </a:rPr>
-              <a:t>Csoport módosítása</a:t>
+              <a:t>Csoport törlése (csak ha üres)</a:t>
             </a:r>
           </a:p>
           <a:p>
@@ -5587,7 +5930,7 @@
                 </a:solidFill>
                 <a:latin typeface="Segoe UI"/>
               </a:rPr>
-              <a:t>Csoport törlése (csak ha üres)</a:t>
+              <a:t>Egy csoport jelentkezői</a:t>
             </a:r>
           </a:p>
           <a:p>
@@ -5599,7 +5942,7 @@
                 </a:solidFill>
                 <a:latin typeface="Segoe UI"/>
               </a:rPr>
-              <a:t>Egy csoport jelentkezői</a:t>
+              <a:t>Jelentkező adatai</a:t>
             </a:r>
           </a:p>
           <a:p>
@@ -5611,7 +5954,7 @@
                 </a:solidFill>
                 <a:latin typeface="Segoe UI"/>
               </a:rPr>
-              <a:t>Jelentkező adatai</a:t>
+              <a:t>Jelentkező módosítása</a:t>
             </a:r>
           </a:p>
           <a:p>
@@ -5623,20 +5966,52 @@
                 </a:solidFill>
                 <a:latin typeface="Segoe UI"/>
               </a:rPr>
-              <a:t>Jelentkező módosítása</a:t>
-            </a:r>
-          </a:p>
-          <a:p>
-            <a:pPr algn="l"/>
-            <a:r>
-              <a:rPr sz="1300" b="0">
-                <a:solidFill>
-                  <a:srgbClr val="1F2937"/>
-                </a:solidFill>
-                <a:latin typeface="Segoe UI"/>
-              </a:rPr>
               <a:t>Jelentkező törlése</a:t>
             </a:r>
+          </a:p>
+        </p:txBody>
+      </p:sp>
+      <p:sp>
+        <p:nvSpPr>
+          <p:cNvPr id="7" name="Téglalap 6">
+            <a:extLst>
+              <a:ext uri="{FF2B5EF4-FFF2-40B4-BE49-F238E27FC236}">
+                <a16:creationId xmlns:a16="http://schemas.microsoft.com/office/drawing/2014/main" id="{8308F67A-6C3A-477C-8A2E-69B7F92A8379}"/>
+              </a:ext>
+            </a:extLst>
+          </p:cNvPr>
+          <p:cNvSpPr/>
+          <p:nvPr/>
+        </p:nvSpPr>
+        <p:spPr>
+          <a:xfrm>
+            <a:off x="0" y="6750800"/>
+            <a:ext cx="12192000" cy="107200"/>
+          </a:xfrm>
+          <a:prstGeom prst="rect">
+            <a:avLst/>
+          </a:prstGeom>
+        </p:spPr>
+        <p:style>
+          <a:lnRef idx="1">
+            <a:schemeClr val="accent2"/>
+          </a:lnRef>
+          <a:fillRef idx="3">
+            <a:schemeClr val="accent2"/>
+          </a:fillRef>
+          <a:effectRef idx="2">
+            <a:schemeClr val="accent2"/>
+          </a:effectRef>
+          <a:fontRef idx="minor">
+            <a:schemeClr val="lt1"/>
+          </a:fontRef>
+        </p:style>
+        <p:txBody>
+          <a:bodyPr rtlCol="0" anchor="ctr"/>
+          <a:lstStyle/>
+          <a:p>
+            <a:pPr algn="ctr"/>
+            <a:endParaRPr lang="hu-HU"/>
           </a:p>
         </p:txBody>
       </p:sp>
@@ -5649,7 +6024,7 @@
 </file>
 
 <file path=ppt/slides/slide19.xml><?xml version="1.0" encoding="utf-8"?>
-<p:sld xmlns:a="http://schemas.openxmlformats.org/drawingml/2006/main" xmlns:p="http://schemas.openxmlformats.org/presentationml/2006/main" xmlns:r="http://schemas.openxmlformats.org/officeDocument/2006/relationships">
+<p:sld xmlns:a="http://schemas.openxmlformats.org/drawingml/2006/main" xmlns:r="http://schemas.openxmlformats.org/officeDocument/2006/relationships" xmlns:p="http://schemas.openxmlformats.org/presentationml/2006/main">
   <p:cSld>
     <p:bg>
       <p:bgPr>
@@ -5665,7 +6040,14 @@
         <p:cNvGrpSpPr/>
         <p:nvPr/>
       </p:nvGrpSpPr>
-      <p:grpSpPr/>
+      <p:grpSpPr>
+        <a:xfrm>
+          <a:off x="0" y="0"/>
+          <a:ext cx="0" cy="0"/>
+          <a:chOff x="0" y="0"/>
+          <a:chExt cx="0" cy="0"/>
+        </a:xfrm>
+      </p:grpSpPr>
       <p:sp>
         <p:nvSpPr>
           <p:cNvPr id="2" name="TextBox 1"/>
@@ -5780,7 +6162,7 @@
 </file>
 
 <file path=ppt/slides/slide2.xml><?xml version="1.0" encoding="utf-8"?>
-<p:sld xmlns:a="http://schemas.openxmlformats.org/drawingml/2006/main" xmlns:p="http://schemas.openxmlformats.org/presentationml/2006/main" xmlns:r="http://schemas.openxmlformats.org/officeDocument/2006/relationships">
+<p:sld xmlns:a="http://schemas.openxmlformats.org/drawingml/2006/main" xmlns:r="http://schemas.openxmlformats.org/officeDocument/2006/relationships" xmlns:p="http://schemas.openxmlformats.org/presentationml/2006/main">
   <p:cSld>
     <p:spTree>
       <p:nvGrpSpPr>
@@ -5788,7 +6170,14 @@
         <p:cNvGrpSpPr/>
         <p:nvPr/>
       </p:nvGrpSpPr>
-      <p:grpSpPr/>
+      <p:grpSpPr>
+        <a:xfrm>
+          <a:off x="0" y="0"/>
+          <a:ext cx="0" cy="0"/>
+          <a:chOff x="0" y="0"/>
+          <a:chExt cx="0" cy="0"/>
+        </a:xfrm>
+      </p:grpSpPr>
       <p:sp>
         <p:nvSpPr>
           <p:cNvPr id="2" name="TextBox 1"/>
@@ -6057,6 +6446,50 @@
               </a:rPr>
               <a:t>10. Hogyan kell elindítani?</a:t>
             </a:r>
+          </a:p>
+        </p:txBody>
+      </p:sp>
+      <p:sp>
+        <p:nvSpPr>
+          <p:cNvPr id="8" name="Téglalap 7">
+            <a:extLst>
+              <a:ext uri="{FF2B5EF4-FFF2-40B4-BE49-F238E27FC236}">
+                <a16:creationId xmlns:a16="http://schemas.microsoft.com/office/drawing/2014/main" id="{5CBB1B44-7C31-432E-A89C-C69394CB51E3}"/>
+              </a:ext>
+            </a:extLst>
+          </p:cNvPr>
+          <p:cNvSpPr/>
+          <p:nvPr/>
+        </p:nvSpPr>
+        <p:spPr>
+          <a:xfrm>
+            <a:off x="1" y="6750800"/>
+            <a:ext cx="12192000" cy="88764"/>
+          </a:xfrm>
+          <a:prstGeom prst="rect">
+            <a:avLst/>
+          </a:prstGeom>
+        </p:spPr>
+        <p:style>
+          <a:lnRef idx="1">
+            <a:schemeClr val="accent3"/>
+          </a:lnRef>
+          <a:fillRef idx="3">
+            <a:schemeClr val="accent3"/>
+          </a:fillRef>
+          <a:effectRef idx="2">
+            <a:schemeClr val="accent3"/>
+          </a:effectRef>
+          <a:fontRef idx="minor">
+            <a:schemeClr val="lt1"/>
+          </a:fontRef>
+        </p:style>
+        <p:txBody>
+          <a:bodyPr rtlCol="0" anchor="ctr"/>
+          <a:lstStyle/>
+          <a:p>
+            <a:pPr algn="ctr"/>
+            <a:endParaRPr lang="hu-HU"/>
           </a:p>
         </p:txBody>
       </p:sp>
@@ -6069,7 +6502,7 @@
 </file>
 
 <file path=ppt/slides/slide20.xml><?xml version="1.0" encoding="utf-8"?>
-<p:sld xmlns:a="http://schemas.openxmlformats.org/drawingml/2006/main" xmlns:p="http://schemas.openxmlformats.org/presentationml/2006/main" xmlns:r="http://schemas.openxmlformats.org/officeDocument/2006/relationships">
+<p:sld xmlns:a="http://schemas.openxmlformats.org/drawingml/2006/main" xmlns:r="http://schemas.openxmlformats.org/officeDocument/2006/relationships" xmlns:p="http://schemas.openxmlformats.org/presentationml/2006/main">
   <p:cSld>
     <p:spTree>
       <p:nvGrpSpPr>
@@ -6077,7 +6510,14 @@
         <p:cNvGrpSpPr/>
         <p:nvPr/>
       </p:nvGrpSpPr>
-      <p:grpSpPr/>
+      <p:grpSpPr>
+        <a:xfrm>
+          <a:off x="0" y="0"/>
+          <a:ext cx="0" cy="0"/>
+          <a:chOff x="0" y="0"/>
+          <a:chExt cx="0" cy="0"/>
+        </a:xfrm>
+      </p:grpSpPr>
       <p:sp>
         <p:nvSpPr>
           <p:cNvPr id="2" name="TextBox 1"/>
@@ -6230,15 +6670,45 @@
           </a:p>
           <a:p>
             <a:pPr algn="l"/>
-            <a:r>
-              <a:rPr sz="600" b="0">
+            <a:endParaRPr sz="1300" b="0">
+              <a:solidFill>
+                <a:srgbClr val="1F2937"/>
+              </a:solidFill>
+              <a:latin typeface="Segoe UI"/>
+            </a:endParaRPr>
+          </a:p>
+          <a:p>
+            <a:pPr algn="l"/>
+            <a:r>
+              <a:rPr sz="1600" b="1">
+                <a:solidFill>
+                  <a:srgbClr val="333399"/>
+                </a:solidFill>
+                <a:latin typeface="Segoe UI"/>
+              </a:rPr>
+              <a:t>Belépési igazolvány (token)</a:t>
+            </a:r>
+          </a:p>
+          <a:p>
+            <a:pPr algn="l"/>
+            <a:r>
+              <a:rPr sz="1300" b="0">
                 <a:solidFill>
                   <a:srgbClr val="1F2937"/>
                 </a:solidFill>
                 <a:latin typeface="Segoe UI"/>
               </a:rPr>
-              <a:t/>
-            </a:r>
+              <a:t>Sikeres belépés után a szerver kiad egy "igazolvanyt" ami 1 óráig érvényes. Minden kérésnél ezt mutatja be az admin. Ha lejár, újra be kell lépni.</a:t>
+            </a:r>
+          </a:p>
+          <a:p>
+            <a:pPr algn="l"/>
+            <a:endParaRPr sz="1300" b="0">
+              <a:solidFill>
+                <a:srgbClr val="1F2937"/>
+              </a:solidFill>
+              <a:latin typeface="Segoe UI"/>
+            </a:endParaRPr>
           </a:p>
           <a:p>
             <a:pPr algn="l"/>
@@ -6249,7 +6719,7 @@
                 </a:solidFill>
                 <a:latin typeface="Segoe UI"/>
               </a:rPr>
-              <a:t>Belépési igazolvány (token)</a:t>
+              <a:t>Külön titkos fájl (.env)</a:t>
             </a:r>
           </a:p>
           <a:p>
@@ -6261,92 +6731,94 @@
                 </a:solidFill>
                 <a:latin typeface="Segoe UI"/>
               </a:rPr>
-              <a:t>Sikeres belépés után a szerver kiad egy "igazolvanyt" ami 1 óráig érvényes. Minden kérésnél ezt mutatja be az admin. Ha lejár, újra be kell lépni.</a:t>
-            </a:r>
-          </a:p>
-          <a:p>
-            <a:pPr algn="l"/>
-            <a:r>
-              <a:rPr sz="600" b="0">
+              <a:t>A jelszó és a titkos kulcs egy külön fájlban vannak, nem a program kódjában. Ez a fájl nem kerül fel az internetre.</a:t>
+            </a:r>
+          </a:p>
+          <a:p>
+            <a:pPr algn="l"/>
+            <a:endParaRPr sz="1300" b="0">
+              <a:solidFill>
+                <a:srgbClr val="1F2937"/>
+              </a:solidFill>
+              <a:latin typeface="Segoe UI"/>
+            </a:endParaRPr>
+          </a:p>
+          <a:p>
+            <a:pPr algn="l"/>
+            <a:r>
+              <a:rPr sz="1600" b="1">
+                <a:solidFill>
+                  <a:srgbClr val="333399"/>
+                </a:solidFill>
+                <a:latin typeface="Segoe UI"/>
+              </a:rPr>
+              <a:t>Adatvedelem</a:t>
+            </a:r>
+          </a:p>
+          <a:p>
+            <a:pPr algn="l"/>
+            <a:r>
+              <a:rPr sz="1300" b="0">
                 <a:solidFill>
                   <a:srgbClr val="1F2937"/>
                 </a:solidFill>
                 <a:latin typeface="Segoe UI"/>
               </a:rPr>
-              <a:t/>
-            </a:r>
-          </a:p>
-          <a:p>
-            <a:pPr algn="l"/>
-            <a:r>
-              <a:rPr sz="1600" b="1">
-                <a:solidFill>
-                  <a:srgbClr val="333399"/>
-                </a:solidFill>
-                <a:latin typeface="Segoe UI"/>
-              </a:rPr>
-              <a:t>Külön titkos fájl (.env)</a:t>
-            </a:r>
-          </a:p>
-          <a:p>
-            <a:pPr algn="l"/>
-            <a:r>
-              <a:rPr sz="1300" b="0">
-                <a:solidFill>
-                  <a:srgbClr val="1F2937"/>
-                </a:solidFill>
-                <a:latin typeface="Segoe UI"/>
-              </a:rPr>
-              <a:t>A jelszó és a titkos kulcs egy külön fájlban vannak, nem a program kódjában. Ez a fájl nem kerül fel az internetre.</a:t>
-            </a:r>
-          </a:p>
-          <a:p>
-            <a:pPr algn="l"/>
-            <a:r>
-              <a:rPr sz="600" b="0">
-                <a:solidFill>
-                  <a:srgbClr val="1F2937"/>
-                </a:solidFill>
-                <a:latin typeface="Segoe UI"/>
-              </a:rPr>
-              <a:t/>
-            </a:r>
-          </a:p>
-          <a:p>
-            <a:pPr algn="l"/>
-            <a:r>
-              <a:rPr sz="1600" b="1">
-                <a:solidFill>
-                  <a:srgbClr val="333399"/>
-                </a:solidFill>
-                <a:latin typeface="Segoe UI"/>
-              </a:rPr>
-              <a:t>Adatvedelem</a:t>
-            </a:r>
-          </a:p>
-          <a:p>
-            <a:pPr algn="l"/>
-            <a:r>
-              <a:rPr sz="1300" b="0">
-                <a:solidFill>
-                  <a:srgbClr val="1F2937"/>
-                </a:solidFill>
-                <a:latin typeface="Segoe UI"/>
-              </a:rPr>
               <a:t>Egy e-maillel csak egyszer lehet jelentkezni egy csoportba. Egy csoportba max 8 fő fér. Csoportot csak üresen lehet törölni.</a:t>
             </a:r>
           </a:p>
           <a:p>
             <a:pPr algn="l"/>
-            <a:r>
-              <a:rPr sz="600" b="0">
-                <a:solidFill>
-                  <a:srgbClr val="1F2937"/>
-                </a:solidFill>
-                <a:latin typeface="Segoe UI"/>
-              </a:rPr>
-              <a:t/>
-            </a:r>
+            <a:endParaRPr sz="1300" b="0">
+              <a:solidFill>
+                <a:srgbClr val="1F2937"/>
+              </a:solidFill>
+              <a:latin typeface="Segoe UI"/>
+            </a:endParaRPr>
+          </a:p>
+        </p:txBody>
+      </p:sp>
+      <p:sp>
+        <p:nvSpPr>
+          <p:cNvPr id="6" name="Téglalap 5">
+            <a:extLst>
+              <a:ext uri="{FF2B5EF4-FFF2-40B4-BE49-F238E27FC236}">
+                <a16:creationId xmlns:a16="http://schemas.microsoft.com/office/drawing/2014/main" id="{1744012E-9E29-473D-B60C-0A659FE3ABDB}"/>
+              </a:ext>
+            </a:extLst>
+          </p:cNvPr>
+          <p:cNvSpPr/>
+          <p:nvPr/>
+        </p:nvSpPr>
+        <p:spPr>
+          <a:xfrm>
+            <a:off x="0" y="6750800"/>
+            <a:ext cx="12192000" cy="107200"/>
+          </a:xfrm>
+          <a:prstGeom prst="rect">
+            <a:avLst/>
+          </a:prstGeom>
+        </p:spPr>
+        <p:style>
+          <a:lnRef idx="1">
+            <a:schemeClr val="accent2"/>
+          </a:lnRef>
+          <a:fillRef idx="3">
+            <a:schemeClr val="accent2"/>
+          </a:fillRef>
+          <a:effectRef idx="2">
+            <a:schemeClr val="accent2"/>
+          </a:effectRef>
+          <a:fontRef idx="minor">
+            <a:schemeClr val="lt1"/>
+          </a:fontRef>
+        </p:style>
+        <p:txBody>
+          <a:bodyPr rtlCol="0" anchor="ctr"/>
+          <a:lstStyle/>
+          <a:p>
+            <a:pPr algn="ctr"/>
+            <a:endParaRPr lang="hu-HU"/>
           </a:p>
         </p:txBody>
       </p:sp>
@@ -6359,7 +6831,7 @@
 </file>
 
 <file path=ppt/slides/slide21.xml><?xml version="1.0" encoding="utf-8"?>
-<p:sld xmlns:a="http://schemas.openxmlformats.org/drawingml/2006/main" xmlns:p="http://schemas.openxmlformats.org/presentationml/2006/main" xmlns:r="http://schemas.openxmlformats.org/officeDocument/2006/relationships">
+<p:sld xmlns:a="http://schemas.openxmlformats.org/drawingml/2006/main" xmlns:r="http://schemas.openxmlformats.org/officeDocument/2006/relationships" xmlns:p="http://schemas.openxmlformats.org/presentationml/2006/main">
   <p:cSld>
     <p:bg>
       <p:bgPr>
@@ -6375,7 +6847,14 @@
         <p:cNvGrpSpPr/>
         <p:nvPr/>
       </p:nvGrpSpPr>
-      <p:grpSpPr/>
+      <p:grpSpPr>
+        <a:xfrm>
+          <a:off x="0" y="0"/>
+          <a:ext cx="0" cy="0"/>
+          <a:chOff x="0" y="0"/>
+          <a:chExt cx="0" cy="0"/>
+        </a:xfrm>
+      </p:grpSpPr>
       <p:sp>
         <p:nvSpPr>
           <p:cNvPr id="2" name="TextBox 1"/>
@@ -6490,7 +6969,7 @@
 </file>
 
 <file path=ppt/slides/slide22.xml><?xml version="1.0" encoding="utf-8"?>
-<p:sld xmlns:a="http://schemas.openxmlformats.org/drawingml/2006/main" xmlns:p="http://schemas.openxmlformats.org/presentationml/2006/main" xmlns:r="http://schemas.openxmlformats.org/officeDocument/2006/relationships">
+<p:sld xmlns:a="http://schemas.openxmlformats.org/drawingml/2006/main" xmlns:r="http://schemas.openxmlformats.org/officeDocument/2006/relationships" xmlns:p="http://schemas.openxmlformats.org/presentationml/2006/main">
   <p:cSld>
     <p:spTree>
       <p:nvGrpSpPr>
@@ -6498,7 +6977,14 @@
         <p:cNvGrpSpPr/>
         <p:nvPr/>
       </p:nvGrpSpPr>
-      <p:grpSpPr/>
+      <p:grpSpPr>
+        <a:xfrm>
+          <a:off x="0" y="0"/>
+          <a:ext cx="0" cy="0"/>
+          <a:chOff x="0" y="0"/>
+          <a:chExt cx="0" cy="0"/>
+        </a:xfrm>
+      </p:grpSpPr>
       <p:sp>
         <p:nvSpPr>
           <p:cNvPr id="2" name="TextBox 1"/>
@@ -6639,14 +7125,23 @@
           </a:p>
           <a:p>
             <a:pPr algn="l"/>
-            <a:r>
-              <a:rPr sz="600" b="0">
+            <a:endParaRPr sz="1800" b="1">
+              <a:solidFill>
+                <a:srgbClr val="333399"/>
+              </a:solidFill>
+              <a:latin typeface="Segoe UI"/>
+            </a:endParaRPr>
+          </a:p>
+          <a:p>
+            <a:pPr algn="l"/>
+            <a:r>
+              <a:rPr sz="1400" b="0">
                 <a:solidFill>
                   <a:srgbClr val="1F2937"/>
                 </a:solidFill>
                 <a:latin typeface="Segoe UI"/>
               </a:rPr>
-              <a:t/>
+              <a:t>Küldünk kérelmet a szervernek és</a:t>
             </a:r>
           </a:p>
           <a:p>
@@ -6658,32 +7153,17 @@
                 </a:solidFill>
                 <a:latin typeface="Segoe UI"/>
               </a:rPr>
-              <a:t>Küldünk kérelmet a szervernek és</a:t>
-            </a:r>
-          </a:p>
-          <a:p>
-            <a:pPr algn="l"/>
-            <a:r>
-              <a:rPr sz="1400" b="0">
-                <a:solidFill>
-                  <a:srgbClr val="1F2937"/>
-                </a:solidFill>
-                <a:latin typeface="Segoe UI"/>
-              </a:rPr>
               <a:t>megnézzük, a várt válasz jön-e vissza.</a:t>
             </a:r>
           </a:p>
           <a:p>
             <a:pPr algn="l"/>
-            <a:r>
-              <a:rPr sz="600" b="0">
-                <a:solidFill>
-                  <a:srgbClr val="1F2937"/>
-                </a:solidFill>
-                <a:latin typeface="Segoe UI"/>
-              </a:rPr>
-              <a:t/>
-            </a:r>
+            <a:endParaRPr sz="1400" b="0">
+              <a:solidFill>
+                <a:srgbClr val="1F2937"/>
+              </a:solidFill>
+              <a:latin typeface="Segoe UI"/>
+            </a:endParaRPr>
           </a:p>
           <a:p>
             <a:pPr algn="l"/>
@@ -6782,14 +7262,23 @@
           </a:p>
           <a:p>
             <a:pPr algn="l"/>
-            <a:r>
-              <a:rPr sz="600" b="0">
+            <a:endParaRPr sz="1800" b="1">
+              <a:solidFill>
+                <a:srgbClr val="333399"/>
+              </a:solidFill>
+              <a:latin typeface="Segoe UI"/>
+            </a:endParaRPr>
+          </a:p>
+          <a:p>
+            <a:pPr algn="l"/>
+            <a:r>
+              <a:rPr sz="1400" b="0">
                 <a:solidFill>
                   <a:srgbClr val="1F2937"/>
                 </a:solidFill>
                 <a:latin typeface="Segoe UI"/>
               </a:rPr>
-              <a:t/>
+              <a:t>Böngészőbe betöltjük az oldalt</a:t>
             </a:r>
           </a:p>
           <a:p>
@@ -6801,67 +7290,61 @@
                 </a:solidFill>
                 <a:latin typeface="Segoe UI"/>
               </a:rPr>
-              <a:t>Böngészőbe betöltjük az oldalt</a:t>
-            </a:r>
+              <a:t>és végigcsináljuk a műveleteket:</a:t>
+            </a:r>
+          </a:p>
+          <a:p>
+            <a:pPr algn="l"/>
+            <a:endParaRPr sz="1400" b="0">
+              <a:solidFill>
+                <a:srgbClr val="1F2937"/>
+              </a:solidFill>
+              <a:latin typeface="Segoe UI"/>
+            </a:endParaRPr>
+          </a:p>
+          <a:p>
+            <a:pPr algn="l"/>
+            <a:r>
+              <a:rPr sz="1400" b="1">
+                <a:solidFill>
+                  <a:srgbClr val="1F2937"/>
+                </a:solidFill>
+                <a:latin typeface="Segoe UI"/>
+              </a:rPr>
+              <a:t>27 admin teszteset</a:t>
+            </a:r>
+          </a:p>
+          <a:p>
+            <a:pPr algn="l"/>
+            <a:r>
+              <a:rPr sz="1400" b="1">
+                <a:solidFill>
+                  <a:srgbClr val="1F2937"/>
+                </a:solidFill>
+                <a:latin typeface="Segoe UI"/>
+              </a:rPr>
+              <a:t>24 nyilvános teszteset</a:t>
+            </a:r>
+          </a:p>
+          <a:p>
+            <a:pPr algn="l"/>
+            <a:endParaRPr sz="1400" b="1">
+              <a:solidFill>
+                <a:srgbClr val="1F2937"/>
+              </a:solidFill>
+              <a:latin typeface="Segoe UI"/>
+            </a:endParaRPr>
           </a:p>
           <a:p>
             <a:pPr algn="l"/>
             <a:r>
               <a:rPr sz="1400" b="0">
                 <a:solidFill>
-                  <a:srgbClr val="1F2937"/>
-                </a:solidFill>
-                <a:latin typeface="Segoe UI"/>
-              </a:rPr>
-              <a:t>és végigcsináljuk a műveleteket:</a:t>
-            </a:r>
-          </a:p>
-          <a:p>
-            <a:pPr algn="l"/>
-            <a:r>
-              <a:rPr sz="600" b="0">
-                <a:solidFill>
-                  <a:srgbClr val="1F2937"/>
-                </a:solidFill>
-                <a:latin typeface="Segoe UI"/>
-              </a:rPr>
-              <a:t/>
-            </a:r>
-          </a:p>
-          <a:p>
-            <a:pPr algn="l"/>
-            <a:r>
-              <a:rPr sz="1400" b="1">
-                <a:solidFill>
-                  <a:srgbClr val="1F2937"/>
-                </a:solidFill>
-                <a:latin typeface="Segoe UI"/>
-              </a:rPr>
-              <a:t>27 admin teszteset</a:t>
-            </a:r>
-          </a:p>
-          <a:p>
-            <a:pPr algn="l"/>
-            <a:r>
-              <a:rPr sz="1400" b="1">
-                <a:solidFill>
-                  <a:srgbClr val="1F2937"/>
-                </a:solidFill>
-                <a:latin typeface="Segoe UI"/>
-              </a:rPr>
-              <a:t>24 nyilvános teszteset</a:t>
-            </a:r>
-          </a:p>
-          <a:p>
-            <a:pPr algn="l"/>
-            <a:r>
-              <a:rPr sz="600" b="0">
-                <a:solidFill>
-                  <a:srgbClr val="1F2937"/>
-                </a:solidFill>
-                <a:latin typeface="Segoe UI"/>
-              </a:rPr>
-              <a:t/>
+                  <a:srgbClr val="6B7280"/>
+                </a:solidFill>
+                <a:latin typeface="Segoe UI"/>
+              </a:rPr>
+              <a:t>Eredmények: test_execution_log.xlsx</a:t>
             </a:r>
           </a:p>
           <a:p>
@@ -6873,20 +7356,52 @@
                 </a:solidFill>
                 <a:latin typeface="Segoe UI"/>
               </a:rPr>
-              <a:t>Eredmények: test_execution_log.xlsx</a:t>
-            </a:r>
-          </a:p>
-          <a:p>
-            <a:pPr algn="l"/>
-            <a:r>
-              <a:rPr sz="1400" b="0">
-                <a:solidFill>
-                  <a:srgbClr val="6B7280"/>
-                </a:solidFill>
-                <a:latin typeface="Segoe UI"/>
-              </a:rPr>
               <a:t>Tesztadatok: 3 képzés, 5 csoport, 21 fő</a:t>
             </a:r>
+          </a:p>
+        </p:txBody>
+      </p:sp>
+      <p:sp>
+        <p:nvSpPr>
+          <p:cNvPr id="8" name="Téglalap 7">
+            <a:extLst>
+              <a:ext uri="{FF2B5EF4-FFF2-40B4-BE49-F238E27FC236}">
+                <a16:creationId xmlns:a16="http://schemas.microsoft.com/office/drawing/2014/main" id="{42978576-ECAD-4E9C-824A-4BE2A6EA3C0E}"/>
+              </a:ext>
+            </a:extLst>
+          </p:cNvPr>
+          <p:cNvSpPr/>
+          <p:nvPr/>
+        </p:nvSpPr>
+        <p:spPr>
+          <a:xfrm>
+            <a:off x="0" y="6750800"/>
+            <a:ext cx="12192000" cy="107200"/>
+          </a:xfrm>
+          <a:prstGeom prst="rect">
+            <a:avLst/>
+          </a:prstGeom>
+        </p:spPr>
+        <p:style>
+          <a:lnRef idx="1">
+            <a:schemeClr val="accent2"/>
+          </a:lnRef>
+          <a:fillRef idx="3">
+            <a:schemeClr val="accent2"/>
+          </a:fillRef>
+          <a:effectRef idx="2">
+            <a:schemeClr val="accent2"/>
+          </a:effectRef>
+          <a:fontRef idx="minor">
+            <a:schemeClr val="lt1"/>
+          </a:fontRef>
+        </p:style>
+        <p:txBody>
+          <a:bodyPr rtlCol="0" anchor="ctr"/>
+          <a:lstStyle/>
+          <a:p>
+            <a:pPr algn="ctr"/>
+            <a:endParaRPr lang="hu-HU"/>
           </a:p>
         </p:txBody>
       </p:sp>
@@ -6899,7 +7414,7 @@
 </file>
 
 <file path=ppt/slides/slide23.xml><?xml version="1.0" encoding="utf-8"?>
-<p:sld xmlns:a="http://schemas.openxmlformats.org/drawingml/2006/main" xmlns:p="http://schemas.openxmlformats.org/presentationml/2006/main" xmlns:r="http://schemas.openxmlformats.org/officeDocument/2006/relationships">
+<p:sld xmlns:a="http://schemas.openxmlformats.org/drawingml/2006/main" xmlns:r="http://schemas.openxmlformats.org/officeDocument/2006/relationships" xmlns:p="http://schemas.openxmlformats.org/presentationml/2006/main">
   <p:cSld>
     <p:bg>
       <p:bgPr>
@@ -6915,7 +7430,14 @@
         <p:cNvGrpSpPr/>
         <p:nvPr/>
       </p:nvGrpSpPr>
-      <p:grpSpPr/>
+      <p:grpSpPr>
+        <a:xfrm>
+          <a:off x="0" y="0"/>
+          <a:ext cx="0" cy="0"/>
+          <a:chOff x="0" y="0"/>
+          <a:chExt cx="0" cy="0"/>
+        </a:xfrm>
+      </p:grpSpPr>
       <p:sp>
         <p:nvSpPr>
           <p:cNvPr id="2" name="TextBox 1"/>
@@ -7030,7 +7552,7 @@
 </file>
 
 <file path=ppt/slides/slide24.xml><?xml version="1.0" encoding="utf-8"?>
-<p:sld xmlns:a="http://schemas.openxmlformats.org/drawingml/2006/main" xmlns:p="http://schemas.openxmlformats.org/presentationml/2006/main" xmlns:r="http://schemas.openxmlformats.org/officeDocument/2006/relationships">
+<p:sld xmlns:a="http://schemas.openxmlformats.org/drawingml/2006/main" xmlns:r="http://schemas.openxmlformats.org/officeDocument/2006/relationships" xmlns:p="http://schemas.openxmlformats.org/presentationml/2006/main">
   <p:cSld>
     <p:spTree>
       <p:nvGrpSpPr>
@@ -7038,7 +7560,14 @@
         <p:cNvGrpSpPr/>
         <p:nvPr/>
       </p:nvGrpSpPr>
-      <p:grpSpPr/>
+      <p:grpSpPr>
+        <a:xfrm>
+          <a:off x="0" y="0"/>
+          <a:ext cx="0" cy="0"/>
+          <a:chOff x="0" y="0"/>
+          <a:chExt cx="0" cy="0"/>
+        </a:xfrm>
+      </p:grpSpPr>
       <p:sp>
         <p:nvSpPr>
           <p:cNvPr id="2" name="TextBox 1"/>
@@ -7203,15 +7732,57 @@
           </a:p>
           <a:p>
             <a:pPr algn="l"/>
-            <a:r>
-              <a:rPr sz="400" b="0">
+            <a:endParaRPr sz="1300" b="0">
+              <a:solidFill>
+                <a:srgbClr val="6B7280"/>
+              </a:solidFill>
+              <a:latin typeface="Segoe UI"/>
+            </a:endParaRPr>
+          </a:p>
+          <a:p>
+            <a:pPr algn="l"/>
+            <a:r>
+              <a:rPr sz="1600" b="1">
+                <a:solidFill>
+                  <a:srgbClr val="333399"/>
+                </a:solidFill>
+                <a:latin typeface="Segoe UI"/>
+              </a:rPr>
+              <a:t>2. Jelszó generálása</a:t>
+            </a:r>
+          </a:p>
+          <a:p>
+            <a:pPr algn="l"/>
+            <a:r>
+              <a:rPr sz="1400" b="1">
                 <a:solidFill>
                   <a:srgbClr val="1F2937"/>
                 </a:solidFill>
                 <a:latin typeface="Segoe UI"/>
               </a:rPr>
-              <a:t/>
-            </a:r>
+              <a:t>   node generateHash.js</a:t>
+            </a:r>
+          </a:p>
+          <a:p>
+            <a:pPr algn="l"/>
+            <a:r>
+              <a:rPr sz="1300" b="0">
+                <a:solidFill>
+                  <a:srgbClr val="6B7280"/>
+                </a:solidFill>
+                <a:latin typeface="Segoe UI"/>
+              </a:rPr>
+              <a:t>   Létrehozza a titkosított jelszót</a:t>
+            </a:r>
+          </a:p>
+          <a:p>
+            <a:pPr algn="l"/>
+            <a:endParaRPr sz="1300" b="0">
+              <a:solidFill>
+                <a:srgbClr val="6B7280"/>
+              </a:solidFill>
+              <a:latin typeface="Segoe UI"/>
+            </a:endParaRPr>
           </a:p>
           <a:p>
             <a:pPr algn="l"/>
@@ -7222,7 +7793,7 @@
                 </a:solidFill>
                 <a:latin typeface="Segoe UI"/>
               </a:rPr>
-              <a:t>2. Jelszó generálása</a:t>
+              <a:t>3. Titkos fájl létrehozása</a:t>
             </a:r>
           </a:p>
           <a:p>
@@ -7234,7 +7805,7 @@
                 </a:solidFill>
                 <a:latin typeface="Segoe UI"/>
               </a:rPr>
-              <a:t>   node generateHash.js</a:t>
+              <a:t>   .env fájl a fő mappában</a:t>
             </a:r>
           </a:p>
           <a:p>
@@ -7246,20 +7817,62 @@
                 </a:solidFill>
                 <a:latin typeface="Segoe UI"/>
               </a:rPr>
-              <a:t>   Létrehozza a titkosított jelszót</a:t>
-            </a:r>
-          </a:p>
-          <a:p>
-            <a:pPr algn="l"/>
-            <a:r>
-              <a:rPr sz="400" b="0">
+              <a:t>   Ide kerül a titkosított jelszó és a titkos kulcs</a:t>
+            </a:r>
+          </a:p>
+          <a:p>
+            <a:pPr algn="l"/>
+            <a:endParaRPr sz="1300" b="0">
+              <a:solidFill>
+                <a:srgbClr val="6B7280"/>
+              </a:solidFill>
+              <a:latin typeface="Segoe UI"/>
+            </a:endParaRPr>
+          </a:p>
+          <a:p>
+            <a:pPr algn="l"/>
+            <a:r>
+              <a:rPr sz="1600" b="1">
+                <a:solidFill>
+                  <a:srgbClr val="333399"/>
+                </a:solidFill>
+                <a:latin typeface="Segoe UI"/>
+              </a:rPr>
+              <a:t>4. Indítás</a:t>
+            </a:r>
+          </a:p>
+          <a:p>
+            <a:pPr algn="l"/>
+            <a:r>
+              <a:rPr sz="1400" b="1">
                 <a:solidFill>
                   <a:srgbClr val="1F2937"/>
                 </a:solidFill>
                 <a:latin typeface="Segoe UI"/>
               </a:rPr>
-              <a:t/>
-            </a:r>
+              <a:t>   node app.js</a:t>
+            </a:r>
+          </a:p>
+          <a:p>
+            <a:pPr algn="l"/>
+            <a:r>
+              <a:rPr sz="1300" b="0">
+                <a:solidFill>
+                  <a:srgbClr val="6B7280"/>
+                </a:solidFill>
+                <a:latin typeface="Segoe UI"/>
+              </a:rPr>
+              <a:t>   A szerver elindul az 5000-es porton</a:t>
+            </a:r>
+          </a:p>
+          <a:p>
+            <a:pPr algn="l"/>
+            <a:endParaRPr sz="1300" b="0">
+              <a:solidFill>
+                <a:srgbClr val="6B7280"/>
+              </a:solidFill>
+              <a:latin typeface="Segoe UI"/>
+            </a:endParaRPr>
           </a:p>
           <a:p>
             <a:pPr algn="l"/>
@@ -7270,7 +7883,7 @@
                 </a:solidFill>
                 <a:latin typeface="Segoe UI"/>
               </a:rPr>
-              <a:t>3. Titkos fájl létrehozása</a:t>
+              <a:t>5. Megnyitás</a:t>
             </a:r>
           </a:p>
           <a:p>
@@ -7282,7 +7895,7 @@
                 </a:solidFill>
                 <a:latin typeface="Segoe UI"/>
               </a:rPr>
-              <a:t>   .env fájl a fő mappában</a:t>
+              <a:t>   http://localhost:5000</a:t>
             </a:r>
           </a:p>
           <a:p>
@@ -7294,116 +7907,61 @@
                 </a:solidFill>
                 <a:latin typeface="Segoe UI"/>
               </a:rPr>
-              <a:t>   Ide kerül a titkosított jelszó és a titkos kulcs</a:t>
-            </a:r>
-          </a:p>
-          <a:p>
-            <a:pPr algn="l"/>
-            <a:r>
-              <a:rPr sz="400" b="0">
-                <a:solidFill>
-                  <a:srgbClr val="1F2937"/>
-                </a:solidFill>
-                <a:latin typeface="Segoe UI"/>
-              </a:rPr>
-              <a:t/>
-            </a:r>
-          </a:p>
-          <a:p>
-            <a:pPr algn="l"/>
-            <a:r>
-              <a:rPr sz="1600" b="1">
-                <a:solidFill>
-                  <a:srgbClr val="333399"/>
-                </a:solidFill>
-                <a:latin typeface="Segoe UI"/>
-              </a:rPr>
-              <a:t>4. Indítás</a:t>
-            </a:r>
-          </a:p>
-          <a:p>
-            <a:pPr algn="l"/>
-            <a:r>
-              <a:rPr sz="1400" b="1">
-                <a:solidFill>
-                  <a:srgbClr val="1F2937"/>
-                </a:solidFill>
-                <a:latin typeface="Segoe UI"/>
-              </a:rPr>
-              <a:t>   node app.js</a:t>
-            </a:r>
-          </a:p>
-          <a:p>
-            <a:pPr algn="l"/>
-            <a:r>
-              <a:rPr sz="1300" b="0">
-                <a:solidFill>
-                  <a:srgbClr val="6B7280"/>
-                </a:solidFill>
-                <a:latin typeface="Segoe UI"/>
-              </a:rPr>
-              <a:t>   A szerver elindul az 5000-es porton</a:t>
-            </a:r>
-          </a:p>
-          <a:p>
-            <a:pPr algn="l"/>
-            <a:r>
-              <a:rPr sz="400" b="0">
-                <a:solidFill>
-                  <a:srgbClr val="1F2937"/>
-                </a:solidFill>
-                <a:latin typeface="Segoe UI"/>
-              </a:rPr>
-              <a:t/>
-            </a:r>
-          </a:p>
-          <a:p>
-            <a:pPr algn="l"/>
-            <a:r>
-              <a:rPr sz="1600" b="1">
-                <a:solidFill>
-                  <a:srgbClr val="333399"/>
-                </a:solidFill>
-                <a:latin typeface="Segoe UI"/>
-              </a:rPr>
-              <a:t>5. Megnyitás</a:t>
-            </a:r>
-          </a:p>
-          <a:p>
-            <a:pPr algn="l"/>
-            <a:r>
-              <a:rPr sz="1400" b="1">
-                <a:solidFill>
-                  <a:srgbClr val="1F2937"/>
-                </a:solidFill>
-                <a:latin typeface="Segoe UI"/>
-              </a:rPr>
-              <a:t>   http://localhost:5000</a:t>
-            </a:r>
-          </a:p>
-          <a:p>
-            <a:pPr algn="l"/>
-            <a:r>
-              <a:rPr sz="1300" b="0">
-                <a:solidFill>
-                  <a:srgbClr val="6B7280"/>
-                </a:solidFill>
-                <a:latin typeface="Segoe UI"/>
-              </a:rPr>
               <a:t>   A böngészőbe beírva megjelenik az oldal</a:t>
             </a:r>
           </a:p>
           <a:p>
             <a:pPr algn="l"/>
-            <a:r>
-              <a:rPr sz="400" b="0">
-                <a:solidFill>
-                  <a:srgbClr val="1F2937"/>
-                </a:solidFill>
-                <a:latin typeface="Segoe UI"/>
-              </a:rPr>
-              <a:t/>
-            </a:r>
+            <a:endParaRPr sz="1300" b="0">
+              <a:solidFill>
+                <a:srgbClr val="6B7280"/>
+              </a:solidFill>
+              <a:latin typeface="Segoe UI"/>
+            </a:endParaRPr>
+          </a:p>
+        </p:txBody>
+      </p:sp>
+      <p:sp>
+        <p:nvSpPr>
+          <p:cNvPr id="7" name="Téglalap 6">
+            <a:extLst>
+              <a:ext uri="{FF2B5EF4-FFF2-40B4-BE49-F238E27FC236}">
+                <a16:creationId xmlns:a16="http://schemas.microsoft.com/office/drawing/2014/main" id="{AFF79B0C-8D44-4FAD-B8A2-0C91D581033F}"/>
+              </a:ext>
+            </a:extLst>
+          </p:cNvPr>
+          <p:cNvSpPr/>
+          <p:nvPr/>
+        </p:nvSpPr>
+        <p:spPr>
+          <a:xfrm>
+            <a:off x="0" y="6750800"/>
+            <a:ext cx="12192000" cy="107200"/>
+          </a:xfrm>
+          <a:prstGeom prst="rect">
+            <a:avLst/>
+          </a:prstGeom>
+        </p:spPr>
+        <p:style>
+          <a:lnRef idx="1">
+            <a:schemeClr val="accent2"/>
+          </a:lnRef>
+          <a:fillRef idx="3">
+            <a:schemeClr val="accent2"/>
+          </a:fillRef>
+          <a:effectRef idx="2">
+            <a:schemeClr val="accent2"/>
+          </a:effectRef>
+          <a:fontRef idx="minor">
+            <a:schemeClr val="lt1"/>
+          </a:fontRef>
+        </p:style>
+        <p:txBody>
+          <a:bodyPr rtlCol="0" anchor="ctr"/>
+          <a:lstStyle/>
+          <a:p>
+            <a:pPr algn="ctr"/>
+            <a:endParaRPr lang="hu-HU"/>
           </a:p>
         </p:txBody>
       </p:sp>
@@ -7416,7 +7974,7 @@
 </file>
 
 <file path=ppt/slides/slide25.xml><?xml version="1.0" encoding="utf-8"?>
-<p:sld xmlns:a="http://schemas.openxmlformats.org/drawingml/2006/main" xmlns:p="http://schemas.openxmlformats.org/presentationml/2006/main" xmlns:r="http://schemas.openxmlformats.org/officeDocument/2006/relationships">
+<p:sld xmlns:a="http://schemas.openxmlformats.org/drawingml/2006/main" xmlns:r="http://schemas.openxmlformats.org/officeDocument/2006/relationships" xmlns:p="http://schemas.openxmlformats.org/presentationml/2006/main">
   <p:cSld>
     <p:bg>
       <p:bgPr>
@@ -7432,7 +7990,14 @@
         <p:cNvGrpSpPr/>
         <p:nvPr/>
       </p:nvGrpSpPr>
-      <p:grpSpPr/>
+      <p:grpSpPr>
+        <a:xfrm>
+          <a:off x="0" y="0"/>
+          <a:ext cx="0" cy="0"/>
+          <a:chOff x="0" y="0"/>
+          <a:chExt cx="0" cy="0"/>
+        </a:xfrm>
+      </p:grpSpPr>
       <p:sp>
         <p:nvSpPr>
           <p:cNvPr id="2" name="TextBox 1"/>
@@ -7654,7 +8219,7 @@
 </file>
 
 <file path=ppt/slides/slide3.xml><?xml version="1.0" encoding="utf-8"?>
-<p:sld xmlns:a="http://schemas.openxmlformats.org/drawingml/2006/main" xmlns:p="http://schemas.openxmlformats.org/presentationml/2006/main" xmlns:r="http://schemas.openxmlformats.org/officeDocument/2006/relationships">
+<p:sld xmlns:a="http://schemas.openxmlformats.org/drawingml/2006/main" xmlns:r="http://schemas.openxmlformats.org/officeDocument/2006/relationships" xmlns:p="http://schemas.openxmlformats.org/presentationml/2006/main">
   <p:cSld>
     <p:bg>
       <p:bgPr>
@@ -7670,7 +8235,14 @@
         <p:cNvGrpSpPr/>
         <p:nvPr/>
       </p:nvGrpSpPr>
-      <p:grpSpPr/>
+      <p:grpSpPr>
+        <a:xfrm>
+          <a:off x="0" y="0"/>
+          <a:ext cx="0" cy="0"/>
+          <a:chOff x="0" y="0"/>
+          <a:chExt cx="0" cy="0"/>
+        </a:xfrm>
+      </p:grpSpPr>
       <p:sp>
         <p:nvSpPr>
           <p:cNvPr id="2" name="TextBox 1"/>
@@ -7820,7 +8392,7 @@
 </file>
 
 <file path=ppt/slides/slide4.xml><?xml version="1.0" encoding="utf-8"?>
-<p:sld xmlns:a="http://schemas.openxmlformats.org/drawingml/2006/main" xmlns:p="http://schemas.openxmlformats.org/presentationml/2006/main" xmlns:r="http://schemas.openxmlformats.org/officeDocument/2006/relationships">
+<p:sld xmlns:a="http://schemas.openxmlformats.org/drawingml/2006/main" xmlns:r="http://schemas.openxmlformats.org/officeDocument/2006/relationships" xmlns:p="http://schemas.openxmlformats.org/presentationml/2006/main">
   <p:cSld>
     <p:spTree>
       <p:nvGrpSpPr>
@@ -7828,7 +8400,14 @@
         <p:cNvGrpSpPr/>
         <p:nvPr/>
       </p:nvGrpSpPr>
-      <p:grpSpPr/>
+      <p:grpSpPr>
+        <a:xfrm>
+          <a:off x="0" y="0"/>
+          <a:ext cx="0" cy="0"/>
+          <a:chOff x="0" y="0"/>
+          <a:chExt cx="0" cy="0"/>
+        </a:xfrm>
+      </p:grpSpPr>
       <p:sp>
         <p:nvSpPr>
           <p:cNvPr id="2" name="TextBox 1"/>
@@ -7969,14 +8548,23 @@
           </a:p>
           <a:p>
             <a:pPr algn="l"/>
-            <a:r>
-              <a:rPr sz="800" b="0">
+            <a:endParaRPr sz="1600" b="1">
+              <a:solidFill>
+                <a:srgbClr val="1F2937"/>
+              </a:solidFill>
+              <a:latin typeface="Segoe UI"/>
+            </a:endParaRPr>
+          </a:p>
+          <a:p>
+            <a:pPr algn="l"/>
+            <a:r>
+              <a:rPr sz="1600" b="0">
                 <a:solidFill>
                   <a:srgbClr val="1F2937"/>
                 </a:solidFill>
                 <a:latin typeface="Segoe UI"/>
               </a:rPr>
-              <a:t/>
+              <a:t>Az iskola esti és hétvégi digitális képzéseket kínál felnőtteknek.</a:t>
             </a:r>
           </a:p>
           <a:p>
@@ -7988,8 +8576,17 @@
                 </a:solidFill>
                 <a:latin typeface="Segoe UI"/>
               </a:rPr>
-              <a:t>Az iskola esti és hétvégi digitális képzéseket kínál felnőtteknek.</a:t>
-            </a:r>
+              <a:t>A jelentkezések korábban papír alapon történtek.</a:t>
+            </a:r>
+          </a:p>
+          <a:p>
+            <a:pPr algn="l"/>
+            <a:endParaRPr sz="1600" b="0">
+              <a:solidFill>
+                <a:srgbClr val="1F2937"/>
+              </a:solidFill>
+              <a:latin typeface="Segoe UI"/>
+            </a:endParaRPr>
           </a:p>
           <a:p>
             <a:pPr algn="l"/>
@@ -8000,19 +8597,19 @@
                 </a:solidFill>
                 <a:latin typeface="Segoe UI"/>
               </a:rPr>
-              <a:t>A jelentkezések korábban papír alapon történtek.</a:t>
-            </a:r>
-          </a:p>
-          <a:p>
-            <a:pPr algn="l"/>
-            <a:r>
-              <a:rPr sz="800" b="0">
+              <a:t>A cél: egy weboldal ahol az érdeklődők megtalálják a tanfolyamokat</a:t>
+            </a:r>
+          </a:p>
+          <a:p>
+            <a:pPr algn="l"/>
+            <a:r>
+              <a:rPr sz="1600" b="0">
                 <a:solidFill>
                   <a:srgbClr val="1F2937"/>
                 </a:solidFill>
                 <a:latin typeface="Segoe UI"/>
               </a:rPr>
-              <a:t/>
+              <a:t>és online tudnak jelentkezni - az adminisztrátor pedig tudja kezelni</a:t>
             </a:r>
           </a:p>
           <a:p>
@@ -8024,56 +8621,73 @@
                 </a:solidFill>
                 <a:latin typeface="Segoe UI"/>
               </a:rPr>
-              <a:t>A cél: egy weboldal ahol az érdeklődők megtalálják a tanfolyamokat</a:t>
-            </a:r>
+              <a:t>a csoportokat és a jelentkezők adatait.</a:t>
+            </a:r>
+          </a:p>
+          <a:p>
+            <a:pPr algn="l"/>
+            <a:endParaRPr sz="1600" b="0">
+              <a:solidFill>
+                <a:srgbClr val="1F2937"/>
+              </a:solidFill>
+              <a:latin typeface="Segoe UI"/>
+            </a:endParaRPr>
           </a:p>
           <a:p>
             <a:pPr algn="l"/>
             <a:r>
               <a:rPr sz="1600" b="0">
                 <a:solidFill>
-                  <a:srgbClr val="1F2937"/>
-                </a:solidFill>
-                <a:latin typeface="Segoe UI"/>
-              </a:rPr>
-              <a:t>és online tudnak jelentkezni - az adminisztrátor pedig tudja kezelni</a:t>
-            </a:r>
-          </a:p>
-          <a:p>
-            <a:pPr algn="l"/>
-            <a:r>
-              <a:rPr sz="1600" b="0">
-                <a:solidFill>
-                  <a:srgbClr val="1F2937"/>
-                </a:solidFill>
-                <a:latin typeface="Segoe UI"/>
-              </a:rPr>
-              <a:t>a csoportokat és a jelentkezők adatait.</a:t>
-            </a:r>
-          </a:p>
-          <a:p>
-            <a:pPr algn="l"/>
-            <a:r>
-              <a:rPr sz="800" b="0">
-                <a:solidFill>
-                  <a:srgbClr val="1F2937"/>
-                </a:solidFill>
-                <a:latin typeface="Segoe UI"/>
-              </a:rPr>
-              <a:t/>
-            </a:r>
-          </a:p>
-          <a:p>
-            <a:pPr algn="l"/>
-            <a:r>
-              <a:rPr sz="1600" b="0">
-                <a:solidFill>
                   <a:srgbClr val="6B7280"/>
                 </a:solidFill>
                 <a:latin typeface="Segoe UI"/>
               </a:rPr>
               <a:t>3 fős csapat, iskolai projektmunka, 2026-os tanév</a:t>
             </a:r>
+          </a:p>
+        </p:txBody>
+      </p:sp>
+      <p:sp>
+        <p:nvSpPr>
+          <p:cNvPr id="6" name="Téglalap 5">
+            <a:extLst>
+              <a:ext uri="{FF2B5EF4-FFF2-40B4-BE49-F238E27FC236}">
+                <a16:creationId xmlns:a16="http://schemas.microsoft.com/office/drawing/2014/main" id="{941E0FA4-21F5-4B18-BC5A-FB95E20F947D}"/>
+              </a:ext>
+            </a:extLst>
+          </p:cNvPr>
+          <p:cNvSpPr/>
+          <p:nvPr/>
+        </p:nvSpPr>
+        <p:spPr>
+          <a:xfrm>
+            <a:off x="1" y="6750800"/>
+            <a:ext cx="12192000" cy="88764"/>
+          </a:xfrm>
+          <a:prstGeom prst="rect">
+            <a:avLst/>
+          </a:prstGeom>
+        </p:spPr>
+        <p:style>
+          <a:lnRef idx="1">
+            <a:schemeClr val="accent3"/>
+          </a:lnRef>
+          <a:fillRef idx="3">
+            <a:schemeClr val="accent3"/>
+          </a:fillRef>
+          <a:effectRef idx="2">
+            <a:schemeClr val="accent3"/>
+          </a:effectRef>
+          <a:fontRef idx="minor">
+            <a:schemeClr val="lt1"/>
+          </a:fontRef>
+        </p:style>
+        <p:txBody>
+          <a:bodyPr rtlCol="0" anchor="ctr"/>
+          <a:lstStyle/>
+          <a:p>
+            <a:pPr algn="ctr"/>
+            <a:endParaRPr lang="hu-HU"/>
           </a:p>
         </p:txBody>
       </p:sp>
@@ -8086,7 +8700,7 @@
 </file>
 
 <file path=ppt/slides/slide5.xml><?xml version="1.0" encoding="utf-8"?>
-<p:sld xmlns:a="http://schemas.openxmlformats.org/drawingml/2006/main" xmlns:p="http://schemas.openxmlformats.org/presentationml/2006/main" xmlns:r="http://schemas.openxmlformats.org/officeDocument/2006/relationships">
+<p:sld xmlns:a="http://schemas.openxmlformats.org/drawingml/2006/main" xmlns:r="http://schemas.openxmlformats.org/officeDocument/2006/relationships" xmlns:p="http://schemas.openxmlformats.org/presentationml/2006/main">
   <p:cSld>
     <p:spTree>
       <p:nvGrpSpPr>
@@ -8094,7 +8708,14 @@
         <p:cNvGrpSpPr/>
         <p:nvPr/>
       </p:nvGrpSpPr>
-      <p:grpSpPr/>
+      <p:grpSpPr>
+        <a:xfrm>
+          <a:off x="0" y="0"/>
+          <a:ext cx="0" cy="0"/>
+          <a:chOff x="0" y="0"/>
+          <a:chExt cx="0" cy="0"/>
+        </a:xfrm>
+      </p:grpSpPr>
       <p:sp>
         <p:nvSpPr>
           <p:cNvPr id="2" name="TextBox 1"/>
@@ -8247,15 +8868,12 @@
           </a:p>
           <a:p>
             <a:pPr algn="l"/>
-            <a:r>
-              <a:rPr sz="800" b="0">
-                <a:solidFill>
-                  <a:srgbClr val="1F2937"/>
-                </a:solidFill>
-                <a:latin typeface="Segoe UI"/>
-              </a:rPr>
-              <a:t/>
-            </a:r>
+            <a:endParaRPr sz="1400" b="0">
+              <a:solidFill>
+                <a:srgbClr val="6B7280"/>
+              </a:solidFill>
+              <a:latin typeface="Segoe UI"/>
+            </a:endParaRPr>
           </a:p>
           <a:p>
             <a:pPr algn="l"/>
@@ -8318,15 +8936,12 @@
           </a:p>
           <a:p>
             <a:pPr algn="l"/>
-            <a:r>
-              <a:rPr sz="800" b="0">
-                <a:solidFill>
-                  <a:srgbClr val="1F2937"/>
-                </a:solidFill>
-                <a:latin typeface="Segoe UI"/>
-              </a:rPr>
-              <a:t/>
-            </a:r>
+            <a:endParaRPr sz="1400" b="0">
+              <a:solidFill>
+                <a:srgbClr val="6B7280"/>
+              </a:solidFill>
+              <a:latin typeface="Segoe UI"/>
+            </a:endParaRPr>
           </a:p>
           <a:p>
             <a:pPr algn="l"/>
@@ -8389,15 +9004,12 @@
           </a:p>
           <a:p>
             <a:pPr algn="l"/>
-            <a:r>
-              <a:rPr sz="800" b="0">
-                <a:solidFill>
-                  <a:srgbClr val="1F2937"/>
-                </a:solidFill>
-                <a:latin typeface="Segoe UI"/>
-              </a:rPr>
-              <a:t/>
-            </a:r>
+            <a:endParaRPr sz="1400" b="0">
+              <a:solidFill>
+                <a:srgbClr val="6B7280"/>
+              </a:solidFill>
+              <a:latin typeface="Segoe UI"/>
+            </a:endParaRPr>
           </a:p>
           <a:p>
             <a:pPr algn="l"/>
@@ -8445,6 +9057,50 @@
               </a:rPr>
               <a:t>Mindhárom képzésből több csoport is indulhat, különböző időpontokban és helyszíneken.</a:t>
             </a:r>
+          </a:p>
+        </p:txBody>
+      </p:sp>
+      <p:sp>
+        <p:nvSpPr>
+          <p:cNvPr id="9" name="Téglalap 8">
+            <a:extLst>
+              <a:ext uri="{FF2B5EF4-FFF2-40B4-BE49-F238E27FC236}">
+                <a16:creationId xmlns:a16="http://schemas.microsoft.com/office/drawing/2014/main" id="{A7E1E8D9-CD2B-4FC6-8F04-E3D1EBC1D941}"/>
+              </a:ext>
+            </a:extLst>
+          </p:cNvPr>
+          <p:cNvSpPr/>
+          <p:nvPr/>
+        </p:nvSpPr>
+        <p:spPr>
+          <a:xfrm>
+            <a:off x="1" y="6750800"/>
+            <a:ext cx="12192000" cy="88764"/>
+          </a:xfrm>
+          <a:prstGeom prst="rect">
+            <a:avLst/>
+          </a:prstGeom>
+        </p:spPr>
+        <p:style>
+          <a:lnRef idx="1">
+            <a:schemeClr val="accent3"/>
+          </a:lnRef>
+          <a:fillRef idx="3">
+            <a:schemeClr val="accent3"/>
+          </a:fillRef>
+          <a:effectRef idx="2">
+            <a:schemeClr val="accent3"/>
+          </a:effectRef>
+          <a:fontRef idx="minor">
+            <a:schemeClr val="lt1"/>
+          </a:fontRef>
+        </p:style>
+        <p:txBody>
+          <a:bodyPr rtlCol="0" anchor="ctr"/>
+          <a:lstStyle/>
+          <a:p>
+            <a:pPr algn="ctr"/>
+            <a:endParaRPr lang="hu-HU"/>
           </a:p>
         </p:txBody>
       </p:sp>
@@ -8457,7 +9113,7 @@
 </file>
 
 <file path=ppt/slides/slide6.xml><?xml version="1.0" encoding="utf-8"?>
-<p:sld xmlns:a="http://schemas.openxmlformats.org/drawingml/2006/main" xmlns:p="http://schemas.openxmlformats.org/presentationml/2006/main" xmlns:r="http://schemas.openxmlformats.org/officeDocument/2006/relationships">
+<p:sld xmlns:a="http://schemas.openxmlformats.org/drawingml/2006/main" xmlns:r="http://schemas.openxmlformats.org/officeDocument/2006/relationships" xmlns:p="http://schemas.openxmlformats.org/presentationml/2006/main">
   <p:cSld>
     <p:bg>
       <p:bgPr>
@@ -8473,7 +9129,14 @@
         <p:cNvGrpSpPr/>
         <p:nvPr/>
       </p:nvGrpSpPr>
-      <p:grpSpPr/>
+      <p:grpSpPr>
+        <a:xfrm>
+          <a:off x="0" y="0"/>
+          <a:ext cx="0" cy="0"/>
+          <a:chOff x="0" y="0"/>
+          <a:chExt cx="0" cy="0"/>
+        </a:xfrm>
+      </p:grpSpPr>
       <p:sp>
         <p:nvSpPr>
           <p:cNvPr id="2" name="TextBox 1"/>
@@ -8588,7 +9251,7 @@
 </file>
 
 <file path=ppt/slides/slide7.xml><?xml version="1.0" encoding="utf-8"?>
-<p:sld xmlns:a="http://schemas.openxmlformats.org/drawingml/2006/main" xmlns:p="http://schemas.openxmlformats.org/presentationml/2006/main" xmlns:r="http://schemas.openxmlformats.org/officeDocument/2006/relationships">
+<p:sld xmlns:a="http://schemas.openxmlformats.org/drawingml/2006/main" xmlns:r="http://schemas.openxmlformats.org/officeDocument/2006/relationships" xmlns:p="http://schemas.openxmlformats.org/presentationml/2006/main">
   <p:cSld>
     <p:spTree>
       <p:nvGrpSpPr>
@@ -8596,7 +9259,14 @@
         <p:cNvGrpSpPr/>
         <p:nvPr/>
       </p:nvGrpSpPr>
-      <p:grpSpPr/>
+      <p:grpSpPr>
+        <a:xfrm>
+          <a:off x="0" y="0"/>
+          <a:ext cx="0" cy="0"/>
+          <a:chOff x="0" y="0"/>
+          <a:chExt cx="0" cy="0"/>
+        </a:xfrm>
+      </p:grpSpPr>
       <p:sp>
         <p:nvSpPr>
           <p:cNvPr id="2" name="TextBox 1"/>
@@ -8737,15 +9407,12 @@
           </a:p>
           <a:p>
             <a:pPr algn="l"/>
-            <a:r>
-              <a:rPr sz="600" b="0">
-                <a:solidFill>
-                  <a:srgbClr val="1F2937"/>
-                </a:solidFill>
-                <a:latin typeface="Segoe UI"/>
-              </a:rPr>
-              <a:t/>
-            </a:r>
+            <a:endParaRPr sz="1800" b="1">
+              <a:solidFill>
+                <a:srgbClr val="333399"/>
+              </a:solidFill>
+              <a:latin typeface="Segoe UI"/>
+            </a:endParaRPr>
           </a:p>
           <a:p>
             <a:pPr algn="l"/>
@@ -8856,14 +9523,23 @@
           </a:p>
           <a:p>
             <a:pPr algn="l"/>
-            <a:r>
-              <a:rPr sz="600" b="0">
+            <a:endParaRPr sz="1800" b="1">
+              <a:solidFill>
+                <a:srgbClr val="333399"/>
+              </a:solidFill>
+              <a:latin typeface="Segoe UI"/>
+            </a:endParaRPr>
+          </a:p>
+          <a:p>
+            <a:pPr algn="l"/>
+            <a:r>
+              <a:rPr sz="1400" b="0">
                 <a:solidFill>
                   <a:srgbClr val="1F2937"/>
                 </a:solidFill>
                 <a:latin typeface="Segoe UI"/>
               </a:rPr>
-              <a:t/>
+              <a:t>HTML - Az oldal szerkezete</a:t>
             </a:r>
           </a:p>
           <a:p>
@@ -8875,7 +9551,7 @@
                 </a:solidFill>
                 <a:latin typeface="Segoe UI"/>
               </a:rPr>
-              <a:t>HTML - Az oldal szerkezete</a:t>
+              <a:t>CSS - Az oldal kinézete, színek</a:t>
             </a:r>
           </a:p>
           <a:p>
@@ -8887,7 +9563,7 @@
                 </a:solidFill>
                 <a:latin typeface="Segoe UI"/>
               </a:rPr>
-              <a:t>CSS - Az oldal kinézete, színek</a:t>
+              <a:t>JavaScript - Az oldal működése, gombok</a:t>
             </a:r>
           </a:p>
           <a:p>
@@ -8899,7 +9575,7 @@
                 </a:solidFill>
                 <a:latin typeface="Segoe UI"/>
               </a:rPr>
-              <a:t>JavaScript - Az oldal működése, gombok</a:t>
+              <a:t>Bootstrap 5 - Reszponzív design (telefonon is jó)</a:t>
             </a:r>
           </a:p>
           <a:p>
@@ -8911,20 +9587,52 @@
                 </a:solidFill>
                 <a:latin typeface="Segoe UI"/>
               </a:rPr>
-              <a:t>Bootstrap 5 - Reszponzív design (telefonon is jó)</a:t>
-            </a:r>
-          </a:p>
-          <a:p>
-            <a:pPr algn="l"/>
-            <a:r>
-              <a:rPr sz="1400" b="0">
-                <a:solidFill>
-                  <a:srgbClr val="1F2937"/>
-                </a:solidFill>
-                <a:latin typeface="Segoe UI"/>
-              </a:rPr>
               <a:t>Fetch API - Adatok lekérése a szerverről</a:t>
             </a:r>
+          </a:p>
+        </p:txBody>
+      </p:sp>
+      <p:sp>
+        <p:nvSpPr>
+          <p:cNvPr id="11" name="Téglalap 10">
+            <a:extLst>
+              <a:ext uri="{FF2B5EF4-FFF2-40B4-BE49-F238E27FC236}">
+                <a16:creationId xmlns:a16="http://schemas.microsoft.com/office/drawing/2014/main" id="{8764E505-AED4-4723-A9FC-527155E92D82}"/>
+              </a:ext>
+            </a:extLst>
+          </p:cNvPr>
+          <p:cNvSpPr/>
+          <p:nvPr/>
+        </p:nvSpPr>
+        <p:spPr>
+          <a:xfrm>
+            <a:off x="0" y="6750800"/>
+            <a:ext cx="12192000" cy="107199"/>
+          </a:xfrm>
+          <a:prstGeom prst="rect">
+            <a:avLst/>
+          </a:prstGeom>
+        </p:spPr>
+        <p:style>
+          <a:lnRef idx="1">
+            <a:schemeClr val="accent5"/>
+          </a:lnRef>
+          <a:fillRef idx="3">
+            <a:schemeClr val="accent5"/>
+          </a:fillRef>
+          <a:effectRef idx="2">
+            <a:schemeClr val="accent5"/>
+          </a:effectRef>
+          <a:fontRef idx="minor">
+            <a:schemeClr val="lt1"/>
+          </a:fontRef>
+        </p:style>
+        <p:txBody>
+          <a:bodyPr rtlCol="0" anchor="ctr"/>
+          <a:lstStyle/>
+          <a:p>
+            <a:pPr algn="ctr"/>
+            <a:endParaRPr lang="hu-HU"/>
           </a:p>
         </p:txBody>
       </p:sp>
@@ -8937,7 +9645,7 @@
 </file>
 
 <file path=ppt/slides/slide8.xml><?xml version="1.0" encoding="utf-8"?>
-<p:sld xmlns:a="http://schemas.openxmlformats.org/drawingml/2006/main" xmlns:p="http://schemas.openxmlformats.org/presentationml/2006/main" xmlns:r="http://schemas.openxmlformats.org/officeDocument/2006/relationships">
+<p:sld xmlns:a="http://schemas.openxmlformats.org/drawingml/2006/main" xmlns:r="http://schemas.openxmlformats.org/officeDocument/2006/relationships" xmlns:p="http://schemas.openxmlformats.org/presentationml/2006/main">
   <p:cSld>
     <p:bg>
       <p:bgPr>
@@ -8953,7 +9661,14 @@
         <p:cNvGrpSpPr/>
         <p:nvPr/>
       </p:nvGrpSpPr>
-      <p:grpSpPr/>
+      <p:grpSpPr>
+        <a:xfrm>
+          <a:off x="0" y="0"/>
+          <a:ext cx="0" cy="0"/>
+          <a:chOff x="0" y="0"/>
+          <a:chExt cx="0" cy="0"/>
+        </a:xfrm>
+      </p:grpSpPr>
       <p:sp>
         <p:nvSpPr>
           <p:cNvPr id="2" name="TextBox 1"/>
@@ -9068,7 +9783,7 @@
 </file>
 
 <file path=ppt/slides/slide9.xml><?xml version="1.0" encoding="utf-8"?>
-<p:sld xmlns:a="http://schemas.openxmlformats.org/drawingml/2006/main" xmlns:p="http://schemas.openxmlformats.org/presentationml/2006/main" xmlns:r="http://schemas.openxmlformats.org/officeDocument/2006/relationships">
+<p:sld xmlns:a="http://schemas.openxmlformats.org/drawingml/2006/main" xmlns:r="http://schemas.openxmlformats.org/officeDocument/2006/relationships" xmlns:p="http://schemas.openxmlformats.org/presentationml/2006/main">
   <p:cSld>
     <p:spTree>
       <p:nvGrpSpPr>
@@ -9076,7 +9791,14 @@
         <p:cNvGrpSpPr/>
         <p:nvPr/>
       </p:nvGrpSpPr>
-      <p:grpSpPr/>
+      <p:grpSpPr>
+        <a:xfrm>
+          <a:off x="0" y="0"/>
+          <a:ext cx="0" cy="0"/>
+          <a:chOff x="0" y="0"/>
+          <a:chExt cx="0" cy="0"/>
+        </a:xfrm>
+      </p:grpSpPr>
       <p:sp>
         <p:nvSpPr>
           <p:cNvPr id="2" name="TextBox 1"/>
@@ -9217,15 +9939,12 @@
           </a:p>
           <a:p>
             <a:pPr algn="l"/>
-            <a:r>
-              <a:rPr sz="800" b="0">
-                <a:solidFill>
-                  <a:srgbClr val="1F2937"/>
-                </a:solidFill>
-                <a:latin typeface="Segoe UI"/>
-              </a:rPr>
-              <a:t/>
-            </a:r>
+            <a:endParaRPr sz="1800" b="1">
+              <a:solidFill>
+                <a:srgbClr val="333399"/>
+              </a:solidFill>
+              <a:latin typeface="Segoe UI"/>
+            </a:endParaRPr>
           </a:p>
           <a:p>
             <a:pPr algn="ctr"/>
@@ -9300,15 +10019,12 @@
           </a:p>
           <a:p>
             <a:pPr algn="l"/>
-            <a:r>
-              <a:rPr sz="800" b="0">
-                <a:solidFill>
-                  <a:srgbClr val="1F2937"/>
-                </a:solidFill>
-                <a:latin typeface="Segoe UI"/>
-              </a:rPr>
-              <a:t/>
-            </a:r>
+            <a:endParaRPr sz="1800" b="1">
+              <a:solidFill>
+                <a:srgbClr val="333399"/>
+              </a:solidFill>
+              <a:latin typeface="Segoe UI"/>
+            </a:endParaRPr>
           </a:p>
           <a:p>
             <a:pPr algn="ctr"/>
@@ -9383,15 +10099,12 @@
           </a:p>
           <a:p>
             <a:pPr algn="l"/>
-            <a:r>
-              <a:rPr sz="800" b="0">
-                <a:solidFill>
-                  <a:srgbClr val="1F2937"/>
-                </a:solidFill>
-                <a:latin typeface="Segoe UI"/>
-              </a:rPr>
-              <a:t/>
-            </a:r>
+            <a:endParaRPr sz="1800" b="1">
+              <a:solidFill>
+                <a:srgbClr val="333399"/>
+              </a:solidFill>
+              <a:latin typeface="Segoe UI"/>
+            </a:endParaRPr>
           </a:p>
           <a:p>
             <a:pPr algn="ctr"/>
@@ -9509,8 +10222,8 @@
         </p:nvSpPr>
         <p:spPr>
           <a:xfrm>
-            <a:off x="457200" y="4500000"/>
-            <a:ext cx="11000000" cy="1500000"/>
+            <a:off x="457200" y="3887671"/>
+            <a:ext cx="10093276" cy="738664"/>
           </a:xfrm>
           <a:prstGeom prst="rect">
             <a:avLst/>
@@ -9525,14 +10238,643 @@
           <a:p>
             <a:pPr algn="l"/>
             <a:r>
-              <a:rPr sz="1400" b="0">
-                <a:solidFill>
-                  <a:srgbClr val="6B7280"/>
-                </a:solidFill>
-                <a:latin typeface="Segoe UI"/>
-              </a:rPr>
-              <a:t>A felhasználó a böngészőjében nyitja meg az oldalt. Amikor bármit csinál (jelentkezik, adatot kér), a böngésző egy kérelmet küld a szervernek. A szerver feldolgozza a kérelmet, szükséges esetén adatot olvas vagy ír az adatbázisba, és visszaküldi a választ a böngészőbe.</a:t>
-            </a:r>
+              <a:rPr sz="1400" b="0" dirty="0">
+                <a:solidFill>
+                  <a:srgbClr val="6B7280"/>
+                </a:solidFill>
+                <a:latin typeface="Segoe UI"/>
+              </a:rPr>
+              <a:t>A </a:t>
+            </a:r>
+            <a:r>
+              <a:rPr sz="1400" b="0" dirty="0" err="1">
+                <a:solidFill>
+                  <a:srgbClr val="6B7280"/>
+                </a:solidFill>
+                <a:latin typeface="Segoe UI"/>
+              </a:rPr>
+              <a:t>felhasználó</a:t>
+            </a:r>
+            <a:r>
+              <a:rPr sz="1400" b="0" dirty="0">
+                <a:solidFill>
+                  <a:srgbClr val="6B7280"/>
+                </a:solidFill>
+                <a:latin typeface="Segoe UI"/>
+              </a:rPr>
+              <a:t> a </a:t>
+            </a:r>
+            <a:r>
+              <a:rPr sz="1400" b="0" dirty="0" err="1">
+                <a:solidFill>
+                  <a:srgbClr val="6B7280"/>
+                </a:solidFill>
+                <a:latin typeface="Segoe UI"/>
+              </a:rPr>
+              <a:t>böngészőjében</a:t>
+            </a:r>
+            <a:r>
+              <a:rPr sz="1400" b="0" dirty="0">
+                <a:solidFill>
+                  <a:srgbClr val="6B7280"/>
+                </a:solidFill>
+                <a:latin typeface="Segoe UI"/>
+              </a:rPr>
+              <a:t> </a:t>
+            </a:r>
+            <a:r>
+              <a:rPr sz="1400" b="0" dirty="0" err="1">
+                <a:solidFill>
+                  <a:srgbClr val="6B7280"/>
+                </a:solidFill>
+                <a:latin typeface="Segoe UI"/>
+              </a:rPr>
+              <a:t>nyitja</a:t>
+            </a:r>
+            <a:r>
+              <a:rPr sz="1400" b="0" dirty="0">
+                <a:solidFill>
+                  <a:srgbClr val="6B7280"/>
+                </a:solidFill>
+                <a:latin typeface="Segoe UI"/>
+              </a:rPr>
+              <a:t> meg </a:t>
+            </a:r>
+            <a:r>
+              <a:rPr sz="1400" b="0" dirty="0" err="1">
+                <a:solidFill>
+                  <a:srgbClr val="6B7280"/>
+                </a:solidFill>
+                <a:latin typeface="Segoe UI"/>
+              </a:rPr>
+              <a:t>az</a:t>
+            </a:r>
+            <a:r>
+              <a:rPr sz="1400" b="0" dirty="0">
+                <a:solidFill>
+                  <a:srgbClr val="6B7280"/>
+                </a:solidFill>
+                <a:latin typeface="Segoe UI"/>
+              </a:rPr>
+              <a:t> </a:t>
+            </a:r>
+            <a:r>
+              <a:rPr sz="1400" b="0" dirty="0" err="1">
+                <a:solidFill>
+                  <a:srgbClr val="6B7280"/>
+                </a:solidFill>
+                <a:latin typeface="Segoe UI"/>
+              </a:rPr>
+              <a:t>oldalt</a:t>
+            </a:r>
+            <a:r>
+              <a:rPr sz="1400" b="0" dirty="0">
+                <a:solidFill>
+                  <a:srgbClr val="6B7280"/>
+                </a:solidFill>
+                <a:latin typeface="Segoe UI"/>
+              </a:rPr>
+              <a:t>. </a:t>
+            </a:r>
+            <a:endParaRPr lang="hu-HU" sz="1400" b="0" dirty="0">
+              <a:solidFill>
+                <a:srgbClr val="6B7280"/>
+              </a:solidFill>
+              <a:latin typeface="Segoe UI"/>
+            </a:endParaRPr>
+          </a:p>
+          <a:p>
+            <a:pPr algn="l"/>
+            <a:r>
+              <a:rPr sz="1400" b="0" dirty="0" err="1">
+                <a:solidFill>
+                  <a:srgbClr val="6B7280"/>
+                </a:solidFill>
+                <a:latin typeface="Segoe UI"/>
+              </a:rPr>
+              <a:t>Amikor</a:t>
+            </a:r>
+            <a:r>
+              <a:rPr sz="1400" b="0" dirty="0">
+                <a:solidFill>
+                  <a:srgbClr val="6B7280"/>
+                </a:solidFill>
+                <a:latin typeface="Segoe UI"/>
+              </a:rPr>
+              <a:t> </a:t>
+            </a:r>
+            <a:r>
+              <a:rPr sz="1400" b="0" dirty="0" err="1">
+                <a:solidFill>
+                  <a:srgbClr val="6B7280"/>
+                </a:solidFill>
+                <a:latin typeface="Segoe UI"/>
+              </a:rPr>
+              <a:t>bármit</a:t>
+            </a:r>
+            <a:r>
+              <a:rPr sz="1400" b="0" dirty="0">
+                <a:solidFill>
+                  <a:srgbClr val="6B7280"/>
+                </a:solidFill>
+                <a:latin typeface="Segoe UI"/>
+              </a:rPr>
+              <a:t> </a:t>
+            </a:r>
+            <a:r>
+              <a:rPr sz="1400" b="0" dirty="0" err="1">
+                <a:solidFill>
+                  <a:srgbClr val="6B7280"/>
+                </a:solidFill>
+                <a:latin typeface="Segoe UI"/>
+              </a:rPr>
+              <a:t>csinál</a:t>
+            </a:r>
+            <a:r>
+              <a:rPr sz="1400" b="0" dirty="0">
+                <a:solidFill>
+                  <a:srgbClr val="6B7280"/>
+                </a:solidFill>
+                <a:latin typeface="Segoe UI"/>
+              </a:rPr>
+              <a:t> (</a:t>
+            </a:r>
+            <a:r>
+              <a:rPr sz="1400" b="0" dirty="0" err="1">
+                <a:solidFill>
+                  <a:srgbClr val="6B7280"/>
+                </a:solidFill>
+                <a:latin typeface="Segoe UI"/>
+              </a:rPr>
+              <a:t>jelentkezik</a:t>
+            </a:r>
+            <a:r>
+              <a:rPr sz="1400" b="0" dirty="0">
+                <a:solidFill>
+                  <a:srgbClr val="6B7280"/>
+                </a:solidFill>
+                <a:latin typeface="Segoe UI"/>
+              </a:rPr>
+              <a:t>, </a:t>
+            </a:r>
+            <a:r>
+              <a:rPr sz="1400" b="0" dirty="0" err="1">
+                <a:solidFill>
+                  <a:srgbClr val="6B7280"/>
+                </a:solidFill>
+                <a:latin typeface="Segoe UI"/>
+              </a:rPr>
+              <a:t>adatot</a:t>
+            </a:r>
+            <a:r>
+              <a:rPr sz="1400" b="0" dirty="0">
+                <a:solidFill>
+                  <a:srgbClr val="6B7280"/>
+                </a:solidFill>
+                <a:latin typeface="Segoe UI"/>
+              </a:rPr>
+              <a:t> </a:t>
+            </a:r>
+            <a:r>
+              <a:rPr sz="1400" b="0" dirty="0" err="1">
+                <a:solidFill>
+                  <a:srgbClr val="6B7280"/>
+                </a:solidFill>
+                <a:latin typeface="Segoe UI"/>
+              </a:rPr>
+              <a:t>kér</a:t>
+            </a:r>
+            <a:r>
+              <a:rPr sz="1400" b="0" dirty="0">
+                <a:solidFill>
+                  <a:srgbClr val="6B7280"/>
+                </a:solidFill>
+                <a:latin typeface="Segoe UI"/>
+              </a:rPr>
+              <a:t>), a </a:t>
+            </a:r>
+            <a:r>
+              <a:rPr sz="1400" b="0" dirty="0" err="1">
+                <a:solidFill>
+                  <a:srgbClr val="6B7280"/>
+                </a:solidFill>
+                <a:latin typeface="Segoe UI"/>
+              </a:rPr>
+              <a:t>böngésző</a:t>
+            </a:r>
+            <a:r>
+              <a:rPr sz="1400" b="0" dirty="0">
+                <a:solidFill>
+                  <a:srgbClr val="6B7280"/>
+                </a:solidFill>
+                <a:latin typeface="Segoe UI"/>
+              </a:rPr>
+              <a:t> </a:t>
+            </a:r>
+            <a:r>
+              <a:rPr sz="1400" b="0" dirty="0" err="1">
+                <a:solidFill>
+                  <a:srgbClr val="6B7280"/>
+                </a:solidFill>
+                <a:latin typeface="Segoe UI"/>
+              </a:rPr>
+              <a:t>egy</a:t>
+            </a:r>
+            <a:r>
+              <a:rPr sz="1400" b="0" dirty="0">
+                <a:solidFill>
+                  <a:srgbClr val="6B7280"/>
+                </a:solidFill>
+                <a:latin typeface="Segoe UI"/>
+              </a:rPr>
+              <a:t> </a:t>
+            </a:r>
+            <a:r>
+              <a:rPr sz="1400" b="0" dirty="0" err="1">
+                <a:solidFill>
+                  <a:srgbClr val="6B7280"/>
+                </a:solidFill>
+                <a:latin typeface="Segoe UI"/>
+              </a:rPr>
+              <a:t>kérelmet</a:t>
+            </a:r>
+            <a:r>
+              <a:rPr sz="1400" b="0" dirty="0">
+                <a:solidFill>
+                  <a:srgbClr val="6B7280"/>
+                </a:solidFill>
+                <a:latin typeface="Segoe UI"/>
+              </a:rPr>
+              <a:t> </a:t>
+            </a:r>
+            <a:r>
+              <a:rPr sz="1400" b="0" dirty="0" err="1">
+                <a:solidFill>
+                  <a:srgbClr val="6B7280"/>
+                </a:solidFill>
+                <a:latin typeface="Segoe UI"/>
+              </a:rPr>
+              <a:t>küld</a:t>
+            </a:r>
+            <a:r>
+              <a:rPr sz="1400" b="0" dirty="0">
+                <a:solidFill>
+                  <a:srgbClr val="6B7280"/>
+                </a:solidFill>
+                <a:latin typeface="Segoe UI"/>
+              </a:rPr>
+              <a:t> a </a:t>
+            </a:r>
+            <a:r>
+              <a:rPr sz="1400" b="0" dirty="0" err="1">
+                <a:solidFill>
+                  <a:srgbClr val="6B7280"/>
+                </a:solidFill>
+                <a:latin typeface="Segoe UI"/>
+              </a:rPr>
+              <a:t>szervernek</a:t>
+            </a:r>
+            <a:r>
+              <a:rPr sz="1400" b="0" dirty="0">
+                <a:solidFill>
+                  <a:srgbClr val="6B7280"/>
+                </a:solidFill>
+                <a:latin typeface="Segoe UI"/>
+              </a:rPr>
+              <a:t>. </a:t>
+            </a:r>
+            <a:endParaRPr lang="hu-HU" sz="1400" b="0" dirty="0">
+              <a:solidFill>
+                <a:srgbClr val="6B7280"/>
+              </a:solidFill>
+              <a:latin typeface="Segoe UI"/>
+            </a:endParaRPr>
+          </a:p>
+          <a:p>
+            <a:pPr algn="l"/>
+            <a:r>
+              <a:rPr sz="1400" b="0" dirty="0">
+                <a:solidFill>
+                  <a:srgbClr val="6B7280"/>
+                </a:solidFill>
+                <a:latin typeface="Segoe UI"/>
+              </a:rPr>
+              <a:t>A </a:t>
+            </a:r>
+            <a:r>
+              <a:rPr sz="1400" b="0" dirty="0" err="1">
+                <a:solidFill>
+                  <a:srgbClr val="6B7280"/>
+                </a:solidFill>
+                <a:latin typeface="Segoe UI"/>
+              </a:rPr>
+              <a:t>szerver</a:t>
+            </a:r>
+            <a:r>
+              <a:rPr sz="1400" b="0" dirty="0">
+                <a:solidFill>
+                  <a:srgbClr val="6B7280"/>
+                </a:solidFill>
+                <a:latin typeface="Segoe UI"/>
+              </a:rPr>
+              <a:t> </a:t>
+            </a:r>
+            <a:r>
+              <a:rPr sz="1400" b="0" dirty="0" err="1">
+                <a:solidFill>
+                  <a:srgbClr val="6B7280"/>
+                </a:solidFill>
+                <a:latin typeface="Segoe UI"/>
+              </a:rPr>
+              <a:t>feldolgozza</a:t>
+            </a:r>
+            <a:r>
+              <a:rPr sz="1400" b="0" dirty="0">
+                <a:solidFill>
+                  <a:srgbClr val="6B7280"/>
+                </a:solidFill>
+                <a:latin typeface="Segoe UI"/>
+              </a:rPr>
+              <a:t> a </a:t>
+            </a:r>
+            <a:r>
+              <a:rPr sz="1400" b="0" dirty="0" err="1">
+                <a:solidFill>
+                  <a:srgbClr val="6B7280"/>
+                </a:solidFill>
+                <a:latin typeface="Segoe UI"/>
+              </a:rPr>
+              <a:t>kérelmet</a:t>
+            </a:r>
+            <a:r>
+              <a:rPr sz="1400" b="0" dirty="0">
+                <a:solidFill>
+                  <a:srgbClr val="6B7280"/>
+                </a:solidFill>
+                <a:latin typeface="Segoe UI"/>
+              </a:rPr>
+              <a:t>, </a:t>
+            </a:r>
+            <a:r>
+              <a:rPr sz="1400" b="0" dirty="0" err="1">
+                <a:solidFill>
+                  <a:srgbClr val="6B7280"/>
+                </a:solidFill>
+                <a:latin typeface="Segoe UI"/>
+              </a:rPr>
+              <a:t>szükséges</a:t>
+            </a:r>
+            <a:r>
+              <a:rPr sz="1400" b="0" dirty="0">
+                <a:solidFill>
+                  <a:srgbClr val="6B7280"/>
+                </a:solidFill>
+                <a:latin typeface="Segoe UI"/>
+              </a:rPr>
+              <a:t> </a:t>
+            </a:r>
+            <a:r>
+              <a:rPr sz="1400" b="0" dirty="0" err="1">
+                <a:solidFill>
+                  <a:srgbClr val="6B7280"/>
+                </a:solidFill>
+                <a:latin typeface="Segoe UI"/>
+              </a:rPr>
+              <a:t>esetén</a:t>
+            </a:r>
+            <a:r>
+              <a:rPr sz="1400" b="0" dirty="0">
+                <a:solidFill>
+                  <a:srgbClr val="6B7280"/>
+                </a:solidFill>
+                <a:latin typeface="Segoe UI"/>
+              </a:rPr>
+              <a:t> </a:t>
+            </a:r>
+            <a:r>
+              <a:rPr sz="1400" b="0" dirty="0" err="1">
+                <a:solidFill>
+                  <a:srgbClr val="6B7280"/>
+                </a:solidFill>
+                <a:latin typeface="Segoe UI"/>
+              </a:rPr>
+              <a:t>adatot</a:t>
+            </a:r>
+            <a:r>
+              <a:rPr sz="1400" b="0" dirty="0">
+                <a:solidFill>
+                  <a:srgbClr val="6B7280"/>
+                </a:solidFill>
+                <a:latin typeface="Segoe UI"/>
+              </a:rPr>
+              <a:t> </a:t>
+            </a:r>
+            <a:r>
+              <a:rPr sz="1400" b="0" dirty="0" err="1">
+                <a:solidFill>
+                  <a:srgbClr val="6B7280"/>
+                </a:solidFill>
+                <a:latin typeface="Segoe UI"/>
+              </a:rPr>
+              <a:t>olvas</a:t>
+            </a:r>
+            <a:r>
+              <a:rPr sz="1400" b="0" dirty="0">
+                <a:solidFill>
+                  <a:srgbClr val="6B7280"/>
+                </a:solidFill>
+                <a:latin typeface="Segoe UI"/>
+              </a:rPr>
+              <a:t> </a:t>
+            </a:r>
+            <a:r>
+              <a:rPr sz="1400" b="0" dirty="0" err="1">
+                <a:solidFill>
+                  <a:srgbClr val="6B7280"/>
+                </a:solidFill>
+                <a:latin typeface="Segoe UI"/>
+              </a:rPr>
+              <a:t>vagy</a:t>
+            </a:r>
+            <a:r>
+              <a:rPr sz="1400" b="0" dirty="0">
+                <a:solidFill>
+                  <a:srgbClr val="6B7280"/>
+                </a:solidFill>
+                <a:latin typeface="Segoe UI"/>
+              </a:rPr>
+              <a:t> </a:t>
+            </a:r>
+            <a:r>
+              <a:rPr sz="1400" b="0" dirty="0" err="1">
+                <a:solidFill>
+                  <a:srgbClr val="6B7280"/>
+                </a:solidFill>
+                <a:latin typeface="Segoe UI"/>
+              </a:rPr>
+              <a:t>ír</a:t>
+            </a:r>
+            <a:r>
+              <a:rPr sz="1400" b="0" dirty="0">
+                <a:solidFill>
+                  <a:srgbClr val="6B7280"/>
+                </a:solidFill>
+                <a:latin typeface="Segoe UI"/>
+              </a:rPr>
+              <a:t> </a:t>
+            </a:r>
+            <a:r>
+              <a:rPr sz="1400" b="0" dirty="0" err="1">
+                <a:solidFill>
+                  <a:srgbClr val="6B7280"/>
+                </a:solidFill>
+                <a:latin typeface="Segoe UI"/>
+              </a:rPr>
+              <a:t>az</a:t>
+            </a:r>
+            <a:r>
+              <a:rPr sz="1400" b="0" dirty="0">
+                <a:solidFill>
+                  <a:srgbClr val="6B7280"/>
+                </a:solidFill>
+                <a:latin typeface="Segoe UI"/>
+              </a:rPr>
+              <a:t> </a:t>
+            </a:r>
+            <a:r>
+              <a:rPr sz="1400" b="0" dirty="0" err="1">
+                <a:solidFill>
+                  <a:srgbClr val="6B7280"/>
+                </a:solidFill>
+                <a:latin typeface="Segoe UI"/>
+              </a:rPr>
+              <a:t>adatbázisba</a:t>
+            </a:r>
+            <a:r>
+              <a:rPr sz="1400" b="0" dirty="0">
+                <a:solidFill>
+                  <a:srgbClr val="6B7280"/>
+                </a:solidFill>
+                <a:latin typeface="Segoe UI"/>
+              </a:rPr>
+              <a:t>, </a:t>
+            </a:r>
+            <a:r>
+              <a:rPr sz="1400" b="0" dirty="0" err="1">
+                <a:solidFill>
+                  <a:srgbClr val="6B7280"/>
+                </a:solidFill>
+                <a:latin typeface="Segoe UI"/>
+              </a:rPr>
+              <a:t>és</a:t>
+            </a:r>
+            <a:r>
+              <a:rPr sz="1400" b="0" dirty="0">
+                <a:solidFill>
+                  <a:srgbClr val="6B7280"/>
+                </a:solidFill>
+                <a:latin typeface="Segoe UI"/>
+              </a:rPr>
+              <a:t> </a:t>
+            </a:r>
+            <a:r>
+              <a:rPr sz="1400" b="0" dirty="0" err="1">
+                <a:solidFill>
+                  <a:srgbClr val="6B7280"/>
+                </a:solidFill>
+                <a:latin typeface="Segoe UI"/>
+              </a:rPr>
+              <a:t>visszaküldi</a:t>
+            </a:r>
+            <a:r>
+              <a:rPr sz="1400" b="0" dirty="0">
+                <a:solidFill>
+                  <a:srgbClr val="6B7280"/>
+                </a:solidFill>
+                <a:latin typeface="Segoe UI"/>
+              </a:rPr>
+              <a:t> a </a:t>
+            </a:r>
+            <a:r>
+              <a:rPr sz="1400" b="0" dirty="0" err="1">
+                <a:solidFill>
+                  <a:srgbClr val="6B7280"/>
+                </a:solidFill>
+                <a:latin typeface="Segoe UI"/>
+              </a:rPr>
+              <a:t>választ</a:t>
+            </a:r>
+            <a:r>
+              <a:rPr sz="1400" b="0" dirty="0">
+                <a:solidFill>
+                  <a:srgbClr val="6B7280"/>
+                </a:solidFill>
+                <a:latin typeface="Segoe UI"/>
+              </a:rPr>
+              <a:t> a </a:t>
+            </a:r>
+            <a:r>
+              <a:rPr sz="1400" b="0" dirty="0" err="1">
+                <a:solidFill>
+                  <a:srgbClr val="6B7280"/>
+                </a:solidFill>
+                <a:latin typeface="Segoe UI"/>
+              </a:rPr>
+              <a:t>böngészőbe</a:t>
+            </a:r>
+            <a:r>
+              <a:rPr sz="1400" b="0" dirty="0">
+                <a:solidFill>
+                  <a:srgbClr val="6B7280"/>
+                </a:solidFill>
+                <a:latin typeface="Segoe UI"/>
+              </a:rPr>
+              <a:t>.</a:t>
+            </a:r>
+          </a:p>
+        </p:txBody>
+      </p:sp>
+      <p:sp>
+        <p:nvSpPr>
+          <p:cNvPr id="12" name="Téglalap 11">
+            <a:extLst>
+              <a:ext uri="{FF2B5EF4-FFF2-40B4-BE49-F238E27FC236}">
+                <a16:creationId xmlns:a16="http://schemas.microsoft.com/office/drawing/2014/main" id="{D46DDC98-B019-4D7C-BD1C-6B79FDE1913D}"/>
+              </a:ext>
+            </a:extLst>
+          </p:cNvPr>
+          <p:cNvSpPr/>
+          <p:nvPr/>
+        </p:nvSpPr>
+        <p:spPr>
+          <a:xfrm>
+            <a:off x="0" y="6750800"/>
+            <a:ext cx="12192000" cy="107199"/>
+          </a:xfrm>
+          <a:prstGeom prst="rect">
+            <a:avLst/>
+          </a:prstGeom>
+        </p:spPr>
+        <p:style>
+          <a:lnRef idx="1">
+            <a:schemeClr val="accent5"/>
+          </a:lnRef>
+          <a:fillRef idx="3">
+            <a:schemeClr val="accent5"/>
+          </a:fillRef>
+          <a:effectRef idx="2">
+            <a:schemeClr val="accent5"/>
+          </a:effectRef>
+          <a:fontRef idx="minor">
+            <a:schemeClr val="lt1"/>
+          </a:fontRef>
+        </p:style>
+        <p:txBody>
+          <a:bodyPr rtlCol="0" anchor="ctr"/>
+          <a:lstStyle/>
+          <a:p>
+            <a:pPr algn="ctr"/>
+            <a:endParaRPr lang="hu-HU"/>
           </a:p>
         </p:txBody>
       </p:sp>

--- a/Tanfolyamok_prezentacio.pptx
+++ b/Tanfolyamok_prezentacio.pptx
@@ -4002,8 +4002,8 @@
         </p:nvSpPr>
         <p:spPr>
           <a:xfrm>
-            <a:off x="0" y="6687671"/>
-            <a:ext cx="12192000" cy="170329"/>
+            <a:off x="0" y="6750800"/>
+            <a:ext cx="12192000" cy="107200"/>
           </a:xfrm>
           <a:prstGeom prst="rect">
             <a:avLst/>
